--- a/content/05-teaching-resources/slides/specialism/02-team-roles-and-project-methodologies.pptx
+++ b/content/05-teaching-resources/slides/specialism/02-team-roles-and-project-methodologies.pptx
@@ -10,10 +10,16 @@
     <p:sldId id="258" r:id="rId9"/>
     <p:sldId id="259" r:id="rId10"/>
     <p:sldId id="260" r:id="rId11"/>
-    <p:sldId id="261" r:id="rId12"/>
+    <p:sldId id="261" r:id="rId13"/>
     <p:sldId id="262" r:id="rId14"/>
     <p:sldId id="263" r:id="rId15"/>
     <p:sldId id="264" r:id="rId16"/>
+    <p:sldId id="265" r:id="rId17"/>
+    <p:sldId id="266" r:id="rId18"/>
+    <p:sldId id="267" r:id="rId19"/>
+    <p:sldId id="268" r:id="rId20"/>
+    <p:sldId id="269" r:id="rId21"/>
+    <p:sldId id="270" r:id="rId22"/>
   </p:sldIdLst>
   <p:sldSz cx="12191695" cy="6858000" type="screen4x3"/>
   <p:notesSz cx="6858000" cy="9144000"/>
@@ -510,7 +516,22 @@
           <a:lstStyle/>
           <a:p>
             <a:r>
-              <a:t>Give students a few minutes to answer on mini whiteboards or paper, then reveal the answers on the next slide.</a:t>
+              <a:t>Answers:</a:t>
+            </a:r>
+          </a:p>
+          <a:p>
+            <a:r>
+              <a:t>1. The product owner or client.</a:t>
+            </a:r>
+          </a:p>
+          <a:p>
+            <a:r>
+              <a:t>2. Keeps the team cohesive and removes obstacles.</a:t>
+            </a:r>
+          </a:p>
+          <a:p>
+            <a:r>
+              <a:t>3. Researches users and designs the interface.</a:t>
             </a:r>
           </a:p>
         </p:txBody>
@@ -580,7 +601,22 @@
           <a:lstStyle/>
           <a:p>
             <a:r>
-              <a:t>Talk through any answers the class found difficult.</a:t>
+              <a:t>Answers:</a:t>
+            </a:r>
+          </a:p>
+          <a:p>
+            <a:r>
+              <a:t>1. A large feature made up of many stories.</a:t>
+            </a:r>
+          </a:p>
+          <a:p>
+            <a:r>
+              <a:t>2. Working software only arrives at the end.</a:t>
+            </a:r>
+          </a:p>
+          <a:p>
+            <a:r>
+              <a:t>3. When requirements are fixed and well understood.</a:t>
             </a:r>
           </a:p>
         </p:txBody>
@@ -606,6 +642,231 @@
 </file>
 
 <file path=ppt/notesSlides/notesSlide3.xml><?xml version="1.0" encoding="utf-8"?>
+<p:notes xmlns:a="http://schemas.openxmlformats.org/drawingml/2006/main" xmlns:p="http://schemas.openxmlformats.org/presentationml/2006/main" xmlns:r="http://schemas.openxmlformats.org/officeDocument/2006/relationships">
+  <p:cSld>
+    <p:spTree>
+      <p:nvGrpSpPr>
+        <p:cNvPr id="1" name=""/>
+        <p:cNvGrpSpPr/>
+        <p:nvPr/>
+      </p:nvGrpSpPr>
+      <p:grpSpPr>
+        <a:xfrm>
+          <a:off x="0" y="0"/>
+          <a:ext cx="0" cy="0"/>
+          <a:chOff x="0" y="0"/>
+          <a:chExt cx="0" cy="0"/>
+        </a:xfrm>
+      </p:grpSpPr>
+      <p:sp>
+        <p:nvSpPr>
+          <p:cNvPr id="2" name="Slide Image Placeholder 1"/>
+          <p:cNvSpPr>
+            <a:spLocks noGrp="1"/>
+          </p:cNvSpPr>
+          <p:nvPr>
+            <p:ph type="sldImg" idx="2"/>
+          </p:nvPr>
+        </p:nvSpPr>
+        <p:spPr/>
+      </p:sp>
+      <p:sp>
+        <p:nvSpPr>
+          <p:cNvPr id="3" name="Notes Placeholder 2"/>
+          <p:cNvSpPr>
+            <a:spLocks noGrp="1"/>
+          </p:cNvSpPr>
+          <p:nvPr>
+            <p:ph type="body" idx="3" sz="quarter"/>
+          </p:nvPr>
+        </p:nvSpPr>
+        <p:spPr/>
+        <p:txBody>
+          <a:bodyPr/>
+          <a:lstStyle/>
+          <a:p>
+            <a:r>
+              <a:t>Answers:</a:t>
+            </a:r>
+          </a:p>
+          <a:p>
+            <a:r>
+              <a:t>1. RAD.</a:t>
+            </a:r>
+          </a:p>
+          <a:p>
+            <a:r>
+              <a:t>2. Waste.</a:t>
+            </a:r>
+          </a:p>
+          <a:p>
+            <a:r>
+              <a:t>3. Empathetic, iterative, interdisciplinary.</a:t>
+            </a:r>
+          </a:p>
+        </p:txBody>
+      </p:sp>
+      <p:sp>
+        <p:nvSpPr>
+          <p:cNvPr id="4" name="Slide Number Placeholder 3"/>
+          <p:cNvSpPr>
+            <a:spLocks noGrp="1"/>
+          </p:cNvSpPr>
+          <p:nvPr>
+            <p:ph type="sldNum" idx="5" sz="quarter"/>
+          </p:nvPr>
+        </p:nvSpPr>
+        <p:spPr/>
+      </p:sp>
+    </p:spTree>
+  </p:cSld>
+  <p:clrMapOvr>
+    <a:masterClrMapping/>
+  </p:clrMapOvr>
+</p:notes>
+</file>
+
+<file path=ppt/notesSlides/notesSlide4.xml><?xml version="1.0" encoding="utf-8"?>
+<p:notes xmlns:a="http://schemas.openxmlformats.org/drawingml/2006/main" xmlns:p="http://schemas.openxmlformats.org/presentationml/2006/main" xmlns:r="http://schemas.openxmlformats.org/officeDocument/2006/relationships">
+  <p:cSld>
+    <p:spTree>
+      <p:nvGrpSpPr>
+        <p:cNvPr id="1" name=""/>
+        <p:cNvGrpSpPr/>
+        <p:nvPr/>
+      </p:nvGrpSpPr>
+      <p:grpSpPr>
+        <a:xfrm>
+          <a:off x="0" y="0"/>
+          <a:ext cx="0" cy="0"/>
+          <a:chOff x="0" y="0"/>
+          <a:chExt cx="0" cy="0"/>
+        </a:xfrm>
+      </p:grpSpPr>
+      <p:sp>
+        <p:nvSpPr>
+          <p:cNvPr id="2" name="Slide Image Placeholder 1"/>
+          <p:cNvSpPr>
+            <a:spLocks noGrp="1"/>
+          </p:cNvSpPr>
+          <p:nvPr>
+            <p:ph type="sldImg" idx="2"/>
+          </p:nvPr>
+        </p:nvSpPr>
+        <p:spPr/>
+      </p:sp>
+      <p:sp>
+        <p:nvSpPr>
+          <p:cNvPr id="3" name="Notes Placeholder 2"/>
+          <p:cNvSpPr>
+            <a:spLocks noGrp="1"/>
+          </p:cNvSpPr>
+          <p:nvPr>
+            <p:ph type="body" idx="3" sz="quarter"/>
+          </p:nvPr>
+        </p:nvSpPr>
+        <p:spPr/>
+        <p:txBody>
+          <a:bodyPr/>
+          <a:lstStyle/>
+          <a:p>
+            <a:r>
+              <a:t>Give students a few minutes to answer on mini whiteboards or paper, then reveal the answers on the next slide.</a:t>
+            </a:r>
+          </a:p>
+        </p:txBody>
+      </p:sp>
+      <p:sp>
+        <p:nvSpPr>
+          <p:cNvPr id="4" name="Slide Number Placeholder 3"/>
+          <p:cNvSpPr>
+            <a:spLocks noGrp="1"/>
+          </p:cNvSpPr>
+          <p:nvPr>
+            <p:ph type="sldNum" idx="5" sz="quarter"/>
+          </p:nvPr>
+        </p:nvSpPr>
+        <p:spPr/>
+      </p:sp>
+    </p:spTree>
+  </p:cSld>
+  <p:clrMapOvr>
+    <a:masterClrMapping/>
+  </p:clrMapOvr>
+</p:notes>
+</file>
+
+<file path=ppt/notesSlides/notesSlide5.xml><?xml version="1.0" encoding="utf-8"?>
+<p:notes xmlns:a="http://schemas.openxmlformats.org/drawingml/2006/main" xmlns:p="http://schemas.openxmlformats.org/presentationml/2006/main" xmlns:r="http://schemas.openxmlformats.org/officeDocument/2006/relationships">
+  <p:cSld>
+    <p:spTree>
+      <p:nvGrpSpPr>
+        <p:cNvPr id="1" name=""/>
+        <p:cNvGrpSpPr/>
+        <p:nvPr/>
+      </p:nvGrpSpPr>
+      <p:grpSpPr>
+        <a:xfrm>
+          <a:off x="0" y="0"/>
+          <a:ext cx="0" cy="0"/>
+          <a:chOff x="0" y="0"/>
+          <a:chExt cx="0" cy="0"/>
+        </a:xfrm>
+      </p:grpSpPr>
+      <p:sp>
+        <p:nvSpPr>
+          <p:cNvPr id="2" name="Slide Image Placeholder 1"/>
+          <p:cNvSpPr>
+            <a:spLocks noGrp="1"/>
+          </p:cNvSpPr>
+          <p:nvPr>
+            <p:ph type="sldImg" idx="2"/>
+          </p:nvPr>
+        </p:nvSpPr>
+        <p:spPr/>
+      </p:sp>
+      <p:sp>
+        <p:nvSpPr>
+          <p:cNvPr id="3" name="Notes Placeholder 2"/>
+          <p:cNvSpPr>
+            <a:spLocks noGrp="1"/>
+          </p:cNvSpPr>
+          <p:nvPr>
+            <p:ph type="body" idx="3" sz="quarter"/>
+          </p:nvPr>
+        </p:nvSpPr>
+        <p:spPr/>
+        <p:txBody>
+          <a:bodyPr/>
+          <a:lstStyle/>
+          <a:p>
+            <a:r>
+              <a:t>Talk through any answers the class found difficult.</a:t>
+            </a:r>
+          </a:p>
+        </p:txBody>
+      </p:sp>
+      <p:sp>
+        <p:nvSpPr>
+          <p:cNvPr id="4" name="Slide Number Placeholder 3"/>
+          <p:cNvSpPr>
+            <a:spLocks noGrp="1"/>
+          </p:cNvSpPr>
+          <p:nvPr>
+            <p:ph type="sldNum" idx="5" sz="quarter"/>
+          </p:nvPr>
+        </p:nvSpPr>
+        <p:spPr/>
+      </p:sp>
+    </p:spTree>
+  </p:cSld>
+  <p:clrMapOvr>
+    <a:masterClrMapping/>
+  </p:clrMapOvr>
+</p:notes>
+</file>
+
+<file path=ppt/notesSlides/notesSlide6.xml><?xml version="1.0" encoding="utf-8"?>
 <p:notes xmlns:a="http://schemas.openxmlformats.org/drawingml/2006/main" xmlns:p="http://schemas.openxmlformats.org/presentationml/2006/main" xmlns:r="http://schemas.openxmlformats.org/officeDocument/2006/relationships">
   <p:cSld>
     <p:spTree>
@@ -3975,6 +4236,3451 @@
 </p:sld>
 </file>
 
+<file path=ppt/slides/slide10.xml><?xml version="1.0" encoding="utf-8"?>
+<p:sld xmlns:a="http://schemas.openxmlformats.org/drawingml/2006/main" xmlns:p="http://schemas.openxmlformats.org/presentationml/2006/main" xmlns:r="http://schemas.openxmlformats.org/officeDocument/2006/relationships">
+  <p:cSld>
+    <p:bg>
+      <p:bgPr>
+        <a:solidFill>
+          <a:srgbClr val="FFFFFF"/>
+        </a:solidFill>
+        <a:effectLst/>
+      </p:bgPr>
+    </p:bg>
+    <p:spTree>
+      <p:nvGrpSpPr>
+        <p:cNvPr id="1" name=""/>
+        <p:cNvGrpSpPr/>
+        <p:nvPr/>
+      </p:nvGrpSpPr>
+      <p:grpSpPr/>
+      <p:sp>
+        <p:nvSpPr>
+          <p:cNvPr id="2" name="TextBox 1"/>
+          <p:cNvSpPr txBox="1"/>
+          <p:nvPr/>
+        </p:nvSpPr>
+        <p:spPr>
+          <a:xfrm>
+            <a:off x="548640" y="320040"/>
+            <a:ext cx="11094415" cy="274320"/>
+          </a:xfrm>
+          <a:prstGeom prst="rect">
+            <a:avLst/>
+          </a:prstGeom>
+          <a:noFill/>
+        </p:spPr>
+        <p:txBody>
+          <a:bodyPr wrap="square" anchor="t" lIns="0" rIns="0" tIns="0" bIns="0"/>
+          <a:lstStyle/>
+          <a:p>
+            <a:pPr algn="l"/>
+            <a:r>
+              <a:rPr sz="1100" b="1" i="0">
+                <a:solidFill>
+                  <a:srgbClr val="54595D"/>
+                </a:solidFill>
+                <a:latin typeface="Calibri"/>
+              </a:rPr>
+              <a:t>OCCUPATIONAL SPECIALISM  ·  Specialism Content Area 1</a:t>
+            </a:r>
+          </a:p>
+        </p:txBody>
+      </p:sp>
+      <p:sp>
+        <p:nvSpPr>
+          <p:cNvPr id="3" name="TextBox 2"/>
+          <p:cNvSpPr txBox="1"/>
+          <p:nvPr/>
+        </p:nvSpPr>
+        <p:spPr>
+          <a:xfrm>
+            <a:off x="548640" y="566928"/>
+            <a:ext cx="11094415" cy="822960"/>
+          </a:xfrm>
+          <a:prstGeom prst="rect">
+            <a:avLst/>
+          </a:prstGeom>
+          <a:noFill/>
+        </p:spPr>
+        <p:txBody>
+          <a:bodyPr wrap="square" anchor="ctr" lIns="0" rIns="0" tIns="0" bIns="0"/>
+          <a:lstStyle/>
+          <a:p>
+            <a:pPr algn="l"/>
+            <a:r>
+              <a:rPr sz="3200" b="1" i="0">
+                <a:solidFill>
+                  <a:srgbClr val="03306E"/>
+                </a:solidFill>
+                <a:latin typeface="Cambria"/>
+              </a:rPr>
+              <a:t>Other methodologies</a:t>
+            </a:r>
+          </a:p>
+        </p:txBody>
+      </p:sp>
+      <p:sp>
+        <p:nvSpPr>
+          <p:cNvPr id="4" name="TextBox 3"/>
+          <p:cNvSpPr txBox="1"/>
+          <p:nvPr/>
+        </p:nvSpPr>
+        <p:spPr>
+          <a:xfrm>
+            <a:off x="548640" y="6446520"/>
+            <a:ext cx="8229600" cy="274320"/>
+          </a:xfrm>
+          <a:prstGeom prst="rect">
+            <a:avLst/>
+          </a:prstGeom>
+          <a:noFill/>
+        </p:spPr>
+        <p:txBody>
+          <a:bodyPr wrap="square" anchor="t" lIns="0" rIns="0" tIns="0" bIns="0"/>
+          <a:lstStyle/>
+          <a:p>
+            <a:pPr algn="l"/>
+            <a:r>
+              <a:rPr sz="1000" b="0" i="0">
+                <a:solidFill>
+                  <a:srgbClr val="54595D"/>
+                </a:solidFill>
+                <a:latin typeface="Calibri"/>
+              </a:rPr>
+              <a:t>Digital Software Development T Level  ·  Team Roles and Project Methodologies</a:t>
+            </a:r>
+          </a:p>
+        </p:txBody>
+      </p:sp>
+      <p:sp>
+        <p:nvSpPr>
+          <p:cNvPr id="5" name="TextBox 4"/>
+          <p:cNvSpPr txBox="1"/>
+          <p:nvPr/>
+        </p:nvSpPr>
+        <p:spPr>
+          <a:xfrm>
+            <a:off x="10728655" y="6446520"/>
+            <a:ext cx="914400" cy="274320"/>
+          </a:xfrm>
+          <a:prstGeom prst="rect">
+            <a:avLst/>
+          </a:prstGeom>
+          <a:noFill/>
+        </p:spPr>
+        <p:txBody>
+          <a:bodyPr wrap="square" anchor="t" lIns="0" rIns="0" tIns="0" bIns="0"/>
+          <a:lstStyle/>
+          <a:p>
+            <a:pPr algn="r"/>
+            <a:r>
+              <a:rPr sz="1000" b="0" i="0">
+                <a:solidFill>
+                  <a:srgbClr val="54595D"/>
+                </a:solidFill>
+                <a:latin typeface="Calibri"/>
+              </a:rPr>
+              <a:t>10</a:t>
+            </a:r>
+          </a:p>
+        </p:txBody>
+      </p:sp>
+      <p:sp>
+        <p:nvSpPr>
+          <p:cNvPr id="6" name="Rounded Rectangle 5"/>
+          <p:cNvSpPr/>
+          <p:nvPr/>
+        </p:nvSpPr>
+        <p:spPr>
+          <a:xfrm>
+            <a:off x="548640" y="1600200"/>
+            <a:ext cx="3515258" cy="4572000"/>
+          </a:xfrm>
+          <a:prstGeom prst="roundRect">
+            <a:avLst>
+              <a:gd name="adj" fmla="val 6000"/>
+            </a:avLst>
+          </a:prstGeom>
+          <a:solidFill>
+            <a:srgbClr val="EAF3FF"/>
+          </a:solidFill>
+          <a:ln>
+            <a:noFill/>
+          </a:ln>
+          <a:effectLst/>
+        </p:spPr>
+        <p:style>
+          <a:lnRef idx="1">
+            <a:schemeClr val="accent1"/>
+          </a:lnRef>
+          <a:fillRef idx="3">
+            <a:schemeClr val="accent1"/>
+          </a:fillRef>
+          <a:effectRef idx="2">
+            <a:schemeClr val="accent1"/>
+          </a:effectRef>
+          <a:fontRef idx="minor">
+            <a:schemeClr val="lt1"/>
+          </a:fontRef>
+        </p:style>
+        <p:txBody>
+          <a:bodyPr rtlCol="0" anchor="ctr"/>
+          <a:lstStyle/>
+          <a:p/>
+        </p:txBody>
+      </p:sp>
+      <p:sp>
+        <p:nvSpPr>
+          <p:cNvPr id="7" name="Oval 6"/>
+          <p:cNvSpPr/>
+          <p:nvPr/>
+        </p:nvSpPr>
+        <p:spPr>
+          <a:xfrm>
+            <a:off x="777240" y="1828800"/>
+            <a:ext cx="457200" cy="457200"/>
+          </a:xfrm>
+          <a:prstGeom prst="ellipse">
+            <a:avLst/>
+          </a:prstGeom>
+          <a:solidFill>
+            <a:srgbClr val="33C17A"/>
+          </a:solidFill>
+          <a:ln>
+            <a:noFill/>
+          </a:ln>
+          <a:effectLst/>
+        </p:spPr>
+        <p:style>
+          <a:lnRef idx="1">
+            <a:schemeClr val="accent1"/>
+          </a:lnRef>
+          <a:fillRef idx="3">
+            <a:schemeClr val="accent1"/>
+          </a:fillRef>
+          <a:effectRef idx="2">
+            <a:schemeClr val="accent1"/>
+          </a:effectRef>
+          <a:fontRef idx="minor">
+            <a:schemeClr val="lt1"/>
+          </a:fontRef>
+        </p:style>
+        <p:txBody>
+          <a:bodyPr rtlCol="0" anchor="ctr" lIns="0" rIns="0" tIns="0" bIns="0"/>
+          <a:lstStyle/>
+          <a:p>
+            <a:pPr algn="ctr"/>
+            <a:r>
+              <a:rPr sz="1500" b="1">
+                <a:solidFill>
+                  <a:srgbClr val="202122"/>
+                </a:solidFill>
+                <a:latin typeface="Calibri"/>
+              </a:rPr>
+              <a:t>1</a:t>
+            </a:r>
+          </a:p>
+        </p:txBody>
+      </p:sp>
+      <p:sp>
+        <p:nvSpPr>
+          <p:cNvPr id="8" name="TextBox 7"/>
+          <p:cNvSpPr txBox="1"/>
+          <p:nvPr/>
+        </p:nvSpPr>
+        <p:spPr>
+          <a:xfrm>
+            <a:off x="1371600" y="1801368"/>
+            <a:ext cx="2509418" cy="512064"/>
+          </a:xfrm>
+          <a:prstGeom prst="rect">
+            <a:avLst/>
+          </a:prstGeom>
+          <a:noFill/>
+        </p:spPr>
+        <p:txBody>
+          <a:bodyPr wrap="square" anchor="ctr" lIns="0" rIns="0" tIns="0" bIns="0"/>
+          <a:lstStyle/>
+          <a:p>
+            <a:pPr algn="l"/>
+            <a:r>
+              <a:rPr sz="1900" b="1" i="0">
+                <a:solidFill>
+                  <a:srgbClr val="03306E"/>
+                </a:solidFill>
+                <a:latin typeface="Calibri"/>
+              </a:rPr>
+              <a:t>RAD</a:t>
+            </a:r>
+          </a:p>
+        </p:txBody>
+      </p:sp>
+      <p:sp>
+        <p:nvSpPr>
+          <p:cNvPr id="9" name="TextBox 8"/>
+          <p:cNvSpPr txBox="1"/>
+          <p:nvPr/>
+        </p:nvSpPr>
+        <p:spPr>
+          <a:xfrm>
+            <a:off x="777240" y="2468880"/>
+            <a:ext cx="3058058" cy="3566160"/>
+          </a:xfrm>
+          <a:prstGeom prst="rect">
+            <a:avLst/>
+          </a:prstGeom>
+          <a:noFill/>
+        </p:spPr>
+        <p:txBody>
+          <a:bodyPr wrap="square" anchor="t" lIns="0" rIns="0" tIns="0" bIns="0"/>
+          <a:lstStyle/>
+          <a:p>
+            <a:pPr algn="l"/>
+            <a:r>
+              <a:rPr sz="2000" b="0" i="0">
+                <a:solidFill>
+                  <a:srgbClr val="202122"/>
+                </a:solidFill>
+                <a:latin typeface="Calibri"/>
+              </a:rPr>
+              <a:t>Fast prototypes improved systematically. Features before quality, heavy code reuse. Small to medium projects.</a:t>
+            </a:r>
+          </a:p>
+        </p:txBody>
+      </p:sp>
+      <p:sp>
+        <p:nvSpPr>
+          <p:cNvPr id="10" name="Rounded Rectangle 9"/>
+          <p:cNvSpPr/>
+          <p:nvPr/>
+        </p:nvSpPr>
+        <p:spPr>
+          <a:xfrm>
+            <a:off x="4338218" y="1600200"/>
+            <a:ext cx="3515258" cy="4572000"/>
+          </a:xfrm>
+          <a:prstGeom prst="roundRect">
+            <a:avLst>
+              <a:gd name="adj" fmla="val 6000"/>
+            </a:avLst>
+          </a:prstGeom>
+          <a:solidFill>
+            <a:srgbClr val="EAF3FF"/>
+          </a:solidFill>
+          <a:ln>
+            <a:noFill/>
+          </a:ln>
+          <a:effectLst/>
+        </p:spPr>
+        <p:style>
+          <a:lnRef idx="1">
+            <a:schemeClr val="accent1"/>
+          </a:lnRef>
+          <a:fillRef idx="3">
+            <a:schemeClr val="accent1"/>
+          </a:fillRef>
+          <a:effectRef idx="2">
+            <a:schemeClr val="accent1"/>
+          </a:effectRef>
+          <a:fontRef idx="minor">
+            <a:schemeClr val="lt1"/>
+          </a:fontRef>
+        </p:style>
+        <p:txBody>
+          <a:bodyPr rtlCol="0" anchor="ctr"/>
+          <a:lstStyle/>
+          <a:p/>
+        </p:txBody>
+      </p:sp>
+      <p:sp>
+        <p:nvSpPr>
+          <p:cNvPr id="11" name="Oval 10"/>
+          <p:cNvSpPr/>
+          <p:nvPr/>
+        </p:nvSpPr>
+        <p:spPr>
+          <a:xfrm>
+            <a:off x="4566818" y="1828800"/>
+            <a:ext cx="457200" cy="457200"/>
+          </a:xfrm>
+          <a:prstGeom prst="ellipse">
+            <a:avLst/>
+          </a:prstGeom>
+          <a:solidFill>
+            <a:srgbClr val="33C17A"/>
+          </a:solidFill>
+          <a:ln>
+            <a:noFill/>
+          </a:ln>
+          <a:effectLst/>
+        </p:spPr>
+        <p:style>
+          <a:lnRef idx="1">
+            <a:schemeClr val="accent1"/>
+          </a:lnRef>
+          <a:fillRef idx="3">
+            <a:schemeClr val="accent1"/>
+          </a:fillRef>
+          <a:effectRef idx="2">
+            <a:schemeClr val="accent1"/>
+          </a:effectRef>
+          <a:fontRef idx="minor">
+            <a:schemeClr val="lt1"/>
+          </a:fontRef>
+        </p:style>
+        <p:txBody>
+          <a:bodyPr rtlCol="0" anchor="ctr" lIns="0" rIns="0" tIns="0" bIns="0"/>
+          <a:lstStyle/>
+          <a:p>
+            <a:pPr algn="ctr"/>
+            <a:r>
+              <a:rPr sz="1500" b="1">
+                <a:solidFill>
+                  <a:srgbClr val="202122"/>
+                </a:solidFill>
+                <a:latin typeface="Calibri"/>
+              </a:rPr>
+              <a:t>2</a:t>
+            </a:r>
+          </a:p>
+        </p:txBody>
+      </p:sp>
+      <p:sp>
+        <p:nvSpPr>
+          <p:cNvPr id="12" name="TextBox 11"/>
+          <p:cNvSpPr txBox="1"/>
+          <p:nvPr/>
+        </p:nvSpPr>
+        <p:spPr>
+          <a:xfrm>
+            <a:off x="5161178" y="1801368"/>
+            <a:ext cx="2509418" cy="512064"/>
+          </a:xfrm>
+          <a:prstGeom prst="rect">
+            <a:avLst/>
+          </a:prstGeom>
+          <a:noFill/>
+        </p:spPr>
+        <p:txBody>
+          <a:bodyPr wrap="square" anchor="ctr" lIns="0" rIns="0" tIns="0" bIns="0"/>
+          <a:lstStyle/>
+          <a:p>
+            <a:pPr algn="l"/>
+            <a:r>
+              <a:rPr sz="1900" b="1" i="0">
+                <a:solidFill>
+                  <a:srgbClr val="03306E"/>
+                </a:solidFill>
+                <a:latin typeface="Calibri"/>
+              </a:rPr>
+              <a:t>Lean</a:t>
+            </a:r>
+          </a:p>
+        </p:txBody>
+      </p:sp>
+      <p:sp>
+        <p:nvSpPr>
+          <p:cNvPr id="13" name="TextBox 12"/>
+          <p:cNvSpPr txBox="1"/>
+          <p:nvPr/>
+        </p:nvSpPr>
+        <p:spPr>
+          <a:xfrm>
+            <a:off x="4566818" y="2468880"/>
+            <a:ext cx="3058058" cy="3566160"/>
+          </a:xfrm>
+          <a:prstGeom prst="rect">
+            <a:avLst/>
+          </a:prstGeom>
+          <a:noFill/>
+        </p:spPr>
+        <p:txBody>
+          <a:bodyPr wrap="square" anchor="t" lIns="0" rIns="0" tIns="0" bIns="0"/>
+          <a:lstStyle/>
+          <a:p>
+            <a:pPr algn="l"/>
+            <a:r>
+              <a:rPr sz="2000" b="0" i="0">
+                <a:solidFill>
+                  <a:srgbClr val="202122"/>
+                </a:solidFill>
+                <a:latin typeface="Calibri"/>
+              </a:rPr>
+              <a:t>Cut waste, defer decisions, short cycles, fit-for-use iterations. Small teams.</a:t>
+            </a:r>
+          </a:p>
+        </p:txBody>
+      </p:sp>
+      <p:sp>
+        <p:nvSpPr>
+          <p:cNvPr id="14" name="Rounded Rectangle 13"/>
+          <p:cNvSpPr/>
+          <p:nvPr/>
+        </p:nvSpPr>
+        <p:spPr>
+          <a:xfrm>
+            <a:off x="8127796" y="1600200"/>
+            <a:ext cx="3515258" cy="4572000"/>
+          </a:xfrm>
+          <a:prstGeom prst="roundRect">
+            <a:avLst>
+              <a:gd name="adj" fmla="val 6000"/>
+            </a:avLst>
+          </a:prstGeom>
+          <a:solidFill>
+            <a:srgbClr val="EAF3FF"/>
+          </a:solidFill>
+          <a:ln>
+            <a:noFill/>
+          </a:ln>
+          <a:effectLst/>
+        </p:spPr>
+        <p:style>
+          <a:lnRef idx="1">
+            <a:schemeClr val="accent1"/>
+          </a:lnRef>
+          <a:fillRef idx="3">
+            <a:schemeClr val="accent1"/>
+          </a:fillRef>
+          <a:effectRef idx="2">
+            <a:schemeClr val="accent1"/>
+          </a:effectRef>
+          <a:fontRef idx="minor">
+            <a:schemeClr val="lt1"/>
+          </a:fontRef>
+        </p:style>
+        <p:txBody>
+          <a:bodyPr rtlCol="0" anchor="ctr"/>
+          <a:lstStyle/>
+          <a:p/>
+        </p:txBody>
+      </p:sp>
+      <p:sp>
+        <p:nvSpPr>
+          <p:cNvPr id="15" name="Oval 14"/>
+          <p:cNvSpPr/>
+          <p:nvPr/>
+        </p:nvSpPr>
+        <p:spPr>
+          <a:xfrm>
+            <a:off x="8356396" y="1828800"/>
+            <a:ext cx="457200" cy="457200"/>
+          </a:xfrm>
+          <a:prstGeom prst="ellipse">
+            <a:avLst/>
+          </a:prstGeom>
+          <a:solidFill>
+            <a:srgbClr val="33C17A"/>
+          </a:solidFill>
+          <a:ln>
+            <a:noFill/>
+          </a:ln>
+          <a:effectLst/>
+        </p:spPr>
+        <p:style>
+          <a:lnRef idx="1">
+            <a:schemeClr val="accent1"/>
+          </a:lnRef>
+          <a:fillRef idx="3">
+            <a:schemeClr val="accent1"/>
+          </a:fillRef>
+          <a:effectRef idx="2">
+            <a:schemeClr val="accent1"/>
+          </a:effectRef>
+          <a:fontRef idx="minor">
+            <a:schemeClr val="lt1"/>
+          </a:fontRef>
+        </p:style>
+        <p:txBody>
+          <a:bodyPr rtlCol="0" anchor="ctr" lIns="0" rIns="0" tIns="0" bIns="0"/>
+          <a:lstStyle/>
+          <a:p>
+            <a:pPr algn="ctr"/>
+            <a:r>
+              <a:rPr sz="1500" b="1">
+                <a:solidFill>
+                  <a:srgbClr val="202122"/>
+                </a:solidFill>
+                <a:latin typeface="Calibri"/>
+              </a:rPr>
+              <a:t>3</a:t>
+            </a:r>
+          </a:p>
+        </p:txBody>
+      </p:sp>
+      <p:sp>
+        <p:nvSpPr>
+          <p:cNvPr id="16" name="TextBox 15"/>
+          <p:cNvSpPr txBox="1"/>
+          <p:nvPr/>
+        </p:nvSpPr>
+        <p:spPr>
+          <a:xfrm>
+            <a:off x="8950756" y="1801368"/>
+            <a:ext cx="2509418" cy="512064"/>
+          </a:xfrm>
+          <a:prstGeom prst="rect">
+            <a:avLst/>
+          </a:prstGeom>
+          <a:noFill/>
+        </p:spPr>
+        <p:txBody>
+          <a:bodyPr wrap="square" anchor="ctr" lIns="0" rIns="0" tIns="0" bIns="0"/>
+          <a:lstStyle/>
+          <a:p>
+            <a:pPr algn="l"/>
+            <a:r>
+              <a:rPr sz="1900" b="1" i="0">
+                <a:solidFill>
+                  <a:srgbClr val="03306E"/>
+                </a:solidFill>
+                <a:latin typeface="Calibri"/>
+              </a:rPr>
+              <a:t>User Centred Design</a:t>
+            </a:r>
+          </a:p>
+        </p:txBody>
+      </p:sp>
+      <p:sp>
+        <p:nvSpPr>
+          <p:cNvPr id="17" name="TextBox 16"/>
+          <p:cNvSpPr txBox="1"/>
+          <p:nvPr/>
+        </p:nvSpPr>
+        <p:spPr>
+          <a:xfrm>
+            <a:off x="8356396" y="2468880"/>
+            <a:ext cx="3058058" cy="3566160"/>
+          </a:xfrm>
+          <a:prstGeom prst="rect">
+            <a:avLst/>
+          </a:prstGeom>
+          <a:noFill/>
+        </p:spPr>
+        <p:txBody>
+          <a:bodyPr wrap="square" anchor="t" lIns="0" rIns="0" tIns="0" bIns="0"/>
+          <a:lstStyle/>
+          <a:p>
+            <a:pPr algn="l"/>
+            <a:r>
+              <a:rPr sz="2000" b="0" i="0">
+                <a:solidFill>
+                  <a:srgbClr val="202122"/>
+                </a:solidFill>
+                <a:latin typeface="Calibri"/>
+              </a:rPr>
+              <a:t>Empathetic, iterative, interdisciplinary: understand, specify, design, assess.</a:t>
+            </a:r>
+          </a:p>
+        </p:txBody>
+      </p:sp>
+    </p:spTree>
+  </p:cSld>
+  <p:clrMapOvr>
+    <a:masterClrMapping/>
+  </p:clrMapOvr>
+</p:sld>
+</file>
+
+<file path=ppt/slides/slide11.xml><?xml version="1.0" encoding="utf-8"?>
+<p:sld xmlns:a="http://schemas.openxmlformats.org/drawingml/2006/main" xmlns:p="http://schemas.openxmlformats.org/presentationml/2006/main" xmlns:r="http://schemas.openxmlformats.org/officeDocument/2006/relationships">
+  <p:cSld>
+    <p:bg>
+      <p:bgPr>
+        <a:solidFill>
+          <a:srgbClr val="FFFFFF"/>
+        </a:solidFill>
+        <a:effectLst/>
+      </p:bgPr>
+    </p:bg>
+    <p:spTree>
+      <p:nvGrpSpPr>
+        <p:cNvPr id="1" name=""/>
+        <p:cNvGrpSpPr/>
+        <p:nvPr/>
+      </p:nvGrpSpPr>
+      <p:grpSpPr/>
+      <p:sp>
+        <p:nvSpPr>
+          <p:cNvPr id="2" name="TextBox 1"/>
+          <p:cNvSpPr txBox="1"/>
+          <p:nvPr/>
+        </p:nvSpPr>
+        <p:spPr>
+          <a:xfrm>
+            <a:off x="548640" y="320040"/>
+            <a:ext cx="11094415" cy="274320"/>
+          </a:xfrm>
+          <a:prstGeom prst="rect">
+            <a:avLst/>
+          </a:prstGeom>
+          <a:noFill/>
+        </p:spPr>
+        <p:txBody>
+          <a:bodyPr wrap="square" anchor="t" lIns="0" rIns="0" tIns="0" bIns="0"/>
+          <a:lstStyle/>
+          <a:p>
+            <a:pPr algn="l"/>
+            <a:r>
+              <a:rPr sz="1100" b="1" i="0">
+                <a:solidFill>
+                  <a:srgbClr val="54595D"/>
+                </a:solidFill>
+                <a:latin typeface="Calibri"/>
+              </a:rPr>
+              <a:t>OCCUPATIONAL SPECIALISM  ·  Specialism Content Area 1</a:t>
+            </a:r>
+          </a:p>
+        </p:txBody>
+      </p:sp>
+      <p:sp>
+        <p:nvSpPr>
+          <p:cNvPr id="3" name="TextBox 2"/>
+          <p:cNvSpPr txBox="1"/>
+          <p:nvPr/>
+        </p:nvSpPr>
+        <p:spPr>
+          <a:xfrm>
+            <a:off x="548640" y="566928"/>
+            <a:ext cx="11094415" cy="822960"/>
+          </a:xfrm>
+          <a:prstGeom prst="rect">
+            <a:avLst/>
+          </a:prstGeom>
+          <a:noFill/>
+        </p:spPr>
+        <p:txBody>
+          <a:bodyPr wrap="square" anchor="ctr" lIns="0" rIns="0" tIns="0" bIns="0"/>
+          <a:lstStyle/>
+          <a:p>
+            <a:pPr algn="l"/>
+            <a:r>
+              <a:rPr sz="3200" b="1" i="0">
+                <a:solidFill>
+                  <a:srgbClr val="03306E"/>
+                </a:solidFill>
+                <a:latin typeface="Cambria"/>
+              </a:rPr>
+              <a:t>Quick check: Other methodologies</a:t>
+            </a:r>
+          </a:p>
+        </p:txBody>
+      </p:sp>
+      <p:sp>
+        <p:nvSpPr>
+          <p:cNvPr id="4" name="TextBox 3"/>
+          <p:cNvSpPr txBox="1"/>
+          <p:nvPr/>
+        </p:nvSpPr>
+        <p:spPr>
+          <a:xfrm>
+            <a:off x="548640" y="6446520"/>
+            <a:ext cx="8229600" cy="274320"/>
+          </a:xfrm>
+          <a:prstGeom prst="rect">
+            <a:avLst/>
+          </a:prstGeom>
+          <a:noFill/>
+        </p:spPr>
+        <p:txBody>
+          <a:bodyPr wrap="square" anchor="t" lIns="0" rIns="0" tIns="0" bIns="0"/>
+          <a:lstStyle/>
+          <a:p>
+            <a:pPr algn="l"/>
+            <a:r>
+              <a:rPr sz="1000" b="0" i="0">
+                <a:solidFill>
+                  <a:srgbClr val="54595D"/>
+                </a:solidFill>
+                <a:latin typeface="Calibri"/>
+              </a:rPr>
+              <a:t>Digital Software Development T Level  ·  Team Roles and Project Methodologies</a:t>
+            </a:r>
+          </a:p>
+        </p:txBody>
+      </p:sp>
+      <p:sp>
+        <p:nvSpPr>
+          <p:cNvPr id="5" name="TextBox 4"/>
+          <p:cNvSpPr txBox="1"/>
+          <p:nvPr/>
+        </p:nvSpPr>
+        <p:spPr>
+          <a:xfrm>
+            <a:off x="10728655" y="6446520"/>
+            <a:ext cx="914400" cy="274320"/>
+          </a:xfrm>
+          <a:prstGeom prst="rect">
+            <a:avLst/>
+          </a:prstGeom>
+          <a:noFill/>
+        </p:spPr>
+        <p:txBody>
+          <a:bodyPr wrap="square" anchor="t" lIns="0" rIns="0" tIns="0" bIns="0"/>
+          <a:lstStyle/>
+          <a:p>
+            <a:pPr algn="r"/>
+            <a:r>
+              <a:rPr sz="1000" b="0" i="0">
+                <a:solidFill>
+                  <a:srgbClr val="54595D"/>
+                </a:solidFill>
+                <a:latin typeface="Calibri"/>
+              </a:rPr>
+              <a:t>11</a:t>
+            </a:r>
+          </a:p>
+        </p:txBody>
+      </p:sp>
+      <p:sp>
+        <p:nvSpPr>
+          <p:cNvPr id="6" name="Oval 5"/>
+          <p:cNvSpPr/>
+          <p:nvPr/>
+        </p:nvSpPr>
+        <p:spPr>
+          <a:xfrm>
+            <a:off x="548640" y="1691640"/>
+            <a:ext cx="502920" cy="502920"/>
+          </a:xfrm>
+          <a:prstGeom prst="ellipse">
+            <a:avLst/>
+          </a:prstGeom>
+          <a:solidFill>
+            <a:srgbClr val="33C17A"/>
+          </a:solidFill>
+          <a:ln>
+            <a:noFill/>
+          </a:ln>
+          <a:effectLst/>
+        </p:spPr>
+        <p:style>
+          <a:lnRef idx="1">
+            <a:schemeClr val="accent1"/>
+          </a:lnRef>
+          <a:fillRef idx="3">
+            <a:schemeClr val="accent1"/>
+          </a:fillRef>
+          <a:effectRef idx="2">
+            <a:schemeClr val="accent1"/>
+          </a:effectRef>
+          <a:fontRef idx="minor">
+            <a:schemeClr val="lt1"/>
+          </a:fontRef>
+        </p:style>
+        <p:txBody>
+          <a:bodyPr rtlCol="0" anchor="ctr" lIns="0" rIns="0" tIns="0" bIns="0"/>
+          <a:lstStyle/>
+          <a:p>
+            <a:pPr algn="ctr"/>
+            <a:r>
+              <a:rPr sz="1600" b="1">
+                <a:solidFill>
+                  <a:srgbClr val="202122"/>
+                </a:solidFill>
+                <a:latin typeface="Calibri"/>
+              </a:rPr>
+              <a:t>1</a:t>
+            </a:r>
+          </a:p>
+        </p:txBody>
+      </p:sp>
+      <p:sp>
+        <p:nvSpPr>
+          <p:cNvPr id="7" name="TextBox 6"/>
+          <p:cNvSpPr txBox="1"/>
+          <p:nvPr/>
+        </p:nvSpPr>
+        <p:spPr>
+          <a:xfrm>
+            <a:off x="1371600" y="1645920"/>
+            <a:ext cx="10271455" cy="1188720"/>
+          </a:xfrm>
+          <a:prstGeom prst="rect">
+            <a:avLst/>
+          </a:prstGeom>
+          <a:noFill/>
+        </p:spPr>
+        <p:txBody>
+          <a:bodyPr wrap="square" anchor="t" lIns="0" rIns="0" tIns="0" bIns="0"/>
+          <a:lstStyle/>
+          <a:p>
+            <a:pPr algn="l"/>
+            <a:r>
+              <a:rPr sz="2400" b="0" i="0">
+                <a:solidFill>
+                  <a:srgbClr val="202122"/>
+                </a:solidFill>
+                <a:latin typeface="Calibri"/>
+              </a:rPr>
+              <a:t>Which methodology relies heavily on reusing code?</a:t>
+            </a:r>
+          </a:p>
+        </p:txBody>
+      </p:sp>
+      <p:sp>
+        <p:nvSpPr>
+          <p:cNvPr id="8" name="Oval 7"/>
+          <p:cNvSpPr/>
+          <p:nvPr/>
+        </p:nvSpPr>
+        <p:spPr>
+          <a:xfrm>
+            <a:off x="548640" y="3108960"/>
+            <a:ext cx="502920" cy="502920"/>
+          </a:xfrm>
+          <a:prstGeom prst="ellipse">
+            <a:avLst/>
+          </a:prstGeom>
+          <a:solidFill>
+            <a:srgbClr val="33C17A"/>
+          </a:solidFill>
+          <a:ln>
+            <a:noFill/>
+          </a:ln>
+          <a:effectLst/>
+        </p:spPr>
+        <p:style>
+          <a:lnRef idx="1">
+            <a:schemeClr val="accent1"/>
+          </a:lnRef>
+          <a:fillRef idx="3">
+            <a:schemeClr val="accent1"/>
+          </a:fillRef>
+          <a:effectRef idx="2">
+            <a:schemeClr val="accent1"/>
+          </a:effectRef>
+          <a:fontRef idx="minor">
+            <a:schemeClr val="lt1"/>
+          </a:fontRef>
+        </p:style>
+        <p:txBody>
+          <a:bodyPr rtlCol="0" anchor="ctr" lIns="0" rIns="0" tIns="0" bIns="0"/>
+          <a:lstStyle/>
+          <a:p>
+            <a:pPr algn="ctr"/>
+            <a:r>
+              <a:rPr sz="1600" b="1">
+                <a:solidFill>
+                  <a:srgbClr val="202122"/>
+                </a:solidFill>
+                <a:latin typeface="Calibri"/>
+              </a:rPr>
+              <a:t>2</a:t>
+            </a:r>
+          </a:p>
+        </p:txBody>
+      </p:sp>
+      <p:sp>
+        <p:nvSpPr>
+          <p:cNvPr id="9" name="TextBox 8"/>
+          <p:cNvSpPr txBox="1"/>
+          <p:nvPr/>
+        </p:nvSpPr>
+        <p:spPr>
+          <a:xfrm>
+            <a:off x="1371600" y="3063240"/>
+            <a:ext cx="10271455" cy="1188720"/>
+          </a:xfrm>
+          <a:prstGeom prst="rect">
+            <a:avLst/>
+          </a:prstGeom>
+          <a:noFill/>
+        </p:spPr>
+        <p:txBody>
+          <a:bodyPr wrap="square" anchor="t" lIns="0" rIns="0" tIns="0" bIns="0"/>
+          <a:lstStyle/>
+          <a:p>
+            <a:pPr algn="l"/>
+            <a:r>
+              <a:rPr sz="2400" b="0" i="0">
+                <a:solidFill>
+                  <a:srgbClr val="202122"/>
+                </a:solidFill>
+                <a:latin typeface="Calibri"/>
+              </a:rPr>
+              <a:t>What does Lean aim to cut?</a:t>
+            </a:r>
+          </a:p>
+        </p:txBody>
+      </p:sp>
+      <p:sp>
+        <p:nvSpPr>
+          <p:cNvPr id="10" name="Oval 9"/>
+          <p:cNvSpPr/>
+          <p:nvPr/>
+        </p:nvSpPr>
+        <p:spPr>
+          <a:xfrm>
+            <a:off x="548640" y="4526280"/>
+            <a:ext cx="502920" cy="502920"/>
+          </a:xfrm>
+          <a:prstGeom prst="ellipse">
+            <a:avLst/>
+          </a:prstGeom>
+          <a:solidFill>
+            <a:srgbClr val="33C17A"/>
+          </a:solidFill>
+          <a:ln>
+            <a:noFill/>
+          </a:ln>
+          <a:effectLst/>
+        </p:spPr>
+        <p:style>
+          <a:lnRef idx="1">
+            <a:schemeClr val="accent1"/>
+          </a:lnRef>
+          <a:fillRef idx="3">
+            <a:schemeClr val="accent1"/>
+          </a:fillRef>
+          <a:effectRef idx="2">
+            <a:schemeClr val="accent1"/>
+          </a:effectRef>
+          <a:fontRef idx="minor">
+            <a:schemeClr val="lt1"/>
+          </a:fontRef>
+        </p:style>
+        <p:txBody>
+          <a:bodyPr rtlCol="0" anchor="ctr" lIns="0" rIns="0" tIns="0" bIns="0"/>
+          <a:lstStyle/>
+          <a:p>
+            <a:pPr algn="ctr"/>
+            <a:r>
+              <a:rPr sz="1600" b="1">
+                <a:solidFill>
+                  <a:srgbClr val="202122"/>
+                </a:solidFill>
+                <a:latin typeface="Calibri"/>
+              </a:rPr>
+              <a:t>3</a:t>
+            </a:r>
+          </a:p>
+        </p:txBody>
+      </p:sp>
+      <p:sp>
+        <p:nvSpPr>
+          <p:cNvPr id="11" name="TextBox 10"/>
+          <p:cNvSpPr txBox="1"/>
+          <p:nvPr/>
+        </p:nvSpPr>
+        <p:spPr>
+          <a:xfrm>
+            <a:off x="1371600" y="4480560"/>
+            <a:ext cx="10271455" cy="1188720"/>
+          </a:xfrm>
+          <a:prstGeom prst="rect">
+            <a:avLst/>
+          </a:prstGeom>
+          <a:noFill/>
+        </p:spPr>
+        <p:txBody>
+          <a:bodyPr wrap="square" anchor="t" lIns="0" rIns="0" tIns="0" bIns="0"/>
+          <a:lstStyle/>
+          <a:p>
+            <a:pPr algn="l"/>
+            <a:r>
+              <a:rPr sz="2400" b="0" i="0">
+                <a:solidFill>
+                  <a:srgbClr val="202122"/>
+                </a:solidFill>
+                <a:latin typeface="Calibri"/>
+              </a:rPr>
+              <a:t>What are the characteristics of UCD?</a:t>
+            </a:r>
+          </a:p>
+        </p:txBody>
+      </p:sp>
+      <p:sp>
+        <p:nvSpPr>
+          <p:cNvPr id="12" name="TextBox 11"/>
+          <p:cNvSpPr txBox="1"/>
+          <p:nvPr/>
+        </p:nvSpPr>
+        <p:spPr>
+          <a:xfrm>
+            <a:off x="548640" y="5852160"/>
+            <a:ext cx="11094415" cy="365760"/>
+          </a:xfrm>
+          <a:prstGeom prst="rect">
+            <a:avLst/>
+          </a:prstGeom>
+          <a:noFill/>
+        </p:spPr>
+        <p:txBody>
+          <a:bodyPr wrap="square" anchor="t" lIns="0" rIns="0" tIns="0" bIns="0"/>
+          <a:lstStyle/>
+          <a:p>
+            <a:pPr algn="l"/>
+            <a:r>
+              <a:rPr sz="1300" b="0" i="1">
+                <a:solidFill>
+                  <a:srgbClr val="54595D"/>
+                </a:solidFill>
+                <a:latin typeface="Calibri"/>
+              </a:rPr>
+              <a:t>Answer on mini whiteboards or in your book. Answers are in the speaker notes.</a:t>
+            </a:r>
+          </a:p>
+        </p:txBody>
+      </p:sp>
+    </p:spTree>
+  </p:cSld>
+  <p:clrMapOvr>
+    <a:masterClrMapping/>
+  </p:clrMapOvr>
+</p:sld>
+</file>
+
+<file path=ppt/slides/slide12.xml><?xml version="1.0" encoding="utf-8"?>
+<p:sld xmlns:a="http://schemas.openxmlformats.org/drawingml/2006/main" xmlns:p="http://schemas.openxmlformats.org/presentationml/2006/main" xmlns:r="http://schemas.openxmlformats.org/officeDocument/2006/relationships">
+  <p:cSld>
+    <p:bg>
+      <p:bgPr>
+        <a:solidFill>
+          <a:srgbClr val="FFFFFF"/>
+        </a:solidFill>
+        <a:effectLst/>
+      </p:bgPr>
+    </p:bg>
+    <p:spTree>
+      <p:nvGrpSpPr>
+        <p:cNvPr id="1" name=""/>
+        <p:cNvGrpSpPr/>
+        <p:nvPr/>
+      </p:nvGrpSpPr>
+      <p:grpSpPr/>
+      <p:sp>
+        <p:nvSpPr>
+          <p:cNvPr id="2" name="TextBox 1"/>
+          <p:cNvSpPr txBox="1"/>
+          <p:nvPr/>
+        </p:nvSpPr>
+        <p:spPr>
+          <a:xfrm>
+            <a:off x="548640" y="320040"/>
+            <a:ext cx="11094415" cy="274320"/>
+          </a:xfrm>
+          <a:prstGeom prst="rect">
+            <a:avLst/>
+          </a:prstGeom>
+          <a:noFill/>
+        </p:spPr>
+        <p:txBody>
+          <a:bodyPr wrap="square" anchor="t" lIns="0" rIns="0" tIns="0" bIns="0"/>
+          <a:lstStyle/>
+          <a:p>
+            <a:pPr algn="l"/>
+            <a:r>
+              <a:rPr sz="1100" b="1" i="0">
+                <a:solidFill>
+                  <a:srgbClr val="54595D"/>
+                </a:solidFill>
+                <a:latin typeface="Calibri"/>
+              </a:rPr>
+              <a:t>OCCUPATIONAL SPECIALISM  ·  Specialism Content Area 1</a:t>
+            </a:r>
+          </a:p>
+        </p:txBody>
+      </p:sp>
+      <p:sp>
+        <p:nvSpPr>
+          <p:cNvPr id="3" name="TextBox 2"/>
+          <p:cNvSpPr txBox="1"/>
+          <p:nvPr/>
+        </p:nvSpPr>
+        <p:spPr>
+          <a:xfrm>
+            <a:off x="548640" y="566928"/>
+            <a:ext cx="11094415" cy="822960"/>
+          </a:xfrm>
+          <a:prstGeom prst="rect">
+            <a:avLst/>
+          </a:prstGeom>
+          <a:noFill/>
+        </p:spPr>
+        <p:txBody>
+          <a:bodyPr wrap="square" anchor="ctr" lIns="0" rIns="0" tIns="0" bIns="0"/>
+          <a:lstStyle/>
+          <a:p>
+            <a:pPr algn="l"/>
+            <a:r>
+              <a:rPr sz="3200" b="1" i="0">
+                <a:solidFill>
+                  <a:srgbClr val="03306E"/>
+                </a:solidFill>
+                <a:latin typeface="Cambria"/>
+              </a:rPr>
+              <a:t>Check your understanding</a:t>
+            </a:r>
+          </a:p>
+        </p:txBody>
+      </p:sp>
+      <p:sp>
+        <p:nvSpPr>
+          <p:cNvPr id="4" name="TextBox 3"/>
+          <p:cNvSpPr txBox="1"/>
+          <p:nvPr/>
+        </p:nvSpPr>
+        <p:spPr>
+          <a:xfrm>
+            <a:off x="548640" y="6446520"/>
+            <a:ext cx="8229600" cy="274320"/>
+          </a:xfrm>
+          <a:prstGeom prst="rect">
+            <a:avLst/>
+          </a:prstGeom>
+          <a:noFill/>
+        </p:spPr>
+        <p:txBody>
+          <a:bodyPr wrap="square" anchor="t" lIns="0" rIns="0" tIns="0" bIns="0"/>
+          <a:lstStyle/>
+          <a:p>
+            <a:pPr algn="l"/>
+            <a:r>
+              <a:rPr sz="1000" b="0" i="0">
+                <a:solidFill>
+                  <a:srgbClr val="54595D"/>
+                </a:solidFill>
+                <a:latin typeface="Calibri"/>
+              </a:rPr>
+              <a:t>Digital Software Development T Level  ·  Team Roles and Project Methodologies</a:t>
+            </a:r>
+          </a:p>
+        </p:txBody>
+      </p:sp>
+      <p:sp>
+        <p:nvSpPr>
+          <p:cNvPr id="5" name="TextBox 4"/>
+          <p:cNvSpPr txBox="1"/>
+          <p:nvPr/>
+        </p:nvSpPr>
+        <p:spPr>
+          <a:xfrm>
+            <a:off x="10728655" y="6446520"/>
+            <a:ext cx="914400" cy="274320"/>
+          </a:xfrm>
+          <a:prstGeom prst="rect">
+            <a:avLst/>
+          </a:prstGeom>
+          <a:noFill/>
+        </p:spPr>
+        <p:txBody>
+          <a:bodyPr wrap="square" anchor="t" lIns="0" rIns="0" tIns="0" bIns="0"/>
+          <a:lstStyle/>
+          <a:p>
+            <a:pPr algn="r"/>
+            <a:r>
+              <a:rPr sz="1000" b="0" i="0">
+                <a:solidFill>
+                  <a:srgbClr val="54595D"/>
+                </a:solidFill>
+                <a:latin typeface="Calibri"/>
+              </a:rPr>
+              <a:t>12</a:t>
+            </a:r>
+          </a:p>
+        </p:txBody>
+      </p:sp>
+      <p:sp>
+        <p:nvSpPr>
+          <p:cNvPr id="6" name="Oval 5"/>
+          <p:cNvSpPr/>
+          <p:nvPr/>
+        </p:nvSpPr>
+        <p:spPr>
+          <a:xfrm>
+            <a:off x="548640" y="1618488"/>
+            <a:ext cx="411480" cy="411480"/>
+          </a:xfrm>
+          <a:prstGeom prst="ellipse">
+            <a:avLst/>
+          </a:prstGeom>
+          <a:solidFill>
+            <a:srgbClr val="33C17A"/>
+          </a:solidFill>
+          <a:ln>
+            <a:noFill/>
+          </a:ln>
+          <a:effectLst/>
+        </p:spPr>
+        <p:style>
+          <a:lnRef idx="1">
+            <a:schemeClr val="accent1"/>
+          </a:lnRef>
+          <a:fillRef idx="3">
+            <a:schemeClr val="accent1"/>
+          </a:fillRef>
+          <a:effectRef idx="2">
+            <a:schemeClr val="accent1"/>
+          </a:effectRef>
+          <a:fontRef idx="minor">
+            <a:schemeClr val="lt1"/>
+          </a:fontRef>
+        </p:style>
+        <p:txBody>
+          <a:bodyPr rtlCol="0" anchor="ctr" lIns="0" rIns="0" tIns="0" bIns="0"/>
+          <a:lstStyle/>
+          <a:p>
+            <a:pPr algn="ctr"/>
+            <a:r>
+              <a:rPr sz="1400" b="1">
+                <a:solidFill>
+                  <a:srgbClr val="202122"/>
+                </a:solidFill>
+                <a:latin typeface="Calibri"/>
+              </a:rPr>
+              <a:t>1</a:t>
+            </a:r>
+          </a:p>
+        </p:txBody>
+      </p:sp>
+      <p:sp>
+        <p:nvSpPr>
+          <p:cNvPr id="7" name="TextBox 6"/>
+          <p:cNvSpPr txBox="1"/>
+          <p:nvPr/>
+        </p:nvSpPr>
+        <p:spPr>
+          <a:xfrm>
+            <a:off x="1234440" y="1600200"/>
+            <a:ext cx="10408615" cy="1030986"/>
+          </a:xfrm>
+          <a:prstGeom prst="rect">
+            <a:avLst/>
+          </a:prstGeom>
+          <a:noFill/>
+        </p:spPr>
+        <p:txBody>
+          <a:bodyPr wrap="square" anchor="t" lIns="0" rIns="0" tIns="0" bIns="0"/>
+          <a:lstStyle/>
+          <a:p>
+            <a:pPr algn="l"/>
+            <a:r>
+              <a:rPr sz="2200" b="0" i="0">
+                <a:solidFill>
+                  <a:srgbClr val="202122"/>
+                </a:solidFill>
+                <a:latin typeface="Calibri"/>
+              </a:rPr>
+              <a:t>Who keeps a Scrum team cohesive and resourced?</a:t>
+            </a:r>
+          </a:p>
+        </p:txBody>
+      </p:sp>
+      <p:sp>
+        <p:nvSpPr>
+          <p:cNvPr id="8" name="Oval 7"/>
+          <p:cNvSpPr/>
+          <p:nvPr/>
+        </p:nvSpPr>
+        <p:spPr>
+          <a:xfrm>
+            <a:off x="548640" y="2814066"/>
+            <a:ext cx="411480" cy="411480"/>
+          </a:xfrm>
+          <a:prstGeom prst="ellipse">
+            <a:avLst/>
+          </a:prstGeom>
+          <a:solidFill>
+            <a:srgbClr val="33C17A"/>
+          </a:solidFill>
+          <a:ln>
+            <a:noFill/>
+          </a:ln>
+          <a:effectLst/>
+        </p:spPr>
+        <p:style>
+          <a:lnRef idx="1">
+            <a:schemeClr val="accent1"/>
+          </a:lnRef>
+          <a:fillRef idx="3">
+            <a:schemeClr val="accent1"/>
+          </a:fillRef>
+          <a:effectRef idx="2">
+            <a:schemeClr val="accent1"/>
+          </a:effectRef>
+          <a:fontRef idx="minor">
+            <a:schemeClr val="lt1"/>
+          </a:fontRef>
+        </p:style>
+        <p:txBody>
+          <a:bodyPr rtlCol="0" anchor="ctr" lIns="0" rIns="0" tIns="0" bIns="0"/>
+          <a:lstStyle/>
+          <a:p>
+            <a:pPr algn="ctr"/>
+            <a:r>
+              <a:rPr sz="1400" b="1">
+                <a:solidFill>
+                  <a:srgbClr val="202122"/>
+                </a:solidFill>
+                <a:latin typeface="Calibri"/>
+              </a:rPr>
+              <a:t>2</a:t>
+            </a:r>
+          </a:p>
+        </p:txBody>
+      </p:sp>
+      <p:sp>
+        <p:nvSpPr>
+          <p:cNvPr id="9" name="TextBox 8"/>
+          <p:cNvSpPr txBox="1"/>
+          <p:nvPr/>
+        </p:nvSpPr>
+        <p:spPr>
+          <a:xfrm>
+            <a:off x="1234440" y="2795778"/>
+            <a:ext cx="10408615" cy="1030986"/>
+          </a:xfrm>
+          <a:prstGeom prst="rect">
+            <a:avLst/>
+          </a:prstGeom>
+          <a:noFill/>
+        </p:spPr>
+        <p:txBody>
+          <a:bodyPr wrap="square" anchor="t" lIns="0" rIns="0" tIns="0" bIns="0"/>
+          <a:lstStyle/>
+          <a:p>
+            <a:pPr algn="l"/>
+            <a:r>
+              <a:rPr sz="2200" b="0" i="0">
+                <a:solidFill>
+                  <a:srgbClr val="202122"/>
+                </a:solidFill>
+                <a:latin typeface="Calibri"/>
+              </a:rPr>
+              <a:t>Which methodology measures progress by completed artefacts?</a:t>
+            </a:r>
+          </a:p>
+        </p:txBody>
+      </p:sp>
+      <p:sp>
+        <p:nvSpPr>
+          <p:cNvPr id="10" name="Oval 9"/>
+          <p:cNvSpPr/>
+          <p:nvPr/>
+        </p:nvSpPr>
+        <p:spPr>
+          <a:xfrm>
+            <a:off x="548640" y="4009644"/>
+            <a:ext cx="411480" cy="411480"/>
+          </a:xfrm>
+          <a:prstGeom prst="ellipse">
+            <a:avLst/>
+          </a:prstGeom>
+          <a:solidFill>
+            <a:srgbClr val="33C17A"/>
+          </a:solidFill>
+          <a:ln>
+            <a:noFill/>
+          </a:ln>
+          <a:effectLst/>
+        </p:spPr>
+        <p:style>
+          <a:lnRef idx="1">
+            <a:schemeClr val="accent1"/>
+          </a:lnRef>
+          <a:fillRef idx="3">
+            <a:schemeClr val="accent1"/>
+          </a:fillRef>
+          <a:effectRef idx="2">
+            <a:schemeClr val="accent1"/>
+          </a:effectRef>
+          <a:fontRef idx="minor">
+            <a:schemeClr val="lt1"/>
+          </a:fontRef>
+        </p:style>
+        <p:txBody>
+          <a:bodyPr rtlCol="0" anchor="ctr" lIns="0" rIns="0" tIns="0" bIns="0"/>
+          <a:lstStyle/>
+          <a:p>
+            <a:pPr algn="ctr"/>
+            <a:r>
+              <a:rPr sz="1400" b="1">
+                <a:solidFill>
+                  <a:srgbClr val="202122"/>
+                </a:solidFill>
+                <a:latin typeface="Calibri"/>
+              </a:rPr>
+              <a:t>3</a:t>
+            </a:r>
+          </a:p>
+        </p:txBody>
+      </p:sp>
+      <p:sp>
+        <p:nvSpPr>
+          <p:cNvPr id="11" name="TextBox 10"/>
+          <p:cNvSpPr txBox="1"/>
+          <p:nvPr/>
+        </p:nvSpPr>
+        <p:spPr>
+          <a:xfrm>
+            <a:off x="1234440" y="3991356"/>
+            <a:ext cx="10408615" cy="1030986"/>
+          </a:xfrm>
+          <a:prstGeom prst="rect">
+            <a:avLst/>
+          </a:prstGeom>
+          <a:noFill/>
+        </p:spPr>
+        <p:txBody>
+          <a:bodyPr wrap="square" anchor="t" lIns="0" rIns="0" tIns="0" bIns="0"/>
+          <a:lstStyle/>
+          <a:p>
+            <a:pPr algn="l"/>
+            <a:r>
+              <a:rPr sz="2200" b="0" i="0">
+                <a:solidFill>
+                  <a:srgbClr val="202122"/>
+                </a:solidFill>
+                <a:latin typeface="Calibri"/>
+              </a:rPr>
+              <a:t>What is a sprint?</a:t>
+            </a:r>
+          </a:p>
+        </p:txBody>
+      </p:sp>
+      <p:sp>
+        <p:nvSpPr>
+          <p:cNvPr id="12" name="Oval 11"/>
+          <p:cNvSpPr/>
+          <p:nvPr/>
+        </p:nvSpPr>
+        <p:spPr>
+          <a:xfrm>
+            <a:off x="548640" y="5205221"/>
+            <a:ext cx="411480" cy="411480"/>
+          </a:xfrm>
+          <a:prstGeom prst="ellipse">
+            <a:avLst/>
+          </a:prstGeom>
+          <a:solidFill>
+            <a:srgbClr val="33C17A"/>
+          </a:solidFill>
+          <a:ln>
+            <a:noFill/>
+          </a:ln>
+          <a:effectLst/>
+        </p:spPr>
+        <p:style>
+          <a:lnRef idx="1">
+            <a:schemeClr val="accent1"/>
+          </a:lnRef>
+          <a:fillRef idx="3">
+            <a:schemeClr val="accent1"/>
+          </a:fillRef>
+          <a:effectRef idx="2">
+            <a:schemeClr val="accent1"/>
+          </a:effectRef>
+          <a:fontRef idx="minor">
+            <a:schemeClr val="lt1"/>
+          </a:fontRef>
+        </p:style>
+        <p:txBody>
+          <a:bodyPr rtlCol="0" anchor="ctr" lIns="0" rIns="0" tIns="0" bIns="0"/>
+          <a:lstStyle/>
+          <a:p>
+            <a:pPr algn="ctr"/>
+            <a:r>
+              <a:rPr sz="1400" b="1">
+                <a:solidFill>
+                  <a:srgbClr val="202122"/>
+                </a:solidFill>
+                <a:latin typeface="Calibri"/>
+              </a:rPr>
+              <a:t>4</a:t>
+            </a:r>
+          </a:p>
+        </p:txBody>
+      </p:sp>
+      <p:sp>
+        <p:nvSpPr>
+          <p:cNvPr id="13" name="TextBox 12"/>
+          <p:cNvSpPr txBox="1"/>
+          <p:nvPr/>
+        </p:nvSpPr>
+        <p:spPr>
+          <a:xfrm>
+            <a:off x="1234440" y="5186933"/>
+            <a:ext cx="10408615" cy="1030986"/>
+          </a:xfrm>
+          <a:prstGeom prst="rect">
+            <a:avLst/>
+          </a:prstGeom>
+          <a:noFill/>
+        </p:spPr>
+        <p:txBody>
+          <a:bodyPr wrap="square" anchor="t" lIns="0" rIns="0" tIns="0" bIns="0"/>
+          <a:lstStyle/>
+          <a:p>
+            <a:pPr algn="l"/>
+            <a:r>
+              <a:rPr sz="2200" b="0" i="0">
+                <a:solidFill>
+                  <a:srgbClr val="202122"/>
+                </a:solidFill>
+                <a:latin typeface="Calibri"/>
+              </a:rPr>
+              <a:t>Which methodology relies heavily on reusing code?</a:t>
+            </a:r>
+          </a:p>
+        </p:txBody>
+      </p:sp>
+    </p:spTree>
+  </p:cSld>
+  <p:clrMapOvr>
+    <a:masterClrMapping/>
+  </p:clrMapOvr>
+</p:sld>
+</file>
+
+<file path=ppt/slides/slide13.xml><?xml version="1.0" encoding="utf-8"?>
+<p:sld xmlns:a="http://schemas.openxmlformats.org/drawingml/2006/main" xmlns:p="http://schemas.openxmlformats.org/presentationml/2006/main" xmlns:r="http://schemas.openxmlformats.org/officeDocument/2006/relationships">
+  <p:cSld>
+    <p:bg>
+      <p:bgPr>
+        <a:solidFill>
+          <a:srgbClr val="FFFFFF"/>
+        </a:solidFill>
+        <a:effectLst/>
+      </p:bgPr>
+    </p:bg>
+    <p:spTree>
+      <p:nvGrpSpPr>
+        <p:cNvPr id="1" name=""/>
+        <p:cNvGrpSpPr/>
+        <p:nvPr/>
+      </p:nvGrpSpPr>
+      <p:grpSpPr/>
+      <p:sp>
+        <p:nvSpPr>
+          <p:cNvPr id="2" name="TextBox 1"/>
+          <p:cNvSpPr txBox="1"/>
+          <p:nvPr/>
+        </p:nvSpPr>
+        <p:spPr>
+          <a:xfrm>
+            <a:off x="548640" y="320040"/>
+            <a:ext cx="11094415" cy="274320"/>
+          </a:xfrm>
+          <a:prstGeom prst="rect">
+            <a:avLst/>
+          </a:prstGeom>
+          <a:noFill/>
+        </p:spPr>
+        <p:txBody>
+          <a:bodyPr wrap="square" anchor="t" lIns="0" rIns="0" tIns="0" bIns="0"/>
+          <a:lstStyle/>
+          <a:p>
+            <a:pPr algn="l"/>
+            <a:r>
+              <a:rPr sz="1100" b="1" i="0">
+                <a:solidFill>
+                  <a:srgbClr val="54595D"/>
+                </a:solidFill>
+                <a:latin typeface="Calibri"/>
+              </a:rPr>
+              <a:t>OCCUPATIONAL SPECIALISM  ·  Specialism Content Area 1</a:t>
+            </a:r>
+          </a:p>
+        </p:txBody>
+      </p:sp>
+      <p:sp>
+        <p:nvSpPr>
+          <p:cNvPr id="3" name="TextBox 2"/>
+          <p:cNvSpPr txBox="1"/>
+          <p:nvPr/>
+        </p:nvSpPr>
+        <p:spPr>
+          <a:xfrm>
+            <a:off x="548640" y="566928"/>
+            <a:ext cx="11094415" cy="822960"/>
+          </a:xfrm>
+          <a:prstGeom prst="rect">
+            <a:avLst/>
+          </a:prstGeom>
+          <a:noFill/>
+        </p:spPr>
+        <p:txBody>
+          <a:bodyPr wrap="square" anchor="ctr" lIns="0" rIns="0" tIns="0" bIns="0"/>
+          <a:lstStyle/>
+          <a:p>
+            <a:pPr algn="l"/>
+            <a:r>
+              <a:rPr sz="3200" b="1" i="0">
+                <a:solidFill>
+                  <a:srgbClr val="03306E"/>
+                </a:solidFill>
+                <a:latin typeface="Cambria"/>
+              </a:rPr>
+              <a:t>Answers</a:t>
+            </a:r>
+          </a:p>
+        </p:txBody>
+      </p:sp>
+      <p:sp>
+        <p:nvSpPr>
+          <p:cNvPr id="4" name="TextBox 3"/>
+          <p:cNvSpPr txBox="1"/>
+          <p:nvPr/>
+        </p:nvSpPr>
+        <p:spPr>
+          <a:xfrm>
+            <a:off x="548640" y="6446520"/>
+            <a:ext cx="8229600" cy="274320"/>
+          </a:xfrm>
+          <a:prstGeom prst="rect">
+            <a:avLst/>
+          </a:prstGeom>
+          <a:noFill/>
+        </p:spPr>
+        <p:txBody>
+          <a:bodyPr wrap="square" anchor="t" lIns="0" rIns="0" tIns="0" bIns="0"/>
+          <a:lstStyle/>
+          <a:p>
+            <a:pPr algn="l"/>
+            <a:r>
+              <a:rPr sz="1000" b="0" i="0">
+                <a:solidFill>
+                  <a:srgbClr val="54595D"/>
+                </a:solidFill>
+                <a:latin typeface="Calibri"/>
+              </a:rPr>
+              <a:t>Digital Software Development T Level  ·  Team Roles and Project Methodologies</a:t>
+            </a:r>
+          </a:p>
+        </p:txBody>
+      </p:sp>
+      <p:sp>
+        <p:nvSpPr>
+          <p:cNvPr id="5" name="TextBox 4"/>
+          <p:cNvSpPr txBox="1"/>
+          <p:nvPr/>
+        </p:nvSpPr>
+        <p:spPr>
+          <a:xfrm>
+            <a:off x="10728655" y="6446520"/>
+            <a:ext cx="914400" cy="274320"/>
+          </a:xfrm>
+          <a:prstGeom prst="rect">
+            <a:avLst/>
+          </a:prstGeom>
+          <a:noFill/>
+        </p:spPr>
+        <p:txBody>
+          <a:bodyPr wrap="square" anchor="t" lIns="0" rIns="0" tIns="0" bIns="0"/>
+          <a:lstStyle/>
+          <a:p>
+            <a:pPr algn="r"/>
+            <a:r>
+              <a:rPr sz="1000" b="0" i="0">
+                <a:solidFill>
+                  <a:srgbClr val="54595D"/>
+                </a:solidFill>
+                <a:latin typeface="Calibri"/>
+              </a:rPr>
+              <a:t>13</a:t>
+            </a:r>
+          </a:p>
+        </p:txBody>
+      </p:sp>
+      <p:sp>
+        <p:nvSpPr>
+          <p:cNvPr id="6" name="Oval 5"/>
+          <p:cNvSpPr/>
+          <p:nvPr/>
+        </p:nvSpPr>
+        <p:spPr>
+          <a:xfrm>
+            <a:off x="548640" y="1618488"/>
+            <a:ext cx="411480" cy="411480"/>
+          </a:xfrm>
+          <a:prstGeom prst="ellipse">
+            <a:avLst/>
+          </a:prstGeom>
+          <a:solidFill>
+            <a:srgbClr val="33C17A"/>
+          </a:solidFill>
+          <a:ln>
+            <a:noFill/>
+          </a:ln>
+          <a:effectLst/>
+        </p:spPr>
+        <p:style>
+          <a:lnRef idx="1">
+            <a:schemeClr val="accent1"/>
+          </a:lnRef>
+          <a:fillRef idx="3">
+            <a:schemeClr val="accent1"/>
+          </a:fillRef>
+          <a:effectRef idx="2">
+            <a:schemeClr val="accent1"/>
+          </a:effectRef>
+          <a:fontRef idx="minor">
+            <a:schemeClr val="lt1"/>
+          </a:fontRef>
+        </p:style>
+        <p:txBody>
+          <a:bodyPr rtlCol="0" anchor="ctr" lIns="0" rIns="0" tIns="0" bIns="0"/>
+          <a:lstStyle/>
+          <a:p>
+            <a:pPr algn="ctr"/>
+            <a:r>
+              <a:rPr sz="1400" b="1">
+                <a:solidFill>
+                  <a:srgbClr val="202122"/>
+                </a:solidFill>
+                <a:latin typeface="Calibri"/>
+              </a:rPr>
+              <a:t>1</a:t>
+            </a:r>
+          </a:p>
+        </p:txBody>
+      </p:sp>
+      <p:sp>
+        <p:nvSpPr>
+          <p:cNvPr id="7" name="TextBox 6"/>
+          <p:cNvSpPr txBox="1"/>
+          <p:nvPr/>
+        </p:nvSpPr>
+        <p:spPr>
+          <a:xfrm>
+            <a:off x="1234440" y="1600200"/>
+            <a:ext cx="10408615" cy="1030986"/>
+          </a:xfrm>
+          <a:prstGeom prst="rect">
+            <a:avLst/>
+          </a:prstGeom>
+          <a:noFill/>
+        </p:spPr>
+        <p:txBody>
+          <a:bodyPr wrap="square" anchor="t" lIns="0" rIns="0" tIns="0" bIns="0"/>
+          <a:lstStyle/>
+          <a:p>
+            <a:pPr algn="l"/>
+            <a:r>
+              <a:rPr sz="1800" b="0" i="0">
+                <a:solidFill>
+                  <a:srgbClr val="54595D"/>
+                </a:solidFill>
+                <a:latin typeface="Calibri"/>
+              </a:rPr>
+              <a:t>Who keeps a Scrum team cohesive and resourced?</a:t>
+            </a:r>
+          </a:p>
+          <a:p>
+            <a:r>
+              <a:rPr sz="1800" b="1">
+                <a:solidFill>
+                  <a:srgbClr val="03306E"/>
+                </a:solidFill>
+                <a:latin typeface="Calibri"/>
+              </a:rPr>
+              <a:t>The scrum master.</a:t>
+            </a:r>
+          </a:p>
+        </p:txBody>
+      </p:sp>
+      <p:sp>
+        <p:nvSpPr>
+          <p:cNvPr id="8" name="Oval 7"/>
+          <p:cNvSpPr/>
+          <p:nvPr/>
+        </p:nvSpPr>
+        <p:spPr>
+          <a:xfrm>
+            <a:off x="548640" y="2814066"/>
+            <a:ext cx="411480" cy="411480"/>
+          </a:xfrm>
+          <a:prstGeom prst="ellipse">
+            <a:avLst/>
+          </a:prstGeom>
+          <a:solidFill>
+            <a:srgbClr val="33C17A"/>
+          </a:solidFill>
+          <a:ln>
+            <a:noFill/>
+          </a:ln>
+          <a:effectLst/>
+        </p:spPr>
+        <p:style>
+          <a:lnRef idx="1">
+            <a:schemeClr val="accent1"/>
+          </a:lnRef>
+          <a:fillRef idx="3">
+            <a:schemeClr val="accent1"/>
+          </a:fillRef>
+          <a:effectRef idx="2">
+            <a:schemeClr val="accent1"/>
+          </a:effectRef>
+          <a:fontRef idx="minor">
+            <a:schemeClr val="lt1"/>
+          </a:fontRef>
+        </p:style>
+        <p:txBody>
+          <a:bodyPr rtlCol="0" anchor="ctr" lIns="0" rIns="0" tIns="0" bIns="0"/>
+          <a:lstStyle/>
+          <a:p>
+            <a:pPr algn="ctr"/>
+            <a:r>
+              <a:rPr sz="1400" b="1">
+                <a:solidFill>
+                  <a:srgbClr val="202122"/>
+                </a:solidFill>
+                <a:latin typeface="Calibri"/>
+              </a:rPr>
+              <a:t>2</a:t>
+            </a:r>
+          </a:p>
+        </p:txBody>
+      </p:sp>
+      <p:sp>
+        <p:nvSpPr>
+          <p:cNvPr id="9" name="TextBox 8"/>
+          <p:cNvSpPr txBox="1"/>
+          <p:nvPr/>
+        </p:nvSpPr>
+        <p:spPr>
+          <a:xfrm>
+            <a:off x="1234440" y="2795778"/>
+            <a:ext cx="10408615" cy="1030986"/>
+          </a:xfrm>
+          <a:prstGeom prst="rect">
+            <a:avLst/>
+          </a:prstGeom>
+          <a:noFill/>
+        </p:spPr>
+        <p:txBody>
+          <a:bodyPr wrap="square" anchor="t" lIns="0" rIns="0" tIns="0" bIns="0"/>
+          <a:lstStyle/>
+          <a:p>
+            <a:pPr algn="l"/>
+            <a:r>
+              <a:rPr sz="1800" b="0" i="0">
+                <a:solidFill>
+                  <a:srgbClr val="54595D"/>
+                </a:solidFill>
+                <a:latin typeface="Calibri"/>
+              </a:rPr>
+              <a:t>Which methodology measures progress by completed artefacts?</a:t>
+            </a:r>
+          </a:p>
+          <a:p>
+            <a:r>
+              <a:rPr sz="1800" b="1">
+                <a:solidFill>
+                  <a:srgbClr val="03306E"/>
+                </a:solidFill>
+                <a:latin typeface="Calibri"/>
+              </a:rPr>
+              <a:t>Waterfall.</a:t>
+            </a:r>
+          </a:p>
+        </p:txBody>
+      </p:sp>
+      <p:sp>
+        <p:nvSpPr>
+          <p:cNvPr id="10" name="Oval 9"/>
+          <p:cNvSpPr/>
+          <p:nvPr/>
+        </p:nvSpPr>
+        <p:spPr>
+          <a:xfrm>
+            <a:off x="548640" y="4009644"/>
+            <a:ext cx="411480" cy="411480"/>
+          </a:xfrm>
+          <a:prstGeom prst="ellipse">
+            <a:avLst/>
+          </a:prstGeom>
+          <a:solidFill>
+            <a:srgbClr val="33C17A"/>
+          </a:solidFill>
+          <a:ln>
+            <a:noFill/>
+          </a:ln>
+          <a:effectLst/>
+        </p:spPr>
+        <p:style>
+          <a:lnRef idx="1">
+            <a:schemeClr val="accent1"/>
+          </a:lnRef>
+          <a:fillRef idx="3">
+            <a:schemeClr val="accent1"/>
+          </a:fillRef>
+          <a:effectRef idx="2">
+            <a:schemeClr val="accent1"/>
+          </a:effectRef>
+          <a:fontRef idx="minor">
+            <a:schemeClr val="lt1"/>
+          </a:fontRef>
+        </p:style>
+        <p:txBody>
+          <a:bodyPr rtlCol="0" anchor="ctr" lIns="0" rIns="0" tIns="0" bIns="0"/>
+          <a:lstStyle/>
+          <a:p>
+            <a:pPr algn="ctr"/>
+            <a:r>
+              <a:rPr sz="1400" b="1">
+                <a:solidFill>
+                  <a:srgbClr val="202122"/>
+                </a:solidFill>
+                <a:latin typeface="Calibri"/>
+              </a:rPr>
+              <a:t>3</a:t>
+            </a:r>
+          </a:p>
+        </p:txBody>
+      </p:sp>
+      <p:sp>
+        <p:nvSpPr>
+          <p:cNvPr id="11" name="TextBox 10"/>
+          <p:cNvSpPr txBox="1"/>
+          <p:nvPr/>
+        </p:nvSpPr>
+        <p:spPr>
+          <a:xfrm>
+            <a:off x="1234440" y="3991356"/>
+            <a:ext cx="10408615" cy="1030986"/>
+          </a:xfrm>
+          <a:prstGeom prst="rect">
+            <a:avLst/>
+          </a:prstGeom>
+          <a:noFill/>
+        </p:spPr>
+        <p:txBody>
+          <a:bodyPr wrap="square" anchor="t" lIns="0" rIns="0" tIns="0" bIns="0"/>
+          <a:lstStyle/>
+          <a:p>
+            <a:pPr algn="l"/>
+            <a:r>
+              <a:rPr sz="1800" b="0" i="0">
+                <a:solidFill>
+                  <a:srgbClr val="54595D"/>
+                </a:solidFill>
+                <a:latin typeface="Calibri"/>
+              </a:rPr>
+              <a:t>What is a sprint?</a:t>
+            </a:r>
+          </a:p>
+          <a:p>
+            <a:r>
+              <a:rPr sz="1800" b="1">
+                <a:solidFill>
+                  <a:srgbClr val="03306E"/>
+                </a:solidFill>
+                <a:latin typeface="Calibri"/>
+              </a:rPr>
+              <a:t>A short, fixed period of work delivering an increment.</a:t>
+            </a:r>
+          </a:p>
+        </p:txBody>
+      </p:sp>
+      <p:sp>
+        <p:nvSpPr>
+          <p:cNvPr id="12" name="Oval 11"/>
+          <p:cNvSpPr/>
+          <p:nvPr/>
+        </p:nvSpPr>
+        <p:spPr>
+          <a:xfrm>
+            <a:off x="548640" y="5205221"/>
+            <a:ext cx="411480" cy="411480"/>
+          </a:xfrm>
+          <a:prstGeom prst="ellipse">
+            <a:avLst/>
+          </a:prstGeom>
+          <a:solidFill>
+            <a:srgbClr val="33C17A"/>
+          </a:solidFill>
+          <a:ln>
+            <a:noFill/>
+          </a:ln>
+          <a:effectLst/>
+        </p:spPr>
+        <p:style>
+          <a:lnRef idx="1">
+            <a:schemeClr val="accent1"/>
+          </a:lnRef>
+          <a:fillRef idx="3">
+            <a:schemeClr val="accent1"/>
+          </a:fillRef>
+          <a:effectRef idx="2">
+            <a:schemeClr val="accent1"/>
+          </a:effectRef>
+          <a:fontRef idx="minor">
+            <a:schemeClr val="lt1"/>
+          </a:fontRef>
+        </p:style>
+        <p:txBody>
+          <a:bodyPr rtlCol="0" anchor="ctr" lIns="0" rIns="0" tIns="0" bIns="0"/>
+          <a:lstStyle/>
+          <a:p>
+            <a:pPr algn="ctr"/>
+            <a:r>
+              <a:rPr sz="1400" b="1">
+                <a:solidFill>
+                  <a:srgbClr val="202122"/>
+                </a:solidFill>
+                <a:latin typeface="Calibri"/>
+              </a:rPr>
+              <a:t>4</a:t>
+            </a:r>
+          </a:p>
+        </p:txBody>
+      </p:sp>
+      <p:sp>
+        <p:nvSpPr>
+          <p:cNvPr id="13" name="TextBox 12"/>
+          <p:cNvSpPr txBox="1"/>
+          <p:nvPr/>
+        </p:nvSpPr>
+        <p:spPr>
+          <a:xfrm>
+            <a:off x="1234440" y="5186933"/>
+            <a:ext cx="10408615" cy="1030986"/>
+          </a:xfrm>
+          <a:prstGeom prst="rect">
+            <a:avLst/>
+          </a:prstGeom>
+          <a:noFill/>
+        </p:spPr>
+        <p:txBody>
+          <a:bodyPr wrap="square" anchor="t" lIns="0" rIns="0" tIns="0" bIns="0"/>
+          <a:lstStyle/>
+          <a:p>
+            <a:pPr algn="l"/>
+            <a:r>
+              <a:rPr sz="1800" b="0" i="0">
+                <a:solidFill>
+                  <a:srgbClr val="54595D"/>
+                </a:solidFill>
+                <a:latin typeface="Calibri"/>
+              </a:rPr>
+              <a:t>Which methodology relies heavily on reusing code?</a:t>
+            </a:r>
+          </a:p>
+          <a:p>
+            <a:r>
+              <a:rPr sz="1800" b="1">
+                <a:solidFill>
+                  <a:srgbClr val="03306E"/>
+                </a:solidFill>
+                <a:latin typeface="Calibri"/>
+              </a:rPr>
+              <a:t>RAD.</a:t>
+            </a:r>
+          </a:p>
+        </p:txBody>
+      </p:sp>
+    </p:spTree>
+  </p:cSld>
+  <p:clrMapOvr>
+    <a:masterClrMapping/>
+  </p:clrMapOvr>
+</p:sld>
+</file>
+
+<file path=ppt/slides/slide14.xml><?xml version="1.0" encoding="utf-8"?>
+<p:sld xmlns:a="http://schemas.openxmlformats.org/drawingml/2006/main" xmlns:p="http://schemas.openxmlformats.org/presentationml/2006/main" xmlns:r="http://schemas.openxmlformats.org/officeDocument/2006/relationships">
+  <p:cSld>
+    <p:bg>
+      <p:bgPr>
+        <a:solidFill>
+          <a:srgbClr val="FFFFFF"/>
+        </a:solidFill>
+        <a:effectLst/>
+      </p:bgPr>
+    </p:bg>
+    <p:spTree>
+      <p:nvGrpSpPr>
+        <p:cNvPr id="1" name=""/>
+        <p:cNvGrpSpPr/>
+        <p:nvPr/>
+      </p:nvGrpSpPr>
+      <p:grpSpPr/>
+      <p:sp>
+        <p:nvSpPr>
+          <p:cNvPr id="2" name="TextBox 1"/>
+          <p:cNvSpPr txBox="1"/>
+          <p:nvPr/>
+        </p:nvSpPr>
+        <p:spPr>
+          <a:xfrm>
+            <a:off x="548640" y="320040"/>
+            <a:ext cx="11094415" cy="274320"/>
+          </a:xfrm>
+          <a:prstGeom prst="rect">
+            <a:avLst/>
+          </a:prstGeom>
+          <a:noFill/>
+        </p:spPr>
+        <p:txBody>
+          <a:bodyPr wrap="square" anchor="t" lIns="0" rIns="0" tIns="0" bIns="0"/>
+          <a:lstStyle/>
+          <a:p>
+            <a:pPr algn="l"/>
+            <a:r>
+              <a:rPr sz="1100" b="1" i="0">
+                <a:solidFill>
+                  <a:srgbClr val="54595D"/>
+                </a:solidFill>
+                <a:latin typeface="Calibri"/>
+              </a:rPr>
+              <a:t>OCCUPATIONAL SPECIALISM  ·  Specialism Content Area 1</a:t>
+            </a:r>
+          </a:p>
+        </p:txBody>
+      </p:sp>
+      <p:sp>
+        <p:nvSpPr>
+          <p:cNvPr id="3" name="TextBox 2"/>
+          <p:cNvSpPr txBox="1"/>
+          <p:nvPr/>
+        </p:nvSpPr>
+        <p:spPr>
+          <a:xfrm>
+            <a:off x="548640" y="566928"/>
+            <a:ext cx="11094415" cy="822960"/>
+          </a:xfrm>
+          <a:prstGeom prst="rect">
+            <a:avLst/>
+          </a:prstGeom>
+          <a:noFill/>
+        </p:spPr>
+        <p:txBody>
+          <a:bodyPr wrap="square" anchor="ctr" lIns="0" rIns="0" tIns="0" bIns="0"/>
+          <a:lstStyle/>
+          <a:p>
+            <a:pPr algn="l"/>
+            <a:r>
+              <a:rPr sz="3200" b="1" i="0">
+                <a:solidFill>
+                  <a:srgbClr val="03306E"/>
+                </a:solidFill>
+                <a:latin typeface="Cambria"/>
+              </a:rPr>
+              <a:t>Activity: Pick the methodology</a:t>
+            </a:r>
+          </a:p>
+        </p:txBody>
+      </p:sp>
+      <p:sp>
+        <p:nvSpPr>
+          <p:cNvPr id="4" name="TextBox 3"/>
+          <p:cNvSpPr txBox="1"/>
+          <p:nvPr/>
+        </p:nvSpPr>
+        <p:spPr>
+          <a:xfrm>
+            <a:off x="548640" y="6446520"/>
+            <a:ext cx="8229600" cy="274320"/>
+          </a:xfrm>
+          <a:prstGeom prst="rect">
+            <a:avLst/>
+          </a:prstGeom>
+          <a:noFill/>
+        </p:spPr>
+        <p:txBody>
+          <a:bodyPr wrap="square" anchor="t" lIns="0" rIns="0" tIns="0" bIns="0"/>
+          <a:lstStyle/>
+          <a:p>
+            <a:pPr algn="l"/>
+            <a:r>
+              <a:rPr sz="1000" b="0" i="0">
+                <a:solidFill>
+                  <a:srgbClr val="54595D"/>
+                </a:solidFill>
+                <a:latin typeface="Calibri"/>
+              </a:rPr>
+              <a:t>Digital Software Development T Level  ·  Team Roles and Project Methodologies</a:t>
+            </a:r>
+          </a:p>
+        </p:txBody>
+      </p:sp>
+      <p:sp>
+        <p:nvSpPr>
+          <p:cNvPr id="5" name="TextBox 4"/>
+          <p:cNvSpPr txBox="1"/>
+          <p:nvPr/>
+        </p:nvSpPr>
+        <p:spPr>
+          <a:xfrm>
+            <a:off x="10728655" y="6446520"/>
+            <a:ext cx="914400" cy="274320"/>
+          </a:xfrm>
+          <a:prstGeom prst="rect">
+            <a:avLst/>
+          </a:prstGeom>
+          <a:noFill/>
+        </p:spPr>
+        <p:txBody>
+          <a:bodyPr wrap="square" anchor="t" lIns="0" rIns="0" tIns="0" bIns="0"/>
+          <a:lstStyle/>
+          <a:p>
+            <a:pPr algn="r"/>
+            <a:r>
+              <a:rPr sz="1000" b="0" i="0">
+                <a:solidFill>
+                  <a:srgbClr val="54595D"/>
+                </a:solidFill>
+                <a:latin typeface="Calibri"/>
+              </a:rPr>
+              <a:t>14</a:t>
+            </a:r>
+          </a:p>
+        </p:txBody>
+      </p:sp>
+      <p:sp>
+        <p:nvSpPr>
+          <p:cNvPr id="6" name="Rounded Rectangle 5"/>
+          <p:cNvSpPr/>
+          <p:nvPr/>
+        </p:nvSpPr>
+        <p:spPr>
+          <a:xfrm>
+            <a:off x="548640" y="1508760"/>
+            <a:ext cx="2011680" cy="457200"/>
+          </a:xfrm>
+          <a:prstGeom prst="roundRect">
+            <a:avLst>
+              <a:gd name="adj" fmla="val 50000"/>
+            </a:avLst>
+          </a:prstGeom>
+          <a:solidFill>
+            <a:srgbClr val="33C17A"/>
+          </a:solidFill>
+          <a:ln>
+            <a:noFill/>
+          </a:ln>
+          <a:effectLst/>
+        </p:spPr>
+        <p:style>
+          <a:lnRef idx="1">
+            <a:schemeClr val="accent1"/>
+          </a:lnRef>
+          <a:fillRef idx="3">
+            <a:schemeClr val="accent1"/>
+          </a:fillRef>
+          <a:effectRef idx="2">
+            <a:schemeClr val="accent1"/>
+          </a:effectRef>
+          <a:fontRef idx="minor">
+            <a:schemeClr val="lt1"/>
+          </a:fontRef>
+        </p:style>
+        <p:txBody>
+          <a:bodyPr rtlCol="0" anchor="ctr"/>
+          <a:lstStyle/>
+          <a:p/>
+        </p:txBody>
+      </p:sp>
+      <p:sp>
+        <p:nvSpPr>
+          <p:cNvPr id="7" name="TextBox 6"/>
+          <p:cNvSpPr txBox="1"/>
+          <p:nvPr/>
+        </p:nvSpPr>
+        <p:spPr>
+          <a:xfrm>
+            <a:off x="548640" y="1508760"/>
+            <a:ext cx="2011680" cy="457200"/>
+          </a:xfrm>
+          <a:prstGeom prst="rect">
+            <a:avLst/>
+          </a:prstGeom>
+          <a:noFill/>
+        </p:spPr>
+        <p:txBody>
+          <a:bodyPr wrap="square" anchor="ctr" lIns="0" rIns="0" tIns="0" bIns="0"/>
+          <a:lstStyle/>
+          <a:p>
+            <a:pPr algn="ctr"/>
+            <a:r>
+              <a:rPr sz="1400" b="1" i="0">
+                <a:solidFill>
+                  <a:srgbClr val="202122"/>
+                </a:solidFill>
+                <a:latin typeface="Calibri"/>
+              </a:rPr>
+              <a:t>20 minutes</a:t>
+            </a:r>
+          </a:p>
+        </p:txBody>
+      </p:sp>
+      <p:sp>
+        <p:nvSpPr>
+          <p:cNvPr id="8" name="TextBox 7"/>
+          <p:cNvSpPr txBox="1"/>
+          <p:nvPr/>
+        </p:nvSpPr>
+        <p:spPr>
+          <a:xfrm>
+            <a:off x="2743200" y="1508760"/>
+            <a:ext cx="4754880" cy="457200"/>
+          </a:xfrm>
+          <a:prstGeom prst="rect">
+            <a:avLst/>
+          </a:prstGeom>
+          <a:noFill/>
+        </p:spPr>
+        <p:txBody>
+          <a:bodyPr wrap="square" anchor="ctr" lIns="0" rIns="0" tIns="0" bIns="0"/>
+          <a:lstStyle/>
+          <a:p>
+            <a:pPr algn="l"/>
+            <a:r>
+              <a:rPr sz="1400" b="0" i="1">
+                <a:solidFill>
+                  <a:srgbClr val="54595D"/>
+                </a:solidFill>
+                <a:latin typeface="Calibri"/>
+              </a:rPr>
+              <a:t>Small groups</a:t>
+            </a:r>
+          </a:p>
+        </p:txBody>
+      </p:sp>
+      <p:sp>
+        <p:nvSpPr>
+          <p:cNvPr id="9" name="Oval 8"/>
+          <p:cNvSpPr/>
+          <p:nvPr/>
+        </p:nvSpPr>
+        <p:spPr>
+          <a:xfrm>
+            <a:off x="548640" y="2482596"/>
+            <a:ext cx="384048" cy="384048"/>
+          </a:xfrm>
+          <a:prstGeom prst="ellipse">
+            <a:avLst/>
+          </a:prstGeom>
+          <a:solidFill>
+            <a:srgbClr val="0645AD"/>
+          </a:solidFill>
+          <a:ln>
+            <a:noFill/>
+          </a:ln>
+          <a:effectLst/>
+        </p:spPr>
+        <p:style>
+          <a:lnRef idx="1">
+            <a:schemeClr val="accent1"/>
+          </a:lnRef>
+          <a:fillRef idx="3">
+            <a:schemeClr val="accent1"/>
+          </a:fillRef>
+          <a:effectRef idx="2">
+            <a:schemeClr val="accent1"/>
+          </a:effectRef>
+          <a:fontRef idx="minor">
+            <a:schemeClr val="lt1"/>
+          </a:fontRef>
+        </p:style>
+        <p:txBody>
+          <a:bodyPr rtlCol="0" anchor="ctr" lIns="0" rIns="0" tIns="0" bIns="0"/>
+          <a:lstStyle/>
+          <a:p>
+            <a:pPr algn="ctr"/>
+            <a:r>
+              <a:rPr sz="1300" b="1">
+                <a:solidFill>
+                  <a:srgbClr val="FFFFFF"/>
+                </a:solidFill>
+                <a:latin typeface="Calibri"/>
+              </a:rPr>
+              <a:t>1</a:t>
+            </a:r>
+          </a:p>
+        </p:txBody>
+      </p:sp>
+      <p:sp>
+        <p:nvSpPr>
+          <p:cNvPr id="10" name="TextBox 9"/>
+          <p:cNvSpPr txBox="1"/>
+          <p:nvPr/>
+        </p:nvSpPr>
+        <p:spPr>
+          <a:xfrm>
+            <a:off x="1143000" y="2240280"/>
+            <a:ext cx="5943600" cy="868680"/>
+          </a:xfrm>
+          <a:prstGeom prst="rect">
+            <a:avLst/>
+          </a:prstGeom>
+          <a:noFill/>
+        </p:spPr>
+        <p:txBody>
+          <a:bodyPr wrap="square" anchor="ctr" lIns="0" rIns="0" tIns="0" bIns="0"/>
+          <a:lstStyle/>
+          <a:p>
+            <a:pPr algn="l"/>
+            <a:r>
+              <a:rPr sz="1700" b="0" i="0">
+                <a:solidFill>
+                  <a:srgbClr val="202122"/>
+                </a:solidFill>
+                <a:latin typeface="Calibri"/>
+              </a:rPr>
+              <a:t>Three projects: an NHS records system, a start-up's first app, and a charity's accessible website.</a:t>
+            </a:r>
+          </a:p>
+        </p:txBody>
+      </p:sp>
+      <p:sp>
+        <p:nvSpPr>
+          <p:cNvPr id="11" name="Oval 10"/>
+          <p:cNvSpPr/>
+          <p:nvPr/>
+        </p:nvSpPr>
+        <p:spPr>
+          <a:xfrm>
+            <a:off x="548640" y="3461004"/>
+            <a:ext cx="384048" cy="384048"/>
+          </a:xfrm>
+          <a:prstGeom prst="ellipse">
+            <a:avLst/>
+          </a:prstGeom>
+          <a:solidFill>
+            <a:srgbClr val="0645AD"/>
+          </a:solidFill>
+          <a:ln>
+            <a:noFill/>
+          </a:ln>
+          <a:effectLst/>
+        </p:spPr>
+        <p:style>
+          <a:lnRef idx="1">
+            <a:schemeClr val="accent1"/>
+          </a:lnRef>
+          <a:fillRef idx="3">
+            <a:schemeClr val="accent1"/>
+          </a:fillRef>
+          <a:effectRef idx="2">
+            <a:schemeClr val="accent1"/>
+          </a:effectRef>
+          <a:fontRef idx="minor">
+            <a:schemeClr val="lt1"/>
+          </a:fontRef>
+        </p:style>
+        <p:txBody>
+          <a:bodyPr rtlCol="0" anchor="ctr" lIns="0" rIns="0" tIns="0" bIns="0"/>
+          <a:lstStyle/>
+          <a:p>
+            <a:pPr algn="ctr"/>
+            <a:r>
+              <a:rPr sz="1300" b="1">
+                <a:solidFill>
+                  <a:srgbClr val="FFFFFF"/>
+                </a:solidFill>
+                <a:latin typeface="Calibri"/>
+              </a:rPr>
+              <a:t>2</a:t>
+            </a:r>
+          </a:p>
+        </p:txBody>
+      </p:sp>
+      <p:sp>
+        <p:nvSpPr>
+          <p:cNvPr id="12" name="TextBox 11"/>
+          <p:cNvSpPr txBox="1"/>
+          <p:nvPr/>
+        </p:nvSpPr>
+        <p:spPr>
+          <a:xfrm>
+            <a:off x="1143000" y="3218688"/>
+            <a:ext cx="5943600" cy="868680"/>
+          </a:xfrm>
+          <a:prstGeom prst="rect">
+            <a:avLst/>
+          </a:prstGeom>
+          <a:noFill/>
+        </p:spPr>
+        <p:txBody>
+          <a:bodyPr wrap="square" anchor="ctr" lIns="0" rIns="0" tIns="0" bIns="0"/>
+          <a:lstStyle/>
+          <a:p>
+            <a:pPr algn="l"/>
+            <a:r>
+              <a:rPr sz="1700" b="0" i="0">
+                <a:solidFill>
+                  <a:srgbClr val="202122"/>
+                </a:solidFill>
+                <a:latin typeface="Calibri"/>
+              </a:rPr>
+              <a:t>Choose a methodology for each.</a:t>
+            </a:r>
+          </a:p>
+        </p:txBody>
+      </p:sp>
+      <p:sp>
+        <p:nvSpPr>
+          <p:cNvPr id="13" name="Oval 12"/>
+          <p:cNvSpPr/>
+          <p:nvPr/>
+        </p:nvSpPr>
+        <p:spPr>
+          <a:xfrm>
+            <a:off x="548640" y="4439412"/>
+            <a:ext cx="384048" cy="384048"/>
+          </a:xfrm>
+          <a:prstGeom prst="ellipse">
+            <a:avLst/>
+          </a:prstGeom>
+          <a:solidFill>
+            <a:srgbClr val="0645AD"/>
+          </a:solidFill>
+          <a:ln>
+            <a:noFill/>
+          </a:ln>
+          <a:effectLst/>
+        </p:spPr>
+        <p:style>
+          <a:lnRef idx="1">
+            <a:schemeClr val="accent1"/>
+          </a:lnRef>
+          <a:fillRef idx="3">
+            <a:schemeClr val="accent1"/>
+          </a:fillRef>
+          <a:effectRef idx="2">
+            <a:schemeClr val="accent1"/>
+          </a:effectRef>
+          <a:fontRef idx="minor">
+            <a:schemeClr val="lt1"/>
+          </a:fontRef>
+        </p:style>
+        <p:txBody>
+          <a:bodyPr rtlCol="0" anchor="ctr" lIns="0" rIns="0" tIns="0" bIns="0"/>
+          <a:lstStyle/>
+          <a:p>
+            <a:pPr algn="ctr"/>
+            <a:r>
+              <a:rPr sz="1300" b="1">
+                <a:solidFill>
+                  <a:srgbClr val="FFFFFF"/>
+                </a:solidFill>
+                <a:latin typeface="Calibri"/>
+              </a:rPr>
+              <a:t>3</a:t>
+            </a:r>
+          </a:p>
+        </p:txBody>
+      </p:sp>
+      <p:sp>
+        <p:nvSpPr>
+          <p:cNvPr id="14" name="TextBox 13"/>
+          <p:cNvSpPr txBox="1"/>
+          <p:nvPr/>
+        </p:nvSpPr>
+        <p:spPr>
+          <a:xfrm>
+            <a:off x="1143000" y="4197096"/>
+            <a:ext cx="5943600" cy="868680"/>
+          </a:xfrm>
+          <a:prstGeom prst="rect">
+            <a:avLst/>
+          </a:prstGeom>
+          <a:noFill/>
+        </p:spPr>
+        <p:txBody>
+          <a:bodyPr wrap="square" anchor="ctr" lIns="0" rIns="0" tIns="0" bIns="0"/>
+          <a:lstStyle/>
+          <a:p>
+            <a:pPr algn="l"/>
+            <a:r>
+              <a:rPr sz="1700" b="0" i="0">
+                <a:solidFill>
+                  <a:srgbClr val="202122"/>
+                </a:solidFill>
+                <a:latin typeface="Calibri"/>
+              </a:rPr>
+              <a:t>Justify each choice with two features of the methodology.</a:t>
+            </a:r>
+          </a:p>
+        </p:txBody>
+      </p:sp>
+      <p:sp>
+        <p:nvSpPr>
+          <p:cNvPr id="15" name="Oval 14"/>
+          <p:cNvSpPr/>
+          <p:nvPr/>
+        </p:nvSpPr>
+        <p:spPr>
+          <a:xfrm>
+            <a:off x="548640" y="5417820"/>
+            <a:ext cx="384048" cy="384048"/>
+          </a:xfrm>
+          <a:prstGeom prst="ellipse">
+            <a:avLst/>
+          </a:prstGeom>
+          <a:solidFill>
+            <a:srgbClr val="0645AD"/>
+          </a:solidFill>
+          <a:ln>
+            <a:noFill/>
+          </a:ln>
+          <a:effectLst/>
+        </p:spPr>
+        <p:style>
+          <a:lnRef idx="1">
+            <a:schemeClr val="accent1"/>
+          </a:lnRef>
+          <a:fillRef idx="3">
+            <a:schemeClr val="accent1"/>
+          </a:fillRef>
+          <a:effectRef idx="2">
+            <a:schemeClr val="accent1"/>
+          </a:effectRef>
+          <a:fontRef idx="minor">
+            <a:schemeClr val="lt1"/>
+          </a:fontRef>
+        </p:style>
+        <p:txBody>
+          <a:bodyPr rtlCol="0" anchor="ctr" lIns="0" rIns="0" tIns="0" bIns="0"/>
+          <a:lstStyle/>
+          <a:p>
+            <a:pPr algn="ctr"/>
+            <a:r>
+              <a:rPr sz="1300" b="1">
+                <a:solidFill>
+                  <a:srgbClr val="FFFFFF"/>
+                </a:solidFill>
+                <a:latin typeface="Calibri"/>
+              </a:rPr>
+              <a:t>4</a:t>
+            </a:r>
+          </a:p>
+        </p:txBody>
+      </p:sp>
+      <p:sp>
+        <p:nvSpPr>
+          <p:cNvPr id="16" name="TextBox 15"/>
+          <p:cNvSpPr txBox="1"/>
+          <p:nvPr/>
+        </p:nvSpPr>
+        <p:spPr>
+          <a:xfrm>
+            <a:off x="1143000" y="5175504"/>
+            <a:ext cx="5943600" cy="868680"/>
+          </a:xfrm>
+          <a:prstGeom prst="rect">
+            <a:avLst/>
+          </a:prstGeom>
+          <a:noFill/>
+        </p:spPr>
+        <p:txBody>
+          <a:bodyPr wrap="square" anchor="ctr" lIns="0" rIns="0" tIns="0" bIns="0"/>
+          <a:lstStyle/>
+          <a:p>
+            <a:pPr algn="l"/>
+            <a:r>
+              <a:rPr sz="1700" b="0" i="0">
+                <a:solidFill>
+                  <a:srgbClr val="202122"/>
+                </a:solidFill>
+                <a:latin typeface="Calibri"/>
+              </a:rPr>
+              <a:t>Assign team roles for one project.</a:t>
+            </a:r>
+          </a:p>
+        </p:txBody>
+      </p:sp>
+      <p:sp>
+        <p:nvSpPr>
+          <p:cNvPr id="17" name="Rounded Rectangle 16"/>
+          <p:cNvSpPr/>
+          <p:nvPr/>
+        </p:nvSpPr>
+        <p:spPr>
+          <a:xfrm>
+            <a:off x="7772400" y="1508760"/>
+            <a:ext cx="3867912" cy="4572000"/>
+          </a:xfrm>
+          <a:prstGeom prst="roundRect">
+            <a:avLst>
+              <a:gd name="adj" fmla="val 8000"/>
+            </a:avLst>
+          </a:prstGeom>
+          <a:solidFill>
+            <a:srgbClr val="EAF3FF"/>
+          </a:solidFill>
+          <a:ln>
+            <a:noFill/>
+          </a:ln>
+          <a:effectLst/>
+        </p:spPr>
+        <p:style>
+          <a:lnRef idx="1">
+            <a:schemeClr val="accent1"/>
+          </a:lnRef>
+          <a:fillRef idx="3">
+            <a:schemeClr val="accent1"/>
+          </a:fillRef>
+          <a:effectRef idx="2">
+            <a:schemeClr val="accent1"/>
+          </a:effectRef>
+          <a:fontRef idx="minor">
+            <a:schemeClr val="lt1"/>
+          </a:fontRef>
+        </p:style>
+        <p:txBody>
+          <a:bodyPr rtlCol="0" anchor="ctr"/>
+          <a:lstStyle/>
+          <a:p/>
+        </p:txBody>
+      </p:sp>
+      <p:sp>
+        <p:nvSpPr>
+          <p:cNvPr id="18" name="TextBox 17"/>
+          <p:cNvSpPr txBox="1"/>
+          <p:nvPr/>
+        </p:nvSpPr>
+        <p:spPr>
+          <a:xfrm>
+            <a:off x="8046720" y="1737360"/>
+            <a:ext cx="3291840" cy="365760"/>
+          </a:xfrm>
+          <a:prstGeom prst="rect">
+            <a:avLst/>
+          </a:prstGeom>
+          <a:noFill/>
+        </p:spPr>
+        <p:txBody>
+          <a:bodyPr wrap="square" anchor="t" lIns="0" rIns="0" tIns="0" bIns="0"/>
+          <a:lstStyle/>
+          <a:p>
+            <a:pPr algn="l"/>
+            <a:r>
+              <a:rPr sz="1300" b="1" i="0">
+                <a:solidFill>
+                  <a:srgbClr val="0645AD"/>
+                </a:solidFill>
+                <a:latin typeface="Calibri"/>
+              </a:rPr>
+              <a:t>SUCCESS CRITERIA</a:t>
+            </a:r>
+          </a:p>
+        </p:txBody>
+      </p:sp>
+      <p:sp>
+        <p:nvSpPr>
+          <p:cNvPr id="19" name="TextBox 18"/>
+          <p:cNvSpPr txBox="1"/>
+          <p:nvPr/>
+        </p:nvSpPr>
+        <p:spPr>
+          <a:xfrm>
+            <a:off x="8046720" y="2240280"/>
+            <a:ext cx="3337560" cy="3657600"/>
+          </a:xfrm>
+          <a:prstGeom prst="rect">
+            <a:avLst/>
+          </a:prstGeom>
+          <a:noFill/>
+        </p:spPr>
+        <p:txBody>
+          <a:bodyPr wrap="square" lIns="0" rIns="0" tIns="0" bIns="0">
+            <a:spAutoFit/>
+          </a:bodyPr>
+          <a:lstStyle/>
+          <a:p>
+            <a:pPr marL="274320" indent="-274320">
+              <a:spcAft>
+                <a:spcPts val="810"/>
+              </a:spcAft>
+              <a:buClr>
+                <a:srgbClr val="0645AD"/>
+              </a:buClr>
+              <a:buFont typeface="Arial"/>
+              <a:buChar char="•"/>
+            </a:pPr>
+            <a:r>
+              <a:rPr sz="1800" b="0">
+                <a:solidFill>
+                  <a:srgbClr val="202122"/>
+                </a:solidFill>
+                <a:latin typeface="Calibri"/>
+              </a:rPr>
+              <a:t>Choice fits the risk and requirements</a:t>
+            </a:r>
+          </a:p>
+          <a:p>
+            <a:pPr marL="274320" indent="-274320">
+              <a:spcAft>
+                <a:spcPts val="810"/>
+              </a:spcAft>
+              <a:buClr>
+                <a:srgbClr val="0645AD"/>
+              </a:buClr>
+              <a:buFont typeface="Arial"/>
+              <a:buChar char="•"/>
+            </a:pPr>
+            <a:r>
+              <a:rPr sz="1800" b="0">
+                <a:solidFill>
+                  <a:srgbClr val="202122"/>
+                </a:solidFill>
+                <a:latin typeface="Calibri"/>
+              </a:rPr>
+              <a:t>Features correctly described</a:t>
+            </a:r>
+          </a:p>
+          <a:p>
+            <a:pPr marL="274320" indent="-274320">
+              <a:spcAft>
+                <a:spcPts val="810"/>
+              </a:spcAft>
+              <a:buClr>
+                <a:srgbClr val="0645AD"/>
+              </a:buClr>
+              <a:buFont typeface="Arial"/>
+              <a:buChar char="•"/>
+            </a:pPr>
+            <a:r>
+              <a:rPr sz="1800" b="0">
+                <a:solidFill>
+                  <a:srgbClr val="202122"/>
+                </a:solidFill>
+                <a:latin typeface="Calibri"/>
+              </a:rPr>
+              <a:t>Roles realistic</a:t>
+            </a:r>
+          </a:p>
+        </p:txBody>
+      </p:sp>
+    </p:spTree>
+  </p:cSld>
+  <p:clrMapOvr>
+    <a:masterClrMapping/>
+  </p:clrMapOvr>
+</p:sld>
+</file>
+
+<file path=ppt/slides/slide15.xml><?xml version="1.0" encoding="utf-8"?>
+<p:sld xmlns:a="http://schemas.openxmlformats.org/drawingml/2006/main" xmlns:p="http://schemas.openxmlformats.org/presentationml/2006/main" xmlns:r="http://schemas.openxmlformats.org/officeDocument/2006/relationships">
+  <p:cSld>
+    <p:bg>
+      <p:bgPr>
+        <a:solidFill>
+          <a:srgbClr val="03306E"/>
+        </a:solidFill>
+        <a:effectLst/>
+      </p:bgPr>
+    </p:bg>
+    <p:spTree>
+      <p:nvGrpSpPr>
+        <p:cNvPr id="1" name=""/>
+        <p:cNvGrpSpPr/>
+        <p:nvPr/>
+      </p:nvGrpSpPr>
+      <p:grpSpPr/>
+      <p:sp>
+        <p:nvSpPr>
+          <p:cNvPr id="2" name="TextBox 1"/>
+          <p:cNvSpPr txBox="1"/>
+          <p:nvPr/>
+        </p:nvSpPr>
+        <p:spPr>
+          <a:xfrm>
+            <a:off x="548640" y="320040"/>
+            <a:ext cx="11094415" cy="274320"/>
+          </a:xfrm>
+          <a:prstGeom prst="rect">
+            <a:avLst/>
+          </a:prstGeom>
+          <a:noFill/>
+        </p:spPr>
+        <p:txBody>
+          <a:bodyPr wrap="square" anchor="t" lIns="0" rIns="0" tIns="0" bIns="0"/>
+          <a:lstStyle/>
+          <a:p>
+            <a:pPr algn="l"/>
+            <a:r>
+              <a:rPr sz="1100" b="1" i="0">
+                <a:solidFill>
+                  <a:srgbClr val="A9C8F0"/>
+                </a:solidFill>
+                <a:latin typeface="Calibri"/>
+              </a:rPr>
+              <a:t>OCCUPATIONAL SPECIALISM  ·  Specialism Content Area 1</a:t>
+            </a:r>
+          </a:p>
+        </p:txBody>
+      </p:sp>
+      <p:sp>
+        <p:nvSpPr>
+          <p:cNvPr id="3" name="TextBox 2"/>
+          <p:cNvSpPr txBox="1"/>
+          <p:nvPr/>
+        </p:nvSpPr>
+        <p:spPr>
+          <a:xfrm>
+            <a:off x="548640" y="566928"/>
+            <a:ext cx="11094415" cy="822960"/>
+          </a:xfrm>
+          <a:prstGeom prst="rect">
+            <a:avLst/>
+          </a:prstGeom>
+          <a:noFill/>
+        </p:spPr>
+        <p:txBody>
+          <a:bodyPr wrap="square" anchor="ctr" lIns="0" rIns="0" tIns="0" bIns="0"/>
+          <a:lstStyle/>
+          <a:p>
+            <a:pPr algn="l"/>
+            <a:r>
+              <a:rPr sz="3200" b="1" i="0">
+                <a:solidFill>
+                  <a:srgbClr val="FFFFFF"/>
+                </a:solidFill>
+                <a:latin typeface="Cambria"/>
+              </a:rPr>
+              <a:t>Exit ticket</a:t>
+            </a:r>
+          </a:p>
+        </p:txBody>
+      </p:sp>
+      <p:sp>
+        <p:nvSpPr>
+          <p:cNvPr id="4" name="Oval 3"/>
+          <p:cNvSpPr/>
+          <p:nvPr/>
+        </p:nvSpPr>
+        <p:spPr>
+          <a:xfrm>
+            <a:off x="548640" y="1737360"/>
+            <a:ext cx="502920" cy="502920"/>
+          </a:xfrm>
+          <a:prstGeom prst="ellipse">
+            <a:avLst/>
+          </a:prstGeom>
+          <a:solidFill>
+            <a:srgbClr val="33C17A"/>
+          </a:solidFill>
+          <a:ln>
+            <a:noFill/>
+          </a:ln>
+          <a:effectLst/>
+        </p:spPr>
+        <p:style>
+          <a:lnRef idx="1">
+            <a:schemeClr val="accent1"/>
+          </a:lnRef>
+          <a:fillRef idx="3">
+            <a:schemeClr val="accent1"/>
+          </a:fillRef>
+          <a:effectRef idx="2">
+            <a:schemeClr val="accent1"/>
+          </a:effectRef>
+          <a:fontRef idx="minor">
+            <a:schemeClr val="lt1"/>
+          </a:fontRef>
+        </p:style>
+        <p:txBody>
+          <a:bodyPr rtlCol="0" anchor="ctr" lIns="0" rIns="0" tIns="0" bIns="0"/>
+          <a:lstStyle/>
+          <a:p>
+            <a:pPr algn="ctr"/>
+            <a:r>
+              <a:rPr sz="1700" b="1">
+                <a:solidFill>
+                  <a:srgbClr val="202122"/>
+                </a:solidFill>
+                <a:latin typeface="Calibri"/>
+              </a:rPr>
+              <a:t>1</a:t>
+            </a:r>
+          </a:p>
+        </p:txBody>
+      </p:sp>
+      <p:sp>
+        <p:nvSpPr>
+          <p:cNvPr id="5" name="TextBox 4"/>
+          <p:cNvSpPr txBox="1"/>
+          <p:nvPr/>
+        </p:nvSpPr>
+        <p:spPr>
+          <a:xfrm>
+            <a:off x="1325880" y="1645920"/>
+            <a:ext cx="6583680" cy="822960"/>
+          </a:xfrm>
+          <a:prstGeom prst="rect">
+            <a:avLst/>
+          </a:prstGeom>
+          <a:noFill/>
+        </p:spPr>
+        <p:txBody>
+          <a:bodyPr wrap="square" anchor="ctr" lIns="0" rIns="0" tIns="0" bIns="0"/>
+          <a:lstStyle/>
+          <a:p>
+            <a:pPr algn="l"/>
+            <a:r>
+              <a:rPr sz="2000" b="0" i="0">
+                <a:solidFill>
+                  <a:srgbClr val="FFFFFF"/>
+                </a:solidFill>
+                <a:latin typeface="Calibri"/>
+              </a:rPr>
+              <a:t>When is Waterfall the right choice?</a:t>
+            </a:r>
+          </a:p>
+        </p:txBody>
+      </p:sp>
+      <p:sp>
+        <p:nvSpPr>
+          <p:cNvPr id="6" name="Oval 5"/>
+          <p:cNvSpPr/>
+          <p:nvPr/>
+        </p:nvSpPr>
+        <p:spPr>
+          <a:xfrm>
+            <a:off x="548640" y="2697480"/>
+            <a:ext cx="502920" cy="502920"/>
+          </a:xfrm>
+          <a:prstGeom prst="ellipse">
+            <a:avLst/>
+          </a:prstGeom>
+          <a:solidFill>
+            <a:srgbClr val="33C17A"/>
+          </a:solidFill>
+          <a:ln>
+            <a:noFill/>
+          </a:ln>
+          <a:effectLst/>
+        </p:spPr>
+        <p:style>
+          <a:lnRef idx="1">
+            <a:schemeClr val="accent1"/>
+          </a:lnRef>
+          <a:fillRef idx="3">
+            <a:schemeClr val="accent1"/>
+          </a:fillRef>
+          <a:effectRef idx="2">
+            <a:schemeClr val="accent1"/>
+          </a:effectRef>
+          <a:fontRef idx="minor">
+            <a:schemeClr val="lt1"/>
+          </a:fontRef>
+        </p:style>
+        <p:txBody>
+          <a:bodyPr rtlCol="0" anchor="ctr" lIns="0" rIns="0" tIns="0" bIns="0"/>
+          <a:lstStyle/>
+          <a:p>
+            <a:pPr algn="ctr"/>
+            <a:r>
+              <a:rPr sz="1700" b="1">
+                <a:solidFill>
+                  <a:srgbClr val="202122"/>
+                </a:solidFill>
+                <a:latin typeface="Calibri"/>
+              </a:rPr>
+              <a:t>2</a:t>
+            </a:r>
+          </a:p>
+        </p:txBody>
+      </p:sp>
+      <p:sp>
+        <p:nvSpPr>
+          <p:cNvPr id="7" name="TextBox 6"/>
+          <p:cNvSpPr txBox="1"/>
+          <p:nvPr/>
+        </p:nvSpPr>
+        <p:spPr>
+          <a:xfrm>
+            <a:off x="1325880" y="2606040"/>
+            <a:ext cx="6583680" cy="822960"/>
+          </a:xfrm>
+          <a:prstGeom prst="rect">
+            <a:avLst/>
+          </a:prstGeom>
+          <a:noFill/>
+        </p:spPr>
+        <p:txBody>
+          <a:bodyPr wrap="square" anchor="ctr" lIns="0" rIns="0" tIns="0" bIns="0"/>
+          <a:lstStyle/>
+          <a:p>
+            <a:pPr algn="l"/>
+            <a:r>
+              <a:rPr sz="2000" b="0" i="0">
+                <a:solidFill>
+                  <a:srgbClr val="FFFFFF"/>
+                </a:solidFill>
+                <a:latin typeface="Calibri"/>
+              </a:rPr>
+              <a:t>What does a UX designer do?</a:t>
+            </a:r>
+          </a:p>
+        </p:txBody>
+      </p:sp>
+      <p:sp>
+        <p:nvSpPr>
+          <p:cNvPr id="8" name="Oval 7"/>
+          <p:cNvSpPr/>
+          <p:nvPr/>
+        </p:nvSpPr>
+        <p:spPr>
+          <a:xfrm>
+            <a:off x="548640" y="3657600"/>
+            <a:ext cx="502920" cy="502920"/>
+          </a:xfrm>
+          <a:prstGeom prst="ellipse">
+            <a:avLst/>
+          </a:prstGeom>
+          <a:solidFill>
+            <a:srgbClr val="33C17A"/>
+          </a:solidFill>
+          <a:ln>
+            <a:noFill/>
+          </a:ln>
+          <a:effectLst/>
+        </p:spPr>
+        <p:style>
+          <a:lnRef idx="1">
+            <a:schemeClr val="accent1"/>
+          </a:lnRef>
+          <a:fillRef idx="3">
+            <a:schemeClr val="accent1"/>
+          </a:fillRef>
+          <a:effectRef idx="2">
+            <a:schemeClr val="accent1"/>
+          </a:effectRef>
+          <a:fontRef idx="minor">
+            <a:schemeClr val="lt1"/>
+          </a:fontRef>
+        </p:style>
+        <p:txBody>
+          <a:bodyPr rtlCol="0" anchor="ctr" lIns="0" rIns="0" tIns="0" bIns="0"/>
+          <a:lstStyle/>
+          <a:p>
+            <a:pPr algn="ctr"/>
+            <a:r>
+              <a:rPr sz="1700" b="1">
+                <a:solidFill>
+                  <a:srgbClr val="202122"/>
+                </a:solidFill>
+                <a:latin typeface="Calibri"/>
+              </a:rPr>
+              <a:t>3</a:t>
+            </a:r>
+          </a:p>
+        </p:txBody>
+      </p:sp>
+      <p:sp>
+        <p:nvSpPr>
+          <p:cNvPr id="9" name="TextBox 8"/>
+          <p:cNvSpPr txBox="1"/>
+          <p:nvPr/>
+        </p:nvSpPr>
+        <p:spPr>
+          <a:xfrm>
+            <a:off x="1325880" y="3566160"/>
+            <a:ext cx="6583680" cy="822960"/>
+          </a:xfrm>
+          <a:prstGeom prst="rect">
+            <a:avLst/>
+          </a:prstGeom>
+          <a:noFill/>
+        </p:spPr>
+        <p:txBody>
+          <a:bodyPr wrap="square" anchor="ctr" lIns="0" rIns="0" tIns="0" bIns="0"/>
+          <a:lstStyle/>
+          <a:p>
+            <a:pPr algn="l"/>
+            <a:r>
+              <a:rPr sz="2000" b="0" i="0">
+                <a:solidFill>
+                  <a:srgbClr val="FFFFFF"/>
+                </a:solidFill>
+                <a:latin typeface="Calibri"/>
+              </a:rPr>
+              <a:t>Why does Agile suit changing requirements?</a:t>
+            </a:r>
+          </a:p>
+        </p:txBody>
+      </p:sp>
+      <p:sp>
+        <p:nvSpPr>
+          <p:cNvPr id="10" name="Rounded Rectangle 9"/>
+          <p:cNvSpPr/>
+          <p:nvPr/>
+        </p:nvSpPr>
+        <p:spPr>
+          <a:xfrm>
+            <a:off x="8229600" y="1645920"/>
+            <a:ext cx="3410712" cy="2926080"/>
+          </a:xfrm>
+          <a:prstGeom prst="roundRect">
+            <a:avLst>
+              <a:gd name="adj" fmla="val 8000"/>
+            </a:avLst>
+          </a:prstGeom>
+          <a:solidFill>
+            <a:srgbClr val="0645AD"/>
+          </a:solidFill>
+          <a:ln>
+            <a:noFill/>
+          </a:ln>
+          <a:effectLst/>
+        </p:spPr>
+        <p:style>
+          <a:lnRef idx="1">
+            <a:schemeClr val="accent1"/>
+          </a:lnRef>
+          <a:fillRef idx="3">
+            <a:schemeClr val="accent1"/>
+          </a:fillRef>
+          <a:effectRef idx="2">
+            <a:schemeClr val="accent1"/>
+          </a:effectRef>
+          <a:fontRef idx="minor">
+            <a:schemeClr val="lt1"/>
+          </a:fontRef>
+        </p:style>
+        <p:txBody>
+          <a:bodyPr rtlCol="0" anchor="ctr"/>
+          <a:lstStyle/>
+          <a:p/>
+        </p:txBody>
+      </p:sp>
+      <p:sp>
+        <p:nvSpPr>
+          <p:cNvPr id="11" name="TextBox 10"/>
+          <p:cNvSpPr txBox="1"/>
+          <p:nvPr/>
+        </p:nvSpPr>
+        <p:spPr>
+          <a:xfrm>
+            <a:off x="8503920" y="1874519"/>
+            <a:ext cx="2926080" cy="365760"/>
+          </a:xfrm>
+          <a:prstGeom prst="rect">
+            <a:avLst/>
+          </a:prstGeom>
+          <a:noFill/>
+        </p:spPr>
+        <p:txBody>
+          <a:bodyPr wrap="square" anchor="t" lIns="0" rIns="0" tIns="0" bIns="0"/>
+          <a:lstStyle/>
+          <a:p>
+            <a:pPr algn="l"/>
+            <a:r>
+              <a:rPr sz="1300" b="1" i="0">
+                <a:solidFill>
+                  <a:srgbClr val="A9C8F0"/>
+                </a:solidFill>
+                <a:latin typeface="Calibri"/>
+              </a:rPr>
+              <a:t>REVISE THIS TOPIC</a:t>
+            </a:r>
+          </a:p>
+        </p:txBody>
+      </p:sp>
+      <p:sp>
+        <p:nvSpPr>
+          <p:cNvPr id="12" name="TextBox 11"/>
+          <p:cNvSpPr txBox="1"/>
+          <p:nvPr/>
+        </p:nvSpPr>
+        <p:spPr>
+          <a:xfrm>
+            <a:off x="8503920" y="2286000"/>
+            <a:ext cx="2926080" cy="548640"/>
+          </a:xfrm>
+          <a:prstGeom prst="rect">
+            <a:avLst/>
+          </a:prstGeom>
+          <a:noFill/>
+        </p:spPr>
+        <p:txBody>
+          <a:bodyPr wrap="square" anchor="t" lIns="0" rIns="0" tIns="0" bIns="0"/>
+          <a:lstStyle/>
+          <a:p>
+            <a:pPr algn="l"/>
+            <a:r>
+              <a:rPr sz="1400" b="0" i="0">
+                <a:solidFill>
+                  <a:srgbClr val="FFFFFF"/>
+                </a:solidFill>
+                <a:latin typeface="Calibri"/>
+              </a:rPr>
+              <a:t>Revision notes for this lesson are on the study wiki:</a:t>
+            </a:r>
+          </a:p>
+        </p:txBody>
+      </p:sp>
+      <p:sp>
+        <p:nvSpPr>
+          <p:cNvPr id="13" name="TextBox 12"/>
+          <p:cNvSpPr txBox="1"/>
+          <p:nvPr/>
+        </p:nvSpPr>
+        <p:spPr>
+          <a:xfrm>
+            <a:off x="8503920" y="2926080"/>
+            <a:ext cx="2926080" cy="1463040"/>
+          </a:xfrm>
+          <a:prstGeom prst="rect">
+            <a:avLst/>
+          </a:prstGeom>
+          <a:noFill/>
+        </p:spPr>
+        <p:txBody>
+          <a:bodyPr wrap="square" anchor="t" lIns="0" rIns="0" tIns="0" bIns="0"/>
+          <a:lstStyle/>
+          <a:p>
+            <a:pPr algn="l"/>
+            <a:r>
+              <a:rPr sz="2000" b="1" i="0">
+                <a:solidFill>
+                  <a:srgbClr val="FFFFFF"/>
+                </a:solidFill>
+                <a:latin typeface="Cambria"/>
+              </a:rPr>
+              <a:t>Analyse a Problem</a:t>
+            </a:r>
+          </a:p>
+        </p:txBody>
+      </p:sp>
+      <p:sp>
+        <p:nvSpPr>
+          <p:cNvPr id="14" name="TextBox 13"/>
+          <p:cNvSpPr txBox="1"/>
+          <p:nvPr/>
+        </p:nvSpPr>
+        <p:spPr>
+          <a:xfrm>
+            <a:off x="548640" y="5669280"/>
+            <a:ext cx="11094415" cy="548640"/>
+          </a:xfrm>
+          <a:prstGeom prst="rect">
+            <a:avLst/>
+          </a:prstGeom>
+          <a:noFill/>
+        </p:spPr>
+        <p:txBody>
+          <a:bodyPr wrap="square" anchor="t" lIns="0" rIns="0" tIns="0" bIns="0"/>
+          <a:lstStyle/>
+          <a:p>
+            <a:pPr algn="l"/>
+            <a:r>
+              <a:rPr sz="1200" b="0" i="0">
+                <a:solidFill>
+                  <a:srgbClr val="A9C8F0"/>
+                </a:solidFill>
+                <a:latin typeface="Calibri"/>
+              </a:rPr>
+              <a:t>https://lana6478.github.io/T-level-Digital-Software-Development/#/02-occupational-specialism/01-analyse-a-problem.md</a:t>
+            </a:r>
+          </a:p>
+        </p:txBody>
+      </p:sp>
+    </p:spTree>
+  </p:cSld>
+  <p:clrMapOvr>
+    <a:masterClrMapping/>
+  </p:clrMapOvr>
+</p:sld>
+</file>
+
 <file path=ppt/slides/slide2.xml><?xml version="1.0" encoding="utf-8"?>
 <p:sld xmlns:a="http://schemas.openxmlformats.org/drawingml/2006/main" xmlns:p="http://schemas.openxmlformats.org/presentationml/2006/main" xmlns:r="http://schemas.openxmlformats.org/officeDocument/2006/relationships">
   <p:cSld>
@@ -4680,6 +8386,398 @@
                 <a:latin typeface="Calibri"/>
               </a:rPr>
               <a:t>3</a:t>
+            </a:r>
+          </a:p>
+        </p:txBody>
+      </p:sp>
+      <p:sp>
+        <p:nvSpPr>
+          <p:cNvPr id="6" name="TextBox 5"/>
+          <p:cNvSpPr txBox="1"/>
+          <p:nvPr/>
+        </p:nvSpPr>
+        <p:spPr>
+          <a:xfrm>
+            <a:off x="548640" y="1554480"/>
+            <a:ext cx="6720840" cy="4617720"/>
+          </a:xfrm>
+          <a:prstGeom prst="rect">
+            <a:avLst/>
+          </a:prstGeom>
+          <a:noFill/>
+        </p:spPr>
+        <p:txBody>
+          <a:bodyPr wrap="square" lIns="0" rIns="0" tIns="0" bIns="0">
+            <a:spAutoFit/>
+          </a:bodyPr>
+          <a:lstStyle/>
+          <a:p>
+            <a:pPr>
+              <a:spcAft>
+                <a:spcPts val="1320"/>
+              </a:spcAft>
+            </a:pPr>
+            <a:r>
+              <a:rPr sz="2200" b="0">
+                <a:solidFill>
+                  <a:srgbClr val="202122"/>
+                </a:solidFill>
+                <a:latin typeface="Calibri"/>
+              </a:rPr>
+              <a:t>Software is built by teams with distinct roles.</a:t>
+            </a:r>
+          </a:p>
+          <a:p>
+            <a:pPr>
+              <a:spcAft>
+                <a:spcPts val="1320"/>
+              </a:spcAft>
+            </a:pPr>
+            <a:r>
+              <a:rPr sz="2200" b="0">
+                <a:solidFill>
+                  <a:srgbClr val="202122"/>
+                </a:solidFill>
+                <a:latin typeface="Calibri"/>
+              </a:rPr>
+              <a:t>The product owner or client sets the requirements. The scrum master keeps the team working well and removes obstacles. The technical lead gives technical guidance. The project manager handles budget, scope, schedule, risk and quality.</a:t>
+            </a:r>
+          </a:p>
+          <a:p>
+            <a:pPr>
+              <a:spcAft>
+                <a:spcPts val="1320"/>
+              </a:spcAft>
+            </a:pPr>
+            <a:r>
+              <a:rPr sz="2200" b="0">
+                <a:solidFill>
+                  <a:srgbClr val="202122"/>
+                </a:solidFill>
+                <a:latin typeface="Calibri"/>
+              </a:rPr>
+              <a:t>In the development team, the systems analyst writes requirements, the UX/UI designer researches users and designs the interface, developers build it, operations engineers keep it stable and security engineers keep it secure. Testers assure quality throughout.</a:t>
+            </a:r>
+          </a:p>
+        </p:txBody>
+      </p:sp>
+      <p:sp>
+        <p:nvSpPr>
+          <p:cNvPr id="7" name="Rounded Rectangle 6"/>
+          <p:cNvSpPr/>
+          <p:nvPr/>
+        </p:nvSpPr>
+        <p:spPr>
+          <a:xfrm>
+            <a:off x="7772400" y="1554480"/>
+            <a:ext cx="3867912" cy="4526280"/>
+          </a:xfrm>
+          <a:prstGeom prst="roundRect">
+            <a:avLst>
+              <a:gd name="adj" fmla="val 8000"/>
+            </a:avLst>
+          </a:prstGeom>
+          <a:solidFill>
+            <a:srgbClr val="03306E"/>
+          </a:solidFill>
+          <a:ln>
+            <a:noFill/>
+          </a:ln>
+          <a:effectLst/>
+        </p:spPr>
+        <p:style>
+          <a:lnRef idx="1">
+            <a:schemeClr val="accent1"/>
+          </a:lnRef>
+          <a:fillRef idx="3">
+            <a:schemeClr val="accent1"/>
+          </a:fillRef>
+          <a:effectRef idx="2">
+            <a:schemeClr val="accent1"/>
+          </a:effectRef>
+          <a:fontRef idx="minor">
+            <a:schemeClr val="lt1"/>
+          </a:fontRef>
+        </p:style>
+        <p:txBody>
+          <a:bodyPr rtlCol="0" anchor="ctr"/>
+          <a:lstStyle/>
+          <a:p/>
+        </p:txBody>
+      </p:sp>
+      <p:sp>
+        <p:nvSpPr>
+          <p:cNvPr id="8" name="Oval 7"/>
+          <p:cNvSpPr/>
+          <p:nvPr/>
+        </p:nvSpPr>
+        <p:spPr>
+          <a:xfrm>
+            <a:off x="8046720" y="1828800"/>
+            <a:ext cx="548640" cy="548640"/>
+          </a:xfrm>
+          <a:prstGeom prst="ellipse">
+            <a:avLst/>
+          </a:prstGeom>
+          <a:solidFill>
+            <a:srgbClr val="33C17A"/>
+          </a:solidFill>
+          <a:ln>
+            <a:noFill/>
+          </a:ln>
+          <a:effectLst/>
+        </p:spPr>
+        <p:style>
+          <a:lnRef idx="1">
+            <a:schemeClr val="accent1"/>
+          </a:lnRef>
+          <a:fillRef idx="3">
+            <a:schemeClr val="accent1"/>
+          </a:fillRef>
+          <a:effectRef idx="2">
+            <a:schemeClr val="accent1"/>
+          </a:effectRef>
+          <a:fontRef idx="minor">
+            <a:schemeClr val="lt1"/>
+          </a:fontRef>
+        </p:style>
+        <p:txBody>
+          <a:bodyPr rtlCol="0" anchor="ctr" lIns="0" rIns="0" tIns="0" bIns="0"/>
+          <a:lstStyle/>
+          <a:p>
+            <a:pPr algn="ctr"/>
+            <a:r>
+              <a:rPr sz="1300" b="1">
+                <a:solidFill>
+                  <a:srgbClr val="202122"/>
+                </a:solidFill>
+                <a:latin typeface="Calibri"/>
+              </a:rPr>
+              <a:t>e.g.</a:t>
+            </a:r>
+          </a:p>
+        </p:txBody>
+      </p:sp>
+      <p:sp>
+        <p:nvSpPr>
+          <p:cNvPr id="9" name="TextBox 8"/>
+          <p:cNvSpPr txBox="1"/>
+          <p:nvPr/>
+        </p:nvSpPr>
+        <p:spPr>
+          <a:xfrm>
+            <a:off x="8046720" y="2560320"/>
+            <a:ext cx="3291840" cy="365760"/>
+          </a:xfrm>
+          <a:prstGeom prst="rect">
+            <a:avLst/>
+          </a:prstGeom>
+          <a:noFill/>
+        </p:spPr>
+        <p:txBody>
+          <a:bodyPr wrap="square" anchor="t" lIns="0" rIns="0" tIns="0" bIns="0"/>
+          <a:lstStyle/>
+          <a:p>
+            <a:pPr algn="l"/>
+            <a:r>
+              <a:rPr sz="1300" b="1" i="0">
+                <a:solidFill>
+                  <a:srgbClr val="A9C8F0"/>
+                </a:solidFill>
+                <a:latin typeface="Calibri"/>
+              </a:rPr>
+              <a:t>EXAMPLE</a:t>
+            </a:r>
+          </a:p>
+        </p:txBody>
+      </p:sp>
+      <p:sp>
+        <p:nvSpPr>
+          <p:cNvPr id="10" name="TextBox 9"/>
+          <p:cNvSpPr txBox="1"/>
+          <p:nvPr/>
+        </p:nvSpPr>
+        <p:spPr>
+          <a:xfrm>
+            <a:off x="8046720" y="2971800"/>
+            <a:ext cx="3291840" cy="2971800"/>
+          </a:xfrm>
+          <a:prstGeom prst="rect">
+            <a:avLst/>
+          </a:prstGeom>
+          <a:noFill/>
+        </p:spPr>
+        <p:txBody>
+          <a:bodyPr wrap="square" anchor="t" lIns="0" rIns="0" tIns="0" bIns="0"/>
+          <a:lstStyle/>
+          <a:p>
+            <a:pPr algn="l"/>
+            <a:r>
+              <a:rPr sz="1900" b="0" i="0">
+                <a:solidFill>
+                  <a:srgbClr val="FFFFFF"/>
+                </a:solidFill>
+                <a:latin typeface="Cambria"/>
+              </a:rPr>
+              <a:t>A bug in production: the tester finds it, the developer fixes it, the operations engineer deploys the fix, and the product owner decides how urgent it is.</a:t>
+            </a:r>
+          </a:p>
+        </p:txBody>
+      </p:sp>
+    </p:spTree>
+  </p:cSld>
+  <p:clrMapOvr>
+    <a:masterClrMapping/>
+  </p:clrMapOvr>
+</p:sld>
+</file>
+
+<file path=ppt/slides/slide4.xml><?xml version="1.0" encoding="utf-8"?>
+<p:sld xmlns:a="http://schemas.openxmlformats.org/drawingml/2006/main" xmlns:p="http://schemas.openxmlformats.org/presentationml/2006/main" xmlns:r="http://schemas.openxmlformats.org/officeDocument/2006/relationships">
+  <p:cSld>
+    <p:bg>
+      <p:bgPr>
+        <a:solidFill>
+          <a:srgbClr val="FFFFFF"/>
+        </a:solidFill>
+        <a:effectLst/>
+      </p:bgPr>
+    </p:bg>
+    <p:spTree>
+      <p:nvGrpSpPr>
+        <p:cNvPr id="1" name=""/>
+        <p:cNvGrpSpPr/>
+        <p:nvPr/>
+      </p:nvGrpSpPr>
+      <p:grpSpPr/>
+      <p:sp>
+        <p:nvSpPr>
+          <p:cNvPr id="2" name="TextBox 1"/>
+          <p:cNvSpPr txBox="1"/>
+          <p:nvPr/>
+        </p:nvSpPr>
+        <p:spPr>
+          <a:xfrm>
+            <a:off x="548640" y="320040"/>
+            <a:ext cx="11094415" cy="274320"/>
+          </a:xfrm>
+          <a:prstGeom prst="rect">
+            <a:avLst/>
+          </a:prstGeom>
+          <a:noFill/>
+        </p:spPr>
+        <p:txBody>
+          <a:bodyPr wrap="square" anchor="t" lIns="0" rIns="0" tIns="0" bIns="0"/>
+          <a:lstStyle/>
+          <a:p>
+            <a:pPr algn="l"/>
+            <a:r>
+              <a:rPr sz="1100" b="1" i="0">
+                <a:solidFill>
+                  <a:srgbClr val="54595D"/>
+                </a:solidFill>
+                <a:latin typeface="Calibri"/>
+              </a:rPr>
+              <a:t>OCCUPATIONAL SPECIALISM  ·  Specialism Content Area 1</a:t>
+            </a:r>
+          </a:p>
+        </p:txBody>
+      </p:sp>
+      <p:sp>
+        <p:nvSpPr>
+          <p:cNvPr id="3" name="TextBox 2"/>
+          <p:cNvSpPr txBox="1"/>
+          <p:nvPr/>
+        </p:nvSpPr>
+        <p:spPr>
+          <a:xfrm>
+            <a:off x="548640" y="566928"/>
+            <a:ext cx="11094415" cy="822960"/>
+          </a:xfrm>
+          <a:prstGeom prst="rect">
+            <a:avLst/>
+          </a:prstGeom>
+          <a:noFill/>
+        </p:spPr>
+        <p:txBody>
+          <a:bodyPr wrap="square" anchor="ctr" lIns="0" rIns="0" tIns="0" bIns="0"/>
+          <a:lstStyle/>
+          <a:p>
+            <a:pPr algn="l"/>
+            <a:r>
+              <a:rPr sz="3200" b="1" i="0">
+                <a:solidFill>
+                  <a:srgbClr val="03306E"/>
+                </a:solidFill>
+                <a:latin typeface="Cambria"/>
+              </a:rPr>
+              <a:t>Roles in the digital team</a:t>
+            </a:r>
+          </a:p>
+        </p:txBody>
+      </p:sp>
+      <p:sp>
+        <p:nvSpPr>
+          <p:cNvPr id="4" name="TextBox 3"/>
+          <p:cNvSpPr txBox="1"/>
+          <p:nvPr/>
+        </p:nvSpPr>
+        <p:spPr>
+          <a:xfrm>
+            <a:off x="548640" y="6446520"/>
+            <a:ext cx="8229600" cy="274320"/>
+          </a:xfrm>
+          <a:prstGeom prst="rect">
+            <a:avLst/>
+          </a:prstGeom>
+          <a:noFill/>
+        </p:spPr>
+        <p:txBody>
+          <a:bodyPr wrap="square" anchor="t" lIns="0" rIns="0" tIns="0" bIns="0"/>
+          <a:lstStyle/>
+          <a:p>
+            <a:pPr algn="l"/>
+            <a:r>
+              <a:rPr sz="1000" b="0" i="0">
+                <a:solidFill>
+                  <a:srgbClr val="54595D"/>
+                </a:solidFill>
+                <a:latin typeface="Calibri"/>
+              </a:rPr>
+              <a:t>Digital Software Development T Level  ·  Team Roles and Project Methodologies</a:t>
+            </a:r>
+          </a:p>
+        </p:txBody>
+      </p:sp>
+      <p:sp>
+        <p:nvSpPr>
+          <p:cNvPr id="5" name="TextBox 4"/>
+          <p:cNvSpPr txBox="1"/>
+          <p:nvPr/>
+        </p:nvSpPr>
+        <p:spPr>
+          <a:xfrm>
+            <a:off x="10728655" y="6446520"/>
+            <a:ext cx="914400" cy="274320"/>
+          </a:xfrm>
+          <a:prstGeom prst="rect">
+            <a:avLst/>
+          </a:prstGeom>
+          <a:noFill/>
+        </p:spPr>
+        <p:txBody>
+          <a:bodyPr wrap="square" anchor="t" lIns="0" rIns="0" tIns="0" bIns="0"/>
+          <a:lstStyle/>
+          <a:p>
+            <a:pPr algn="r"/>
+            <a:r>
+              <a:rPr sz="1000" b="0" i="0">
+                <a:solidFill>
+                  <a:srgbClr val="54595D"/>
+                </a:solidFill>
+                <a:latin typeface="Calibri"/>
+              </a:rPr>
+              <a:t>4</a:t>
             </a:r>
           </a:p>
         </p:txBody>
@@ -5040,671 +9138,6 @@
 </p:sld>
 </file>
 
-<file path=ppt/slides/slide4.xml><?xml version="1.0" encoding="utf-8"?>
-<p:sld xmlns:a="http://schemas.openxmlformats.org/drawingml/2006/main" xmlns:p="http://schemas.openxmlformats.org/presentationml/2006/main" xmlns:r="http://schemas.openxmlformats.org/officeDocument/2006/relationships">
-  <p:cSld>
-    <p:bg>
-      <p:bgPr>
-        <a:solidFill>
-          <a:srgbClr val="FFFFFF"/>
-        </a:solidFill>
-        <a:effectLst/>
-      </p:bgPr>
-    </p:bg>
-    <p:spTree>
-      <p:nvGrpSpPr>
-        <p:cNvPr id="1" name=""/>
-        <p:cNvGrpSpPr/>
-        <p:nvPr/>
-      </p:nvGrpSpPr>
-      <p:grpSpPr/>
-      <p:sp>
-        <p:nvSpPr>
-          <p:cNvPr id="2" name="TextBox 1"/>
-          <p:cNvSpPr txBox="1"/>
-          <p:nvPr/>
-        </p:nvSpPr>
-        <p:spPr>
-          <a:xfrm>
-            <a:off x="548640" y="320040"/>
-            <a:ext cx="11094415" cy="274320"/>
-          </a:xfrm>
-          <a:prstGeom prst="rect">
-            <a:avLst/>
-          </a:prstGeom>
-          <a:noFill/>
-        </p:spPr>
-        <p:txBody>
-          <a:bodyPr wrap="square" anchor="t" lIns="0" rIns="0" tIns="0" bIns="0"/>
-          <a:lstStyle/>
-          <a:p>
-            <a:pPr algn="l"/>
-            <a:r>
-              <a:rPr sz="1100" b="1" i="0">
-                <a:solidFill>
-                  <a:srgbClr val="54595D"/>
-                </a:solidFill>
-                <a:latin typeface="Calibri"/>
-              </a:rPr>
-              <a:t>OCCUPATIONAL SPECIALISM  ·  Specialism Content Area 1</a:t>
-            </a:r>
-          </a:p>
-        </p:txBody>
-      </p:sp>
-      <p:sp>
-        <p:nvSpPr>
-          <p:cNvPr id="3" name="TextBox 2"/>
-          <p:cNvSpPr txBox="1"/>
-          <p:nvPr/>
-        </p:nvSpPr>
-        <p:spPr>
-          <a:xfrm>
-            <a:off x="548640" y="566928"/>
-            <a:ext cx="11094415" cy="822960"/>
-          </a:xfrm>
-          <a:prstGeom prst="rect">
-            <a:avLst/>
-          </a:prstGeom>
-          <a:noFill/>
-        </p:spPr>
-        <p:txBody>
-          <a:bodyPr wrap="square" anchor="ctr" lIns="0" rIns="0" tIns="0" bIns="0"/>
-          <a:lstStyle/>
-          <a:p>
-            <a:pPr algn="l"/>
-            <a:r>
-              <a:rPr sz="3200" b="1" i="0">
-                <a:solidFill>
-                  <a:srgbClr val="03306E"/>
-                </a:solidFill>
-                <a:latin typeface="Cambria"/>
-              </a:rPr>
-              <a:t>Agile and Waterfall</a:t>
-            </a:r>
-          </a:p>
-        </p:txBody>
-      </p:sp>
-      <p:sp>
-        <p:nvSpPr>
-          <p:cNvPr id="4" name="TextBox 3"/>
-          <p:cNvSpPr txBox="1"/>
-          <p:nvPr/>
-        </p:nvSpPr>
-        <p:spPr>
-          <a:xfrm>
-            <a:off x="548640" y="6446520"/>
-            <a:ext cx="8229600" cy="274320"/>
-          </a:xfrm>
-          <a:prstGeom prst="rect">
-            <a:avLst/>
-          </a:prstGeom>
-          <a:noFill/>
-        </p:spPr>
-        <p:txBody>
-          <a:bodyPr wrap="square" anchor="t" lIns="0" rIns="0" tIns="0" bIns="0"/>
-          <a:lstStyle/>
-          <a:p>
-            <a:pPr algn="l"/>
-            <a:r>
-              <a:rPr sz="1000" b="0" i="0">
-                <a:solidFill>
-                  <a:srgbClr val="54595D"/>
-                </a:solidFill>
-                <a:latin typeface="Calibri"/>
-              </a:rPr>
-              <a:t>Digital Software Development T Level  ·  Team Roles and Project Methodologies</a:t>
-            </a:r>
-          </a:p>
-        </p:txBody>
-      </p:sp>
-      <p:sp>
-        <p:nvSpPr>
-          <p:cNvPr id="5" name="TextBox 4"/>
-          <p:cNvSpPr txBox="1"/>
-          <p:nvPr/>
-        </p:nvSpPr>
-        <p:spPr>
-          <a:xfrm>
-            <a:off x="10728655" y="6446520"/>
-            <a:ext cx="914400" cy="274320"/>
-          </a:xfrm>
-          <a:prstGeom prst="rect">
-            <a:avLst/>
-          </a:prstGeom>
-          <a:noFill/>
-        </p:spPr>
-        <p:txBody>
-          <a:bodyPr wrap="square" anchor="t" lIns="0" rIns="0" tIns="0" bIns="0"/>
-          <a:lstStyle/>
-          <a:p>
-            <a:pPr algn="r"/>
-            <a:r>
-              <a:rPr sz="1000" b="0" i="0">
-                <a:solidFill>
-                  <a:srgbClr val="54595D"/>
-                </a:solidFill>
-                <a:latin typeface="Calibri"/>
-              </a:rPr>
-              <a:t>4</a:t>
-            </a:r>
-          </a:p>
-        </p:txBody>
-      </p:sp>
-      <p:sp>
-        <p:nvSpPr>
-          <p:cNvPr id="6" name="Rounded Rectangle 5"/>
-          <p:cNvSpPr/>
-          <p:nvPr/>
-        </p:nvSpPr>
-        <p:spPr>
-          <a:xfrm>
-            <a:off x="548640" y="1600200"/>
-            <a:ext cx="5364327" cy="640080"/>
-          </a:xfrm>
-          <a:prstGeom prst="roundRect">
-            <a:avLst>
-              <a:gd name="adj" fmla="val 15000"/>
-            </a:avLst>
-          </a:prstGeom>
-          <a:solidFill>
-            <a:srgbClr val="03306E"/>
-          </a:solidFill>
-          <a:ln>
-            <a:noFill/>
-          </a:ln>
-          <a:effectLst/>
-        </p:spPr>
-        <p:style>
-          <a:lnRef idx="1">
-            <a:schemeClr val="accent1"/>
-          </a:lnRef>
-          <a:fillRef idx="3">
-            <a:schemeClr val="accent1"/>
-          </a:fillRef>
-          <a:effectRef idx="2">
-            <a:schemeClr val="accent1"/>
-          </a:effectRef>
-          <a:fontRef idx="minor">
-            <a:schemeClr val="lt1"/>
-          </a:fontRef>
-        </p:style>
-        <p:txBody>
-          <a:bodyPr rtlCol="0" anchor="ctr"/>
-          <a:lstStyle/>
-          <a:p/>
-        </p:txBody>
-      </p:sp>
-      <p:sp>
-        <p:nvSpPr>
-          <p:cNvPr id="7" name="TextBox 6"/>
-          <p:cNvSpPr txBox="1"/>
-          <p:nvPr/>
-        </p:nvSpPr>
-        <p:spPr>
-          <a:xfrm>
-            <a:off x="777240" y="1600200"/>
-            <a:ext cx="4907127" cy="640080"/>
-          </a:xfrm>
-          <a:prstGeom prst="rect">
-            <a:avLst/>
-          </a:prstGeom>
-          <a:noFill/>
-        </p:spPr>
-        <p:txBody>
-          <a:bodyPr wrap="square" anchor="ctr" lIns="0" rIns="0" tIns="0" bIns="0"/>
-          <a:lstStyle/>
-          <a:p>
-            <a:pPr algn="l"/>
-            <a:r>
-              <a:rPr sz="2000" b="1" i="0">
-                <a:solidFill>
-                  <a:srgbClr val="FFFFFF"/>
-                </a:solidFill>
-                <a:latin typeface="Calibri"/>
-              </a:rPr>
-              <a:t>Agile</a:t>
-            </a:r>
-          </a:p>
-        </p:txBody>
-      </p:sp>
-      <p:sp>
-        <p:nvSpPr>
-          <p:cNvPr id="8" name="Rounded Rectangle 7"/>
-          <p:cNvSpPr/>
-          <p:nvPr/>
-        </p:nvSpPr>
-        <p:spPr>
-          <a:xfrm>
-            <a:off x="548640" y="2377440"/>
-            <a:ext cx="5364327" cy="3794760"/>
-          </a:xfrm>
-          <a:prstGeom prst="roundRect">
-            <a:avLst>
-              <a:gd name="adj" fmla="val 4000"/>
-            </a:avLst>
-          </a:prstGeom>
-          <a:solidFill>
-            <a:srgbClr val="EAF3FF"/>
-          </a:solidFill>
-          <a:ln>
-            <a:noFill/>
-          </a:ln>
-          <a:effectLst/>
-        </p:spPr>
-        <p:style>
-          <a:lnRef idx="1">
-            <a:schemeClr val="accent1"/>
-          </a:lnRef>
-          <a:fillRef idx="3">
-            <a:schemeClr val="accent1"/>
-          </a:fillRef>
-          <a:effectRef idx="2">
-            <a:schemeClr val="accent1"/>
-          </a:effectRef>
-          <a:fontRef idx="minor">
-            <a:schemeClr val="lt1"/>
-          </a:fontRef>
-        </p:style>
-        <p:txBody>
-          <a:bodyPr rtlCol="0" anchor="ctr"/>
-          <a:lstStyle/>
-          <a:p/>
-        </p:txBody>
-      </p:sp>
-      <p:sp>
-        <p:nvSpPr>
-          <p:cNvPr id="9" name="TextBox 8"/>
-          <p:cNvSpPr txBox="1"/>
-          <p:nvPr/>
-        </p:nvSpPr>
-        <p:spPr>
-          <a:xfrm>
-            <a:off x="822959" y="2606040"/>
-            <a:ext cx="4815687" cy="3337560"/>
-          </a:xfrm>
-          <a:prstGeom prst="rect">
-            <a:avLst/>
-          </a:prstGeom>
-          <a:noFill/>
-        </p:spPr>
-        <p:txBody>
-          <a:bodyPr wrap="square" lIns="0" rIns="0" tIns="0" bIns="0">
-            <a:spAutoFit/>
-          </a:bodyPr>
-          <a:lstStyle/>
-          <a:p>
-            <a:pPr marL="274320" indent="-274320">
-              <a:spcAft>
-                <a:spcPts val="945"/>
-              </a:spcAft>
-              <a:buClr>
-                <a:srgbClr val="0645AD"/>
-              </a:buClr>
-              <a:buFont typeface="Arial"/>
-              <a:buChar char="•"/>
-            </a:pPr>
-            <a:r>
-              <a:rPr sz="2100" b="1">
-                <a:solidFill>
-                  <a:srgbClr val="202122"/>
-                </a:solidFill>
-                <a:latin typeface="Calibri"/>
-              </a:rPr>
-              <a:t>Incremental:</a:t>
-            </a:r>
-            <a:r>
-              <a:rPr sz="2100" b="0">
-                <a:solidFill>
-                  <a:srgbClr val="202122"/>
-                </a:solidFill>
-                <a:latin typeface="Calibri"/>
-              </a:rPr>
-              <a:t> sprints, epics, stories, spikes</a:t>
-            </a:r>
-          </a:p>
-          <a:p>
-            <a:pPr marL="274320" indent="-274320">
-              <a:spcAft>
-                <a:spcPts val="945"/>
-              </a:spcAft>
-              <a:buClr>
-                <a:srgbClr val="0645AD"/>
-              </a:buClr>
-              <a:buFont typeface="Arial"/>
-              <a:buChar char="•"/>
-            </a:pPr>
-            <a:r>
-              <a:rPr sz="2100" b="0">
-                <a:solidFill>
-                  <a:srgbClr val="202122"/>
-                </a:solidFill>
-                <a:latin typeface="Calibri"/>
-              </a:rPr>
-              <a:t>Requirements can keep changing</a:t>
-            </a:r>
-          </a:p>
-          <a:p>
-            <a:pPr marL="274320" indent="-274320">
-              <a:spcAft>
-                <a:spcPts val="945"/>
-              </a:spcAft>
-              <a:buClr>
-                <a:srgbClr val="0645AD"/>
-              </a:buClr>
-              <a:buFont typeface="Arial"/>
-              <a:buChar char="•"/>
-            </a:pPr>
-            <a:r>
-              <a:rPr sz="2100" b="0">
-                <a:solidFill>
-                  <a:srgbClr val="202122"/>
-                </a:solidFill>
-                <a:latin typeface="Calibri"/>
-              </a:rPr>
-              <a:t>Users see working software every iteration</a:t>
-            </a:r>
-          </a:p>
-          <a:p>
-            <a:pPr marL="274320" indent="-274320">
-              <a:spcAft>
-                <a:spcPts val="945"/>
-              </a:spcAft>
-              <a:buClr>
-                <a:srgbClr val="0645AD"/>
-              </a:buClr>
-              <a:buFont typeface="Arial"/>
-              <a:buChar char="•"/>
-            </a:pPr>
-            <a:r>
-              <a:rPr sz="2100" b="0">
-                <a:solidFill>
-                  <a:srgbClr val="202122"/>
-                </a:solidFill>
-                <a:latin typeface="Calibri"/>
-              </a:rPr>
-              <a:t>Less formal documentation</a:t>
-            </a:r>
-          </a:p>
-          <a:p>
-            <a:pPr marL="274320" indent="-274320">
-              <a:spcAft>
-                <a:spcPts val="945"/>
-              </a:spcAft>
-              <a:buClr>
-                <a:srgbClr val="0645AD"/>
-              </a:buClr>
-              <a:buFont typeface="Arial"/>
-              <a:buChar char="•"/>
-            </a:pPr>
-            <a:r>
-              <a:rPr sz="2100" b="0">
-                <a:solidFill>
-                  <a:srgbClr val="202122"/>
-                </a:solidFill>
-                <a:latin typeface="Calibri"/>
-              </a:rPr>
-              <a:t>Scaled Agile extends it to large teams</a:t>
-            </a:r>
-          </a:p>
-        </p:txBody>
-      </p:sp>
-      <p:sp>
-        <p:nvSpPr>
-          <p:cNvPr id="10" name="Rounded Rectangle 9"/>
-          <p:cNvSpPr/>
-          <p:nvPr/>
-        </p:nvSpPr>
-        <p:spPr>
-          <a:xfrm>
-            <a:off x="6278727" y="1600200"/>
-            <a:ext cx="5364327" cy="640080"/>
-          </a:xfrm>
-          <a:prstGeom prst="roundRect">
-            <a:avLst>
-              <a:gd name="adj" fmla="val 15000"/>
-            </a:avLst>
-          </a:prstGeom>
-          <a:solidFill>
-            <a:srgbClr val="0645AD"/>
-          </a:solidFill>
-          <a:ln>
-            <a:noFill/>
-          </a:ln>
-          <a:effectLst/>
-        </p:spPr>
-        <p:style>
-          <a:lnRef idx="1">
-            <a:schemeClr val="accent1"/>
-          </a:lnRef>
-          <a:fillRef idx="3">
-            <a:schemeClr val="accent1"/>
-          </a:fillRef>
-          <a:effectRef idx="2">
-            <a:schemeClr val="accent1"/>
-          </a:effectRef>
-          <a:fontRef idx="minor">
-            <a:schemeClr val="lt1"/>
-          </a:fontRef>
-        </p:style>
-        <p:txBody>
-          <a:bodyPr rtlCol="0" anchor="ctr"/>
-          <a:lstStyle/>
-          <a:p/>
-        </p:txBody>
-      </p:sp>
-      <p:sp>
-        <p:nvSpPr>
-          <p:cNvPr id="11" name="TextBox 10"/>
-          <p:cNvSpPr txBox="1"/>
-          <p:nvPr/>
-        </p:nvSpPr>
-        <p:spPr>
-          <a:xfrm>
-            <a:off x="6507327" y="1600200"/>
-            <a:ext cx="4907127" cy="640080"/>
-          </a:xfrm>
-          <a:prstGeom prst="rect">
-            <a:avLst/>
-          </a:prstGeom>
-          <a:noFill/>
-        </p:spPr>
-        <p:txBody>
-          <a:bodyPr wrap="square" anchor="ctr" lIns="0" rIns="0" tIns="0" bIns="0"/>
-          <a:lstStyle/>
-          <a:p>
-            <a:pPr algn="l"/>
-            <a:r>
-              <a:rPr sz="2000" b="1" i="0">
-                <a:solidFill>
-                  <a:srgbClr val="FFFFFF"/>
-                </a:solidFill>
-                <a:latin typeface="Calibri"/>
-              </a:rPr>
-              <a:t>Waterfall</a:t>
-            </a:r>
-          </a:p>
-        </p:txBody>
-      </p:sp>
-      <p:sp>
-        <p:nvSpPr>
-          <p:cNvPr id="12" name="Rounded Rectangle 11"/>
-          <p:cNvSpPr/>
-          <p:nvPr/>
-        </p:nvSpPr>
-        <p:spPr>
-          <a:xfrm>
-            <a:off x="6278727" y="2377440"/>
-            <a:ext cx="5364327" cy="3794760"/>
-          </a:xfrm>
-          <a:prstGeom prst="roundRect">
-            <a:avLst>
-              <a:gd name="adj" fmla="val 4000"/>
-            </a:avLst>
-          </a:prstGeom>
-          <a:solidFill>
-            <a:srgbClr val="EAF3FF"/>
-          </a:solidFill>
-          <a:ln>
-            <a:noFill/>
-          </a:ln>
-          <a:effectLst/>
-        </p:spPr>
-        <p:style>
-          <a:lnRef idx="1">
-            <a:schemeClr val="accent1"/>
-          </a:lnRef>
-          <a:fillRef idx="3">
-            <a:schemeClr val="accent1"/>
-          </a:fillRef>
-          <a:effectRef idx="2">
-            <a:schemeClr val="accent1"/>
-          </a:effectRef>
-          <a:fontRef idx="minor">
-            <a:schemeClr val="lt1"/>
-          </a:fontRef>
-        </p:style>
-        <p:txBody>
-          <a:bodyPr rtlCol="0" anchor="ctr"/>
-          <a:lstStyle/>
-          <a:p/>
-        </p:txBody>
-      </p:sp>
-      <p:sp>
-        <p:nvSpPr>
-          <p:cNvPr id="13" name="TextBox 12"/>
-          <p:cNvSpPr txBox="1"/>
-          <p:nvPr/>
-        </p:nvSpPr>
-        <p:spPr>
-          <a:xfrm>
-            <a:off x="6553047" y="2606040"/>
-            <a:ext cx="4815687" cy="3337560"/>
-          </a:xfrm>
-          <a:prstGeom prst="rect">
-            <a:avLst/>
-          </a:prstGeom>
-          <a:noFill/>
-        </p:spPr>
-        <p:txBody>
-          <a:bodyPr wrap="square" lIns="0" rIns="0" tIns="0" bIns="0">
-            <a:spAutoFit/>
-          </a:bodyPr>
-          <a:lstStyle/>
-          <a:p>
-            <a:pPr marL="274320" indent="-274320">
-              <a:spcAft>
-                <a:spcPts val="945"/>
-              </a:spcAft>
-              <a:buClr>
-                <a:srgbClr val="0645AD"/>
-              </a:buClr>
-              <a:buFont typeface="Arial"/>
-              <a:buChar char="•"/>
-            </a:pPr>
-            <a:r>
-              <a:rPr sz="2100" b="0">
-                <a:solidFill>
-                  <a:srgbClr val="202122"/>
-                </a:solidFill>
-                <a:latin typeface="Calibri"/>
-              </a:rPr>
-              <a:t>Rigid, systematic stages</a:t>
-            </a:r>
-          </a:p>
-          <a:p>
-            <a:pPr marL="274320" indent="-274320">
-              <a:spcAft>
-                <a:spcPts val="945"/>
-              </a:spcAft>
-              <a:buClr>
-                <a:srgbClr val="0645AD"/>
-              </a:buClr>
-              <a:buFont typeface="Arial"/>
-              <a:buChar char="•"/>
-            </a:pPr>
-            <a:r>
-              <a:rPr sz="2100" b="0">
-                <a:solidFill>
-                  <a:srgbClr val="202122"/>
-                </a:solidFill>
-                <a:latin typeface="Calibri"/>
-              </a:rPr>
-              <a:t>Progress measured by completed artefacts</a:t>
-            </a:r>
-          </a:p>
-          <a:p>
-            <a:pPr marL="274320" indent="-274320">
-              <a:spcAft>
-                <a:spcPts val="945"/>
-              </a:spcAft>
-              <a:buClr>
-                <a:srgbClr val="0645AD"/>
-              </a:buClr>
-              <a:buFont typeface="Arial"/>
-              <a:buChar char="•"/>
-            </a:pPr>
-            <a:r>
-              <a:rPr sz="2100" b="0">
-                <a:solidFill>
-                  <a:srgbClr val="202122"/>
-                </a:solidFill>
-                <a:latin typeface="Calibri"/>
-              </a:rPr>
-              <a:t>High upfront cost, slower return</a:t>
-            </a:r>
-          </a:p>
-          <a:p>
-            <a:pPr marL="274320" indent="-274320">
-              <a:spcAft>
-                <a:spcPts val="945"/>
-              </a:spcAft>
-              <a:buClr>
-                <a:srgbClr val="0645AD"/>
-              </a:buClr>
-              <a:buFont typeface="Arial"/>
-              <a:buChar char="•"/>
-            </a:pPr>
-            <a:r>
-              <a:rPr sz="2100" b="0">
-                <a:solidFill>
-                  <a:srgbClr val="202122"/>
-                </a:solidFill>
-                <a:latin typeface="Calibri"/>
-              </a:rPr>
-              <a:t>Cancelled early may leave nothing usable</a:t>
-            </a:r>
-          </a:p>
-          <a:p>
-            <a:pPr marL="274320" indent="-274320">
-              <a:spcAft>
-                <a:spcPts val="945"/>
-              </a:spcAft>
-              <a:buClr>
-                <a:srgbClr val="0645AD"/>
-              </a:buClr>
-              <a:buFont typeface="Arial"/>
-              <a:buChar char="•"/>
-            </a:pPr>
-            <a:r>
-              <a:rPr sz="2100" b="0">
-                <a:solidFill>
-                  <a:srgbClr val="202122"/>
-                </a:solidFill>
-                <a:latin typeface="Calibri"/>
-              </a:rPr>
-              <a:t>Heavy documentation, little user contact</a:t>
-            </a:r>
-          </a:p>
-        </p:txBody>
-      </p:sp>
-    </p:spTree>
-  </p:cSld>
-  <p:clrMapOvr>
-    <a:masterClrMapping/>
-  </p:clrMapOvr>
-</p:sld>
-</file>
-
 <file path=ppt/slides/slide5.xml><?xml version="1.0" encoding="utf-8"?>
 <p:sld xmlns:a="http://schemas.openxmlformats.org/drawingml/2006/main" xmlns:p="http://schemas.openxmlformats.org/presentationml/2006/main" xmlns:r="http://schemas.openxmlformats.org/officeDocument/2006/relationships">
   <p:cSld>
@@ -5784,7 +9217,7 @@
                 </a:solidFill>
                 <a:latin typeface="Cambria"/>
               </a:rPr>
-              <a:t>Other methodologies</a:t>
+              <a:t>Quick check: Roles in the digital team</a:t>
             </a:r>
           </a:p>
         </p:txBody>
@@ -5857,58 +9290,14 @@
       </p:sp>
       <p:sp>
         <p:nvSpPr>
-          <p:cNvPr id="6" name="Rounded Rectangle 5"/>
+          <p:cNvPr id="6" name="Oval 5"/>
           <p:cNvSpPr/>
           <p:nvPr/>
         </p:nvSpPr>
         <p:spPr>
           <a:xfrm>
-            <a:off x="548640" y="1600200"/>
-            <a:ext cx="3515258" cy="4572000"/>
-          </a:xfrm>
-          <a:prstGeom prst="roundRect">
-            <a:avLst>
-              <a:gd name="adj" fmla="val 6000"/>
-            </a:avLst>
-          </a:prstGeom>
-          <a:solidFill>
-            <a:srgbClr val="EAF3FF"/>
-          </a:solidFill>
-          <a:ln>
-            <a:noFill/>
-          </a:ln>
-          <a:effectLst/>
-        </p:spPr>
-        <p:style>
-          <a:lnRef idx="1">
-            <a:schemeClr val="accent1"/>
-          </a:lnRef>
-          <a:fillRef idx="3">
-            <a:schemeClr val="accent1"/>
-          </a:fillRef>
-          <a:effectRef idx="2">
-            <a:schemeClr val="accent1"/>
-          </a:effectRef>
-          <a:fontRef idx="minor">
-            <a:schemeClr val="lt1"/>
-          </a:fontRef>
-        </p:style>
-        <p:txBody>
-          <a:bodyPr rtlCol="0" anchor="ctr"/>
-          <a:lstStyle/>
-          <a:p/>
-        </p:txBody>
-      </p:sp>
-      <p:sp>
-        <p:nvSpPr>
-          <p:cNvPr id="7" name="Oval 6"/>
-          <p:cNvSpPr/>
-          <p:nvPr/>
-        </p:nvSpPr>
-        <p:spPr>
-          <a:xfrm>
-            <a:off x="777240" y="1828800"/>
-            <a:ext cx="457200" cy="457200"/>
+            <a:off x="548640" y="1691640"/>
+            <a:ext cx="502920" cy="502920"/>
           </a:xfrm>
           <a:prstGeom prst="ellipse">
             <a:avLst/>
@@ -5941,7 +9330,7 @@
           <a:p>
             <a:pPr algn="ctr"/>
             <a:r>
-              <a:rPr sz="1500" b="1">
+              <a:rPr sz="1600" b="1">
                 <a:solidFill>
                   <a:srgbClr val="202122"/>
                 </a:solidFill>
@@ -5954,14 +9343,14 @@
       </p:sp>
       <p:sp>
         <p:nvSpPr>
-          <p:cNvPr id="8" name="TextBox 7"/>
+          <p:cNvPr id="7" name="TextBox 6"/>
           <p:cNvSpPr txBox="1"/>
           <p:nvPr/>
         </p:nvSpPr>
         <p:spPr>
           <a:xfrm>
-            <a:off x="1371600" y="1801368"/>
-            <a:ext cx="2509418" cy="512064"/>
+            <a:off x="1371600" y="1645920"/>
+            <a:ext cx="10271455" cy="1188720"/>
           </a:xfrm>
           <a:prstGeom prst="rect">
             <a:avLst/>
@@ -5969,109 +9358,32 @@
           <a:noFill/>
         </p:spPr>
         <p:txBody>
-          <a:bodyPr wrap="square" anchor="ctr" lIns="0" rIns="0" tIns="0" bIns="0"/>
+          <a:bodyPr wrap="square" anchor="t" lIns="0" rIns="0" tIns="0" bIns="0"/>
           <a:lstStyle/>
           <a:p>
             <a:pPr algn="l"/>
             <a:r>
-              <a:rPr sz="1900" b="1" i="0">
-                <a:solidFill>
-                  <a:srgbClr val="03306E"/>
-                </a:solidFill>
-                <a:latin typeface="Calibri"/>
-              </a:rPr>
-              <a:t>RAD</a:t>
-            </a:r>
-          </a:p>
-        </p:txBody>
-      </p:sp>
-      <p:sp>
-        <p:nvSpPr>
-          <p:cNvPr id="9" name="TextBox 8"/>
-          <p:cNvSpPr txBox="1"/>
-          <p:nvPr/>
-        </p:nvSpPr>
-        <p:spPr>
-          <a:xfrm>
-            <a:off x="777240" y="2468880"/>
-            <a:ext cx="3058058" cy="3566160"/>
-          </a:xfrm>
-          <a:prstGeom prst="rect">
-            <a:avLst/>
-          </a:prstGeom>
-          <a:noFill/>
-        </p:spPr>
-        <p:txBody>
-          <a:bodyPr wrap="square" anchor="t" lIns="0" rIns="0" tIns="0" bIns="0"/>
-          <a:lstStyle/>
-          <a:p>
-            <a:pPr algn="l"/>
-            <a:r>
-              <a:rPr sz="2000" b="0" i="0">
+              <a:rPr sz="2400" b="0" i="0">
                 <a:solidFill>
                   <a:srgbClr val="202122"/>
                 </a:solidFill>
                 <a:latin typeface="Calibri"/>
               </a:rPr>
-              <a:t>Fast prototypes improved systematically. Features before quality, heavy code reuse. Small to medium projects.</a:t>
-            </a:r>
-          </a:p>
-        </p:txBody>
-      </p:sp>
-      <p:sp>
-        <p:nvSpPr>
-          <p:cNvPr id="10" name="Rounded Rectangle 9"/>
+              <a:t>Who sets the product's requirements?</a:t>
+            </a:r>
+          </a:p>
+        </p:txBody>
+      </p:sp>
+      <p:sp>
+        <p:nvSpPr>
+          <p:cNvPr id="8" name="Oval 7"/>
           <p:cNvSpPr/>
           <p:nvPr/>
         </p:nvSpPr>
         <p:spPr>
           <a:xfrm>
-            <a:off x="4338218" y="1600200"/>
-            <a:ext cx="3515258" cy="4572000"/>
-          </a:xfrm>
-          <a:prstGeom prst="roundRect">
-            <a:avLst>
-              <a:gd name="adj" fmla="val 6000"/>
-            </a:avLst>
-          </a:prstGeom>
-          <a:solidFill>
-            <a:srgbClr val="EAF3FF"/>
-          </a:solidFill>
-          <a:ln>
-            <a:noFill/>
-          </a:ln>
-          <a:effectLst/>
-        </p:spPr>
-        <p:style>
-          <a:lnRef idx="1">
-            <a:schemeClr val="accent1"/>
-          </a:lnRef>
-          <a:fillRef idx="3">
-            <a:schemeClr val="accent1"/>
-          </a:fillRef>
-          <a:effectRef idx="2">
-            <a:schemeClr val="accent1"/>
-          </a:effectRef>
-          <a:fontRef idx="minor">
-            <a:schemeClr val="lt1"/>
-          </a:fontRef>
-        </p:style>
-        <p:txBody>
-          <a:bodyPr rtlCol="0" anchor="ctr"/>
-          <a:lstStyle/>
-          <a:p/>
-        </p:txBody>
-      </p:sp>
-      <p:sp>
-        <p:nvSpPr>
-          <p:cNvPr id="11" name="Oval 10"/>
-          <p:cNvSpPr/>
-          <p:nvPr/>
-        </p:nvSpPr>
-        <p:spPr>
-          <a:xfrm>
-            <a:off x="4566818" y="1828800"/>
-            <a:ext cx="457200" cy="457200"/>
+            <a:off x="548640" y="3108960"/>
+            <a:ext cx="502920" cy="502920"/>
           </a:xfrm>
           <a:prstGeom prst="ellipse">
             <a:avLst/>
@@ -6104,7 +9416,7 @@
           <a:p>
             <a:pPr algn="ctr"/>
             <a:r>
-              <a:rPr sz="1500" b="1">
+              <a:rPr sz="1600" b="1">
                 <a:solidFill>
                   <a:srgbClr val="202122"/>
                 </a:solidFill>
@@ -6117,14 +9429,14 @@
       </p:sp>
       <p:sp>
         <p:nvSpPr>
-          <p:cNvPr id="12" name="TextBox 11"/>
+          <p:cNvPr id="9" name="TextBox 8"/>
           <p:cNvSpPr txBox="1"/>
           <p:nvPr/>
         </p:nvSpPr>
         <p:spPr>
           <a:xfrm>
-            <a:off x="5161178" y="1801368"/>
-            <a:ext cx="2509418" cy="512064"/>
+            <a:off x="1371600" y="3063240"/>
+            <a:ext cx="10271455" cy="1188720"/>
           </a:xfrm>
           <a:prstGeom prst="rect">
             <a:avLst/>
@@ -6132,109 +9444,32 @@
           <a:noFill/>
         </p:spPr>
         <p:txBody>
-          <a:bodyPr wrap="square" anchor="ctr" lIns="0" rIns="0" tIns="0" bIns="0"/>
+          <a:bodyPr wrap="square" anchor="t" lIns="0" rIns="0" tIns="0" bIns="0"/>
           <a:lstStyle/>
           <a:p>
             <a:pPr algn="l"/>
             <a:r>
-              <a:rPr sz="1900" b="1" i="0">
-                <a:solidFill>
-                  <a:srgbClr val="03306E"/>
-                </a:solidFill>
-                <a:latin typeface="Calibri"/>
-              </a:rPr>
-              <a:t>Lean</a:t>
-            </a:r>
-          </a:p>
-        </p:txBody>
-      </p:sp>
-      <p:sp>
-        <p:nvSpPr>
-          <p:cNvPr id="13" name="TextBox 12"/>
-          <p:cNvSpPr txBox="1"/>
-          <p:nvPr/>
-        </p:nvSpPr>
-        <p:spPr>
-          <a:xfrm>
-            <a:off x="4566818" y="2468880"/>
-            <a:ext cx="3058058" cy="3566160"/>
-          </a:xfrm>
-          <a:prstGeom prst="rect">
-            <a:avLst/>
-          </a:prstGeom>
-          <a:noFill/>
-        </p:spPr>
-        <p:txBody>
-          <a:bodyPr wrap="square" anchor="t" lIns="0" rIns="0" tIns="0" bIns="0"/>
-          <a:lstStyle/>
-          <a:p>
-            <a:pPr algn="l"/>
-            <a:r>
-              <a:rPr sz="2000" b="0" i="0">
+              <a:rPr sz="2400" b="0" i="0">
                 <a:solidFill>
                   <a:srgbClr val="202122"/>
                 </a:solidFill>
                 <a:latin typeface="Calibri"/>
               </a:rPr>
-              <a:t>Cut waste, defer decisions, short cycles, fit-for-use iterations. Small teams.</a:t>
-            </a:r>
-          </a:p>
-        </p:txBody>
-      </p:sp>
-      <p:sp>
-        <p:nvSpPr>
-          <p:cNvPr id="14" name="Rounded Rectangle 13"/>
+              <a:t>What does a scrum master do?</a:t>
+            </a:r>
+          </a:p>
+        </p:txBody>
+      </p:sp>
+      <p:sp>
+        <p:nvSpPr>
+          <p:cNvPr id="10" name="Oval 9"/>
           <p:cNvSpPr/>
           <p:nvPr/>
         </p:nvSpPr>
         <p:spPr>
           <a:xfrm>
-            <a:off x="8127796" y="1600200"/>
-            <a:ext cx="3515258" cy="4572000"/>
-          </a:xfrm>
-          <a:prstGeom prst="roundRect">
-            <a:avLst>
-              <a:gd name="adj" fmla="val 6000"/>
-            </a:avLst>
-          </a:prstGeom>
-          <a:solidFill>
-            <a:srgbClr val="EAF3FF"/>
-          </a:solidFill>
-          <a:ln>
-            <a:noFill/>
-          </a:ln>
-          <a:effectLst/>
-        </p:spPr>
-        <p:style>
-          <a:lnRef idx="1">
-            <a:schemeClr val="accent1"/>
-          </a:lnRef>
-          <a:fillRef idx="3">
-            <a:schemeClr val="accent1"/>
-          </a:fillRef>
-          <a:effectRef idx="2">
-            <a:schemeClr val="accent1"/>
-          </a:effectRef>
-          <a:fontRef idx="minor">
-            <a:schemeClr val="lt1"/>
-          </a:fontRef>
-        </p:style>
-        <p:txBody>
-          <a:bodyPr rtlCol="0" anchor="ctr"/>
-          <a:lstStyle/>
-          <a:p/>
-        </p:txBody>
-      </p:sp>
-      <p:sp>
-        <p:nvSpPr>
-          <p:cNvPr id="15" name="Oval 14"/>
-          <p:cNvSpPr/>
-          <p:nvPr/>
-        </p:nvSpPr>
-        <p:spPr>
-          <a:xfrm>
-            <a:off x="8356396" y="1828800"/>
-            <a:ext cx="457200" cy="457200"/>
+            <a:off x="548640" y="4526280"/>
+            <a:ext cx="502920" cy="502920"/>
           </a:xfrm>
           <a:prstGeom prst="ellipse">
             <a:avLst/>
@@ -6267,7 +9502,7 @@
           <a:p>
             <a:pPr algn="ctr"/>
             <a:r>
-              <a:rPr sz="1500" b="1">
+              <a:rPr sz="1600" b="1">
                 <a:solidFill>
                   <a:srgbClr val="202122"/>
                 </a:solidFill>
@@ -6280,14 +9515,14 @@
       </p:sp>
       <p:sp>
         <p:nvSpPr>
-          <p:cNvPr id="16" name="TextBox 15"/>
+          <p:cNvPr id="11" name="TextBox 10"/>
           <p:cNvSpPr txBox="1"/>
           <p:nvPr/>
         </p:nvSpPr>
         <p:spPr>
           <a:xfrm>
-            <a:off x="8950756" y="1801368"/>
-            <a:ext cx="2509418" cy="512064"/>
+            <a:off x="1371600" y="4480560"/>
+            <a:ext cx="10271455" cy="1188720"/>
           </a:xfrm>
           <a:prstGeom prst="rect">
             <a:avLst/>
@@ -6295,32 +9530,32 @@
           <a:noFill/>
         </p:spPr>
         <p:txBody>
-          <a:bodyPr wrap="square" anchor="ctr" lIns="0" rIns="0" tIns="0" bIns="0"/>
+          <a:bodyPr wrap="square" anchor="t" lIns="0" rIns="0" tIns="0" bIns="0"/>
           <a:lstStyle/>
           <a:p>
             <a:pPr algn="l"/>
             <a:r>
-              <a:rPr sz="1900" b="1" i="0">
-                <a:solidFill>
-                  <a:srgbClr val="03306E"/>
-                </a:solidFill>
-                <a:latin typeface="Calibri"/>
-              </a:rPr>
-              <a:t>User Centred Design</a:t>
-            </a:r>
-          </a:p>
-        </p:txBody>
-      </p:sp>
-      <p:sp>
-        <p:nvSpPr>
-          <p:cNvPr id="17" name="TextBox 16"/>
+              <a:rPr sz="2400" b="0" i="0">
+                <a:solidFill>
+                  <a:srgbClr val="202122"/>
+                </a:solidFill>
+                <a:latin typeface="Calibri"/>
+              </a:rPr>
+              <a:t>What does a UX/UI designer do?</a:t>
+            </a:r>
+          </a:p>
+        </p:txBody>
+      </p:sp>
+      <p:sp>
+        <p:nvSpPr>
+          <p:cNvPr id="12" name="TextBox 11"/>
           <p:cNvSpPr txBox="1"/>
           <p:nvPr/>
         </p:nvSpPr>
         <p:spPr>
           <a:xfrm>
-            <a:off x="8356396" y="2468880"/>
-            <a:ext cx="3058058" cy="3566160"/>
+            <a:off x="548640" y="5852160"/>
+            <a:ext cx="11094415" cy="365760"/>
           </a:xfrm>
           <a:prstGeom prst="rect">
             <a:avLst/>
@@ -6333,13 +9568,13 @@
           <a:p>
             <a:pPr algn="l"/>
             <a:r>
-              <a:rPr sz="2000" b="0" i="0">
-                <a:solidFill>
-                  <a:srgbClr val="202122"/>
-                </a:solidFill>
-                <a:latin typeface="Calibri"/>
-              </a:rPr>
-              <a:t>Empathetic, iterative, interdisciplinary: understand, specify, design, assess.</a:t>
+              <a:rPr sz="1300" b="0" i="1">
+                <a:solidFill>
+                  <a:srgbClr val="54595D"/>
+                </a:solidFill>
+                <a:latin typeface="Calibri"/>
+              </a:rPr>
+              <a:t>Answer on mini whiteboards or in your book. Answers are in the speaker notes.</a:t>
             </a:r>
           </a:p>
         </p:txBody>
@@ -6431,7 +9666,7 @@
                 </a:solidFill>
                 <a:latin typeface="Cambria"/>
               </a:rPr>
-              <a:t>Check your understanding</a:t>
+              <a:t>Agile and Waterfall</a:t>
             </a:r>
           </a:p>
         </p:txBody>
@@ -6504,14 +9739,113 @@
       </p:sp>
       <p:sp>
         <p:nvSpPr>
-          <p:cNvPr id="6" name="Oval 5"/>
+          <p:cNvPr id="6" name="TextBox 5"/>
+          <p:cNvSpPr txBox="1"/>
+          <p:nvPr/>
+        </p:nvSpPr>
+        <p:spPr>
+          <a:xfrm>
+            <a:off x="548640" y="1554480"/>
+            <a:ext cx="6720840" cy="4617720"/>
+          </a:xfrm>
+          <a:prstGeom prst="rect">
+            <a:avLst/>
+          </a:prstGeom>
+          <a:noFill/>
+        </p:spPr>
+        <p:txBody>
+          <a:bodyPr wrap="square" lIns="0" rIns="0" tIns="0" bIns="0">
+            <a:spAutoFit/>
+          </a:bodyPr>
+          <a:lstStyle/>
+          <a:p>
+            <a:pPr>
+              <a:spcAft>
+                <a:spcPts val="1320"/>
+              </a:spcAft>
+            </a:pPr>
+            <a:r>
+              <a:rPr sz="2200" b="0">
+                <a:solidFill>
+                  <a:srgbClr val="202122"/>
+                </a:solidFill>
+                <a:latin typeface="Calibri"/>
+              </a:rPr>
+              <a:t>Agile delivers software in small increments: sprints, epics (large features), stories and spikes (research tasks). Users see working software every iteration, requirements can change, and even a cancelled project leaves usable code. Documentation is lighter. Scaled Agile extends this to large teams.</a:t>
+            </a:r>
+          </a:p>
+          <a:p>
+            <a:pPr>
+              <a:spcAft>
+                <a:spcPts val="1320"/>
+              </a:spcAft>
+            </a:pPr>
+            <a:r>
+              <a:rPr sz="2200" b="0">
+                <a:solidFill>
+                  <a:srgbClr val="202122"/>
+                </a:solidFill>
+                <a:latin typeface="Calibri"/>
+              </a:rPr>
+              <a:t>Waterfall moves through fixed stages in order. Progress is measured by completed documents, costs are high up front and returns slow, users see little until the end, and a project cancelled early may leave nothing usable. It suits projects with fixed, well-understood requirements.</a:t>
+            </a:r>
+          </a:p>
+        </p:txBody>
+      </p:sp>
+      <p:sp>
+        <p:nvSpPr>
+          <p:cNvPr id="7" name="Rounded Rectangle 6"/>
           <p:cNvSpPr/>
           <p:nvPr/>
         </p:nvSpPr>
         <p:spPr>
           <a:xfrm>
-            <a:off x="548640" y="1618488"/>
-            <a:ext cx="411480" cy="411480"/>
+            <a:off x="7772400" y="1554480"/>
+            <a:ext cx="3867912" cy="4526280"/>
+          </a:xfrm>
+          <a:prstGeom prst="roundRect">
+            <a:avLst>
+              <a:gd name="adj" fmla="val 8000"/>
+            </a:avLst>
+          </a:prstGeom>
+          <a:solidFill>
+            <a:srgbClr val="03306E"/>
+          </a:solidFill>
+          <a:ln>
+            <a:noFill/>
+          </a:ln>
+          <a:effectLst/>
+        </p:spPr>
+        <p:style>
+          <a:lnRef idx="1">
+            <a:schemeClr val="accent1"/>
+          </a:lnRef>
+          <a:fillRef idx="3">
+            <a:schemeClr val="accent1"/>
+          </a:fillRef>
+          <a:effectRef idx="2">
+            <a:schemeClr val="accent1"/>
+          </a:effectRef>
+          <a:fontRef idx="minor">
+            <a:schemeClr val="lt1"/>
+          </a:fontRef>
+        </p:style>
+        <p:txBody>
+          <a:bodyPr rtlCol="0" anchor="ctr"/>
+          <a:lstStyle/>
+          <a:p/>
+        </p:txBody>
+      </p:sp>
+      <p:sp>
+        <p:nvSpPr>
+          <p:cNvPr id="8" name="Oval 7"/>
+          <p:cNvSpPr/>
+          <p:nvPr/>
+        </p:nvSpPr>
+        <p:spPr>
+          <a:xfrm>
+            <a:off x="8046720" y="1828800"/>
+            <a:ext cx="548640" cy="548640"/>
           </a:xfrm>
           <a:prstGeom prst="ellipse">
             <a:avLst/>
@@ -6544,99 +9878,13 @@
           <a:p>
             <a:pPr algn="ctr"/>
             <a:r>
-              <a:rPr sz="1400" b="1">
+              <a:rPr sz="1300" b="1">
                 <a:solidFill>
                   <a:srgbClr val="202122"/>
                 </a:solidFill>
                 <a:latin typeface="Calibri"/>
               </a:rPr>
-              <a:t>1</a:t>
-            </a:r>
-          </a:p>
-        </p:txBody>
-      </p:sp>
-      <p:sp>
-        <p:nvSpPr>
-          <p:cNvPr id="7" name="TextBox 6"/>
-          <p:cNvSpPr txBox="1"/>
-          <p:nvPr/>
-        </p:nvSpPr>
-        <p:spPr>
-          <a:xfrm>
-            <a:off x="1234440" y="1600200"/>
-            <a:ext cx="10408615" cy="1030986"/>
-          </a:xfrm>
-          <a:prstGeom prst="rect">
-            <a:avLst/>
-          </a:prstGeom>
-          <a:noFill/>
-        </p:spPr>
-        <p:txBody>
-          <a:bodyPr wrap="square" anchor="t" lIns="0" rIns="0" tIns="0" bIns="0"/>
-          <a:lstStyle/>
-          <a:p>
-            <a:pPr algn="l"/>
-            <a:r>
-              <a:rPr sz="2200" b="0" i="0">
-                <a:solidFill>
-                  <a:srgbClr val="202122"/>
-                </a:solidFill>
-                <a:latin typeface="Calibri"/>
-              </a:rPr>
-              <a:t>Who keeps a Scrum team cohesive and resourced?</a:t>
-            </a:r>
-          </a:p>
-        </p:txBody>
-      </p:sp>
-      <p:sp>
-        <p:nvSpPr>
-          <p:cNvPr id="8" name="Oval 7"/>
-          <p:cNvSpPr/>
-          <p:nvPr/>
-        </p:nvSpPr>
-        <p:spPr>
-          <a:xfrm>
-            <a:off x="548640" y="2814066"/>
-            <a:ext cx="411480" cy="411480"/>
-          </a:xfrm>
-          <a:prstGeom prst="ellipse">
-            <a:avLst/>
-          </a:prstGeom>
-          <a:solidFill>
-            <a:srgbClr val="33C17A"/>
-          </a:solidFill>
-          <a:ln>
-            <a:noFill/>
-          </a:ln>
-          <a:effectLst/>
-        </p:spPr>
-        <p:style>
-          <a:lnRef idx="1">
-            <a:schemeClr val="accent1"/>
-          </a:lnRef>
-          <a:fillRef idx="3">
-            <a:schemeClr val="accent1"/>
-          </a:fillRef>
-          <a:effectRef idx="2">
-            <a:schemeClr val="accent1"/>
-          </a:effectRef>
-          <a:fontRef idx="minor">
-            <a:schemeClr val="lt1"/>
-          </a:fontRef>
-        </p:style>
-        <p:txBody>
-          <a:bodyPr rtlCol="0" anchor="ctr" lIns="0" rIns="0" tIns="0" bIns="0"/>
-          <a:lstStyle/>
-          <a:p>
-            <a:pPr algn="ctr"/>
-            <a:r>
-              <a:rPr sz="1400" b="1">
-                <a:solidFill>
-                  <a:srgbClr val="202122"/>
-                </a:solidFill>
-                <a:latin typeface="Calibri"/>
-              </a:rPr>
-              <a:t>2</a:t>
+              <a:t>e.g.</a:t>
             </a:r>
           </a:p>
         </p:txBody>
@@ -6649,8 +9897,8 @@
         </p:nvSpPr>
         <p:spPr>
           <a:xfrm>
-            <a:off x="1234440" y="2795778"/>
-            <a:ext cx="10408615" cy="1030986"/>
+            <a:off x="8046720" y="2560320"/>
+            <a:ext cx="3291840" cy="365760"/>
           </a:xfrm>
           <a:prstGeom prst="rect">
             <a:avLst/>
@@ -6663,80 +9911,27 @@
           <a:p>
             <a:pPr algn="l"/>
             <a:r>
-              <a:rPr sz="2200" b="0" i="0">
-                <a:solidFill>
-                  <a:srgbClr val="202122"/>
-                </a:solidFill>
-                <a:latin typeface="Calibri"/>
-              </a:rPr>
-              <a:t>Which methodology measures progress by completed artefacts?</a:t>
-            </a:r>
-          </a:p>
-        </p:txBody>
-      </p:sp>
-      <p:sp>
-        <p:nvSpPr>
-          <p:cNvPr id="10" name="Oval 9"/>
-          <p:cNvSpPr/>
-          <p:nvPr/>
-        </p:nvSpPr>
-        <p:spPr>
-          <a:xfrm>
-            <a:off x="548640" y="4009644"/>
-            <a:ext cx="411480" cy="411480"/>
-          </a:xfrm>
-          <a:prstGeom prst="ellipse">
-            <a:avLst/>
-          </a:prstGeom>
-          <a:solidFill>
-            <a:srgbClr val="33C17A"/>
-          </a:solidFill>
-          <a:ln>
-            <a:noFill/>
-          </a:ln>
-          <a:effectLst/>
-        </p:spPr>
-        <p:style>
-          <a:lnRef idx="1">
-            <a:schemeClr val="accent1"/>
-          </a:lnRef>
-          <a:fillRef idx="3">
-            <a:schemeClr val="accent1"/>
-          </a:fillRef>
-          <a:effectRef idx="2">
-            <a:schemeClr val="accent1"/>
-          </a:effectRef>
-          <a:fontRef idx="minor">
-            <a:schemeClr val="lt1"/>
-          </a:fontRef>
-        </p:style>
-        <p:txBody>
-          <a:bodyPr rtlCol="0" anchor="ctr" lIns="0" rIns="0" tIns="0" bIns="0"/>
-          <a:lstStyle/>
-          <a:p>
-            <a:pPr algn="ctr"/>
-            <a:r>
-              <a:rPr sz="1400" b="1">
-                <a:solidFill>
-                  <a:srgbClr val="202122"/>
-                </a:solidFill>
-                <a:latin typeface="Calibri"/>
-              </a:rPr>
-              <a:t>3</a:t>
-            </a:r>
-          </a:p>
-        </p:txBody>
-      </p:sp>
-      <p:sp>
-        <p:nvSpPr>
-          <p:cNvPr id="11" name="TextBox 10"/>
+              <a:rPr sz="1300" b="1" i="0">
+                <a:solidFill>
+                  <a:srgbClr val="A9C8F0"/>
+                </a:solidFill>
+                <a:latin typeface="Calibri"/>
+              </a:rPr>
+              <a:t>EXAMPLE</a:t>
+            </a:r>
+          </a:p>
+        </p:txBody>
+      </p:sp>
+      <p:sp>
+        <p:nvSpPr>
+          <p:cNvPr id="10" name="TextBox 9"/>
           <p:cNvSpPr txBox="1"/>
           <p:nvPr/>
         </p:nvSpPr>
         <p:spPr>
           <a:xfrm>
-            <a:off x="1234440" y="3991356"/>
-            <a:ext cx="10408615" cy="1030986"/>
+            <a:off x="8046720" y="2971800"/>
+            <a:ext cx="3291840" cy="2971800"/>
           </a:xfrm>
           <a:prstGeom prst="rect">
             <a:avLst/>
@@ -6749,99 +9944,13 @@
           <a:p>
             <a:pPr algn="l"/>
             <a:r>
-              <a:rPr sz="2200" b="0" i="0">
-                <a:solidFill>
-                  <a:srgbClr val="202122"/>
-                </a:solidFill>
-                <a:latin typeface="Calibri"/>
-              </a:rPr>
-              <a:t>What is a sprint?</a:t>
-            </a:r>
-          </a:p>
-        </p:txBody>
-      </p:sp>
-      <p:sp>
-        <p:nvSpPr>
-          <p:cNvPr id="12" name="Oval 11"/>
-          <p:cNvSpPr/>
-          <p:nvPr/>
-        </p:nvSpPr>
-        <p:spPr>
-          <a:xfrm>
-            <a:off x="548640" y="5205221"/>
-            <a:ext cx="411480" cy="411480"/>
-          </a:xfrm>
-          <a:prstGeom prst="ellipse">
-            <a:avLst/>
-          </a:prstGeom>
-          <a:solidFill>
-            <a:srgbClr val="33C17A"/>
-          </a:solidFill>
-          <a:ln>
-            <a:noFill/>
-          </a:ln>
-          <a:effectLst/>
-        </p:spPr>
-        <p:style>
-          <a:lnRef idx="1">
-            <a:schemeClr val="accent1"/>
-          </a:lnRef>
-          <a:fillRef idx="3">
-            <a:schemeClr val="accent1"/>
-          </a:fillRef>
-          <a:effectRef idx="2">
-            <a:schemeClr val="accent1"/>
-          </a:effectRef>
-          <a:fontRef idx="minor">
-            <a:schemeClr val="lt1"/>
-          </a:fontRef>
-        </p:style>
-        <p:txBody>
-          <a:bodyPr rtlCol="0" anchor="ctr" lIns="0" rIns="0" tIns="0" bIns="0"/>
-          <a:lstStyle/>
-          <a:p>
-            <a:pPr algn="ctr"/>
-            <a:r>
-              <a:rPr sz="1400" b="1">
-                <a:solidFill>
-                  <a:srgbClr val="202122"/>
-                </a:solidFill>
-                <a:latin typeface="Calibri"/>
-              </a:rPr>
-              <a:t>4</a:t>
-            </a:r>
-          </a:p>
-        </p:txBody>
-      </p:sp>
-      <p:sp>
-        <p:nvSpPr>
-          <p:cNvPr id="13" name="TextBox 12"/>
-          <p:cNvSpPr txBox="1"/>
-          <p:nvPr/>
-        </p:nvSpPr>
-        <p:spPr>
-          <a:xfrm>
-            <a:off x="1234440" y="5186933"/>
-            <a:ext cx="10408615" cy="1030986"/>
-          </a:xfrm>
-          <a:prstGeom prst="rect">
-            <a:avLst/>
-          </a:prstGeom>
-          <a:noFill/>
-        </p:spPr>
-        <p:txBody>
-          <a:bodyPr wrap="square" anchor="t" lIns="0" rIns="0" tIns="0" bIns="0"/>
-          <a:lstStyle/>
-          <a:p>
-            <a:pPr algn="l"/>
-            <a:r>
-              <a:rPr sz="2200" b="0" i="0">
-                <a:solidFill>
-                  <a:srgbClr val="202122"/>
-                </a:solidFill>
-                <a:latin typeface="Calibri"/>
-              </a:rPr>
-              <a:t>Which methodology relies heavily on reusing code?</a:t>
+              <a:rPr sz="1900" b="0" i="0">
+                <a:solidFill>
+                  <a:srgbClr val="FFFFFF"/>
+                </a:solidFill>
+                <a:latin typeface="Cambria"/>
+              </a:rPr>
+              <a:t>A start-up app with uncertain needs suits Agile; a safety-critical system with fixed regulations may suit Waterfall.</a:t>
             </a:r>
           </a:p>
         </p:txBody>
@@ -6933,7 +10042,7 @@
                 </a:solidFill>
                 <a:latin typeface="Cambria"/>
               </a:rPr>
-              <a:t>Answers</a:t>
+              <a:t>Agile and Waterfall</a:t>
             </a:r>
           </a:p>
         </p:txBody>
@@ -7006,20 +10115,22 @@
       </p:sp>
       <p:sp>
         <p:nvSpPr>
-          <p:cNvPr id="6" name="Oval 5"/>
+          <p:cNvPr id="6" name="Rounded Rectangle 5"/>
           <p:cNvSpPr/>
           <p:nvPr/>
         </p:nvSpPr>
         <p:spPr>
           <a:xfrm>
-            <a:off x="548640" y="1618488"/>
-            <a:ext cx="411480" cy="411480"/>
-          </a:xfrm>
-          <a:prstGeom prst="ellipse">
-            <a:avLst/>
+            <a:off x="548640" y="1600200"/>
+            <a:ext cx="5364327" cy="640080"/>
+          </a:xfrm>
+          <a:prstGeom prst="roundRect">
+            <a:avLst>
+              <a:gd name="adj" fmla="val 15000"/>
+            </a:avLst>
           </a:prstGeom>
           <a:solidFill>
-            <a:srgbClr val="33C17A"/>
+            <a:srgbClr val="03306E"/>
           </a:solidFill>
           <a:ln>
             <a:noFill/>
@@ -7041,20 +10152,9 @@
           </a:fontRef>
         </p:style>
         <p:txBody>
-          <a:bodyPr rtlCol="0" anchor="ctr" lIns="0" rIns="0" tIns="0" bIns="0"/>
-          <a:lstStyle/>
-          <a:p>
-            <a:pPr algn="ctr"/>
-            <a:r>
-              <a:rPr sz="1400" b="1">
-                <a:solidFill>
-                  <a:srgbClr val="202122"/>
-                </a:solidFill>
-                <a:latin typeface="Calibri"/>
-              </a:rPr>
-              <a:t>1</a:t>
-            </a:r>
-          </a:p>
+          <a:bodyPr rtlCol="0" anchor="ctr"/>
+          <a:lstStyle/>
+          <a:p/>
         </p:txBody>
       </p:sp>
       <p:sp>
@@ -7065,8 +10165,8 @@
         </p:nvSpPr>
         <p:spPr>
           <a:xfrm>
-            <a:off x="1234440" y="1600200"/>
-            <a:ext cx="10408615" cy="1030986"/>
+            <a:off x="777240" y="1600200"/>
+            <a:ext cx="4907127" cy="640080"/>
           </a:xfrm>
           <a:prstGeom prst="rect">
             <a:avLst/>
@@ -7074,49 +10174,40 @@
           <a:noFill/>
         </p:spPr>
         <p:txBody>
-          <a:bodyPr wrap="square" anchor="t" lIns="0" rIns="0" tIns="0" bIns="0"/>
+          <a:bodyPr wrap="square" anchor="ctr" lIns="0" rIns="0" tIns="0" bIns="0"/>
           <a:lstStyle/>
           <a:p>
             <a:pPr algn="l"/>
             <a:r>
-              <a:rPr sz="1800" b="0" i="0">
-                <a:solidFill>
-                  <a:srgbClr val="54595D"/>
-                </a:solidFill>
-                <a:latin typeface="Calibri"/>
-              </a:rPr>
-              <a:t>Who keeps a Scrum team cohesive and resourced?</a:t>
-            </a:r>
-          </a:p>
-          <a:p>
-            <a:r>
-              <a:rPr sz="1800" b="1">
-                <a:solidFill>
-                  <a:srgbClr val="03306E"/>
-                </a:solidFill>
-                <a:latin typeface="Calibri"/>
-              </a:rPr>
-              <a:t>The scrum master.</a:t>
-            </a:r>
-          </a:p>
-        </p:txBody>
-      </p:sp>
-      <p:sp>
-        <p:nvSpPr>
-          <p:cNvPr id="8" name="Oval 7"/>
+              <a:rPr sz="2000" b="1" i="0">
+                <a:solidFill>
+                  <a:srgbClr val="FFFFFF"/>
+                </a:solidFill>
+                <a:latin typeface="Calibri"/>
+              </a:rPr>
+              <a:t>Agile</a:t>
+            </a:r>
+          </a:p>
+        </p:txBody>
+      </p:sp>
+      <p:sp>
+        <p:nvSpPr>
+          <p:cNvPr id="8" name="Rounded Rectangle 7"/>
           <p:cNvSpPr/>
           <p:nvPr/>
         </p:nvSpPr>
         <p:spPr>
           <a:xfrm>
-            <a:off x="548640" y="2814066"/>
-            <a:ext cx="411480" cy="411480"/>
-          </a:xfrm>
-          <a:prstGeom prst="ellipse">
-            <a:avLst/>
+            <a:off x="548640" y="2377440"/>
+            <a:ext cx="5364327" cy="3794760"/>
+          </a:xfrm>
+          <a:prstGeom prst="roundRect">
+            <a:avLst>
+              <a:gd name="adj" fmla="val 4000"/>
+            </a:avLst>
           </a:prstGeom>
           <a:solidFill>
-            <a:srgbClr val="33C17A"/>
+            <a:srgbClr val="EAF3FF"/>
           </a:solidFill>
           <a:ln>
             <a:noFill/>
@@ -7138,20 +10229,9 @@
           </a:fontRef>
         </p:style>
         <p:txBody>
-          <a:bodyPr rtlCol="0" anchor="ctr" lIns="0" rIns="0" tIns="0" bIns="0"/>
-          <a:lstStyle/>
-          <a:p>
-            <a:pPr algn="ctr"/>
-            <a:r>
-              <a:rPr sz="1400" b="1">
-                <a:solidFill>
-                  <a:srgbClr val="202122"/>
-                </a:solidFill>
-                <a:latin typeface="Calibri"/>
-              </a:rPr>
-              <a:t>2</a:t>
-            </a:r>
-          </a:p>
+          <a:bodyPr rtlCol="0" anchor="ctr"/>
+          <a:lstStyle/>
+          <a:p/>
         </p:txBody>
       </p:sp>
       <p:sp>
@@ -7162,8 +10242,8 @@
         </p:nvSpPr>
         <p:spPr>
           <a:xfrm>
-            <a:off x="1234440" y="2795778"/>
-            <a:ext cx="10408615" cy="1030986"/>
+            <a:off x="822959" y="2606040"/>
+            <a:ext cx="4815687" cy="3337560"/>
           </a:xfrm>
           <a:prstGeom prst="rect">
             <a:avLst/>
@@ -7171,49 +10251,144 @@
           <a:noFill/>
         </p:spPr>
         <p:txBody>
-          <a:bodyPr wrap="square" anchor="t" lIns="0" rIns="0" tIns="0" bIns="0"/>
-          <a:lstStyle/>
-          <a:p>
-            <a:pPr algn="l"/>
-            <a:r>
-              <a:rPr sz="1800" b="0" i="0">
-                <a:solidFill>
-                  <a:srgbClr val="54595D"/>
-                </a:solidFill>
-                <a:latin typeface="Calibri"/>
-              </a:rPr>
-              <a:t>Which methodology measures progress by completed artefacts?</a:t>
-            </a:r>
-          </a:p>
-          <a:p>
-            <a:r>
-              <a:rPr sz="1800" b="1">
-                <a:solidFill>
-                  <a:srgbClr val="03306E"/>
-                </a:solidFill>
-                <a:latin typeface="Calibri"/>
-              </a:rPr>
-              <a:t>Waterfall.</a:t>
-            </a:r>
-          </a:p>
-        </p:txBody>
-      </p:sp>
-      <p:sp>
-        <p:nvSpPr>
-          <p:cNvPr id="10" name="Oval 9"/>
+          <a:bodyPr wrap="square" lIns="0" rIns="0" tIns="0" bIns="0">
+            <a:spAutoFit/>
+          </a:bodyPr>
+          <a:lstStyle/>
+          <a:p>
+            <a:pPr marL="274320" indent="-274320">
+              <a:spcAft>
+                <a:spcPts val="945"/>
+              </a:spcAft>
+              <a:buClr>
+                <a:srgbClr val="0645AD"/>
+              </a:buClr>
+              <a:buFont typeface="Arial"/>
+              <a:buChar char="•"/>
+            </a:pPr>
+            <a:r>
+              <a:rPr sz="2100" b="1">
+                <a:solidFill>
+                  <a:srgbClr val="202122"/>
+                </a:solidFill>
+                <a:latin typeface="Calibri"/>
+              </a:rPr>
+              <a:t>Incremental:</a:t>
+            </a:r>
+            <a:r>
+              <a:rPr sz="2100" b="0">
+                <a:solidFill>
+                  <a:srgbClr val="202122"/>
+                </a:solidFill>
+                <a:latin typeface="Calibri"/>
+              </a:rPr>
+              <a:t> sprints, epics, stories, spikes</a:t>
+            </a:r>
+          </a:p>
+          <a:p>
+            <a:pPr marL="274320" indent="-274320">
+              <a:spcAft>
+                <a:spcPts val="945"/>
+              </a:spcAft>
+              <a:buClr>
+                <a:srgbClr val="0645AD"/>
+              </a:buClr>
+              <a:buFont typeface="Arial"/>
+              <a:buChar char="•"/>
+            </a:pPr>
+            <a:r>
+              <a:rPr sz="2100" b="0">
+                <a:solidFill>
+                  <a:srgbClr val="202122"/>
+                </a:solidFill>
+                <a:latin typeface="Calibri"/>
+              </a:rPr>
+              <a:t>Requirements can keep changing</a:t>
+            </a:r>
+          </a:p>
+          <a:p>
+            <a:pPr marL="274320" indent="-274320">
+              <a:spcAft>
+                <a:spcPts val="945"/>
+              </a:spcAft>
+              <a:buClr>
+                <a:srgbClr val="0645AD"/>
+              </a:buClr>
+              <a:buFont typeface="Arial"/>
+              <a:buChar char="•"/>
+            </a:pPr>
+            <a:r>
+              <a:rPr sz="2100" b="0">
+                <a:solidFill>
+                  <a:srgbClr val="202122"/>
+                </a:solidFill>
+                <a:latin typeface="Calibri"/>
+              </a:rPr>
+              <a:t>Users see working software every iteration</a:t>
+            </a:r>
+          </a:p>
+          <a:p>
+            <a:pPr marL="274320" indent="-274320">
+              <a:spcAft>
+                <a:spcPts val="945"/>
+              </a:spcAft>
+              <a:buClr>
+                <a:srgbClr val="0645AD"/>
+              </a:buClr>
+              <a:buFont typeface="Arial"/>
+              <a:buChar char="•"/>
+            </a:pPr>
+            <a:r>
+              <a:rPr sz="2100" b="0">
+                <a:solidFill>
+                  <a:srgbClr val="202122"/>
+                </a:solidFill>
+                <a:latin typeface="Calibri"/>
+              </a:rPr>
+              <a:t>Less formal documentation</a:t>
+            </a:r>
+          </a:p>
+          <a:p>
+            <a:pPr marL="274320" indent="-274320">
+              <a:spcAft>
+                <a:spcPts val="945"/>
+              </a:spcAft>
+              <a:buClr>
+                <a:srgbClr val="0645AD"/>
+              </a:buClr>
+              <a:buFont typeface="Arial"/>
+              <a:buChar char="•"/>
+            </a:pPr>
+            <a:r>
+              <a:rPr sz="2100" b="0">
+                <a:solidFill>
+                  <a:srgbClr val="202122"/>
+                </a:solidFill>
+                <a:latin typeface="Calibri"/>
+              </a:rPr>
+              <a:t>Scaled Agile extends it to large teams</a:t>
+            </a:r>
+          </a:p>
+        </p:txBody>
+      </p:sp>
+      <p:sp>
+        <p:nvSpPr>
+          <p:cNvPr id="10" name="Rounded Rectangle 9"/>
           <p:cNvSpPr/>
           <p:nvPr/>
         </p:nvSpPr>
         <p:spPr>
           <a:xfrm>
-            <a:off x="548640" y="4009644"/>
-            <a:ext cx="411480" cy="411480"/>
-          </a:xfrm>
-          <a:prstGeom prst="ellipse">
-            <a:avLst/>
+            <a:off x="6278727" y="1600200"/>
+            <a:ext cx="5364327" cy="640080"/>
+          </a:xfrm>
+          <a:prstGeom prst="roundRect">
+            <a:avLst>
+              <a:gd name="adj" fmla="val 15000"/>
+            </a:avLst>
           </a:prstGeom>
           <a:solidFill>
-            <a:srgbClr val="33C17A"/>
+            <a:srgbClr val="0645AD"/>
           </a:solidFill>
           <a:ln>
             <a:noFill/>
@@ -7235,20 +10410,9 @@
           </a:fontRef>
         </p:style>
         <p:txBody>
-          <a:bodyPr rtlCol="0" anchor="ctr" lIns="0" rIns="0" tIns="0" bIns="0"/>
-          <a:lstStyle/>
-          <a:p>
-            <a:pPr algn="ctr"/>
-            <a:r>
-              <a:rPr sz="1400" b="1">
-                <a:solidFill>
-                  <a:srgbClr val="202122"/>
-                </a:solidFill>
-                <a:latin typeface="Calibri"/>
-              </a:rPr>
-              <a:t>3</a:t>
-            </a:r>
-          </a:p>
+          <a:bodyPr rtlCol="0" anchor="ctr"/>
+          <a:lstStyle/>
+          <a:p/>
         </p:txBody>
       </p:sp>
       <p:sp>
@@ -7259,8 +10423,8 @@
         </p:nvSpPr>
         <p:spPr>
           <a:xfrm>
-            <a:off x="1234440" y="3991356"/>
-            <a:ext cx="10408615" cy="1030986"/>
+            <a:off x="6507327" y="1600200"/>
+            <a:ext cx="4907127" cy="640080"/>
           </a:xfrm>
           <a:prstGeom prst="rect">
             <a:avLst/>
@@ -7268,49 +10432,40 @@
           <a:noFill/>
         </p:spPr>
         <p:txBody>
-          <a:bodyPr wrap="square" anchor="t" lIns="0" rIns="0" tIns="0" bIns="0"/>
+          <a:bodyPr wrap="square" anchor="ctr" lIns="0" rIns="0" tIns="0" bIns="0"/>
           <a:lstStyle/>
           <a:p>
             <a:pPr algn="l"/>
             <a:r>
-              <a:rPr sz="1800" b="0" i="0">
-                <a:solidFill>
-                  <a:srgbClr val="54595D"/>
-                </a:solidFill>
-                <a:latin typeface="Calibri"/>
-              </a:rPr>
-              <a:t>What is a sprint?</a:t>
-            </a:r>
-          </a:p>
-          <a:p>
-            <a:r>
-              <a:rPr sz="1800" b="1">
-                <a:solidFill>
-                  <a:srgbClr val="03306E"/>
-                </a:solidFill>
-                <a:latin typeface="Calibri"/>
-              </a:rPr>
-              <a:t>A short, fixed period of work delivering an increment.</a:t>
-            </a:r>
-          </a:p>
-        </p:txBody>
-      </p:sp>
-      <p:sp>
-        <p:nvSpPr>
-          <p:cNvPr id="12" name="Oval 11"/>
+              <a:rPr sz="2000" b="1" i="0">
+                <a:solidFill>
+                  <a:srgbClr val="FFFFFF"/>
+                </a:solidFill>
+                <a:latin typeface="Calibri"/>
+              </a:rPr>
+              <a:t>Waterfall</a:t>
+            </a:r>
+          </a:p>
+        </p:txBody>
+      </p:sp>
+      <p:sp>
+        <p:nvSpPr>
+          <p:cNvPr id="12" name="Rounded Rectangle 11"/>
           <p:cNvSpPr/>
           <p:nvPr/>
         </p:nvSpPr>
         <p:spPr>
           <a:xfrm>
-            <a:off x="548640" y="5205221"/>
-            <a:ext cx="411480" cy="411480"/>
-          </a:xfrm>
-          <a:prstGeom prst="ellipse">
-            <a:avLst/>
+            <a:off x="6278727" y="2377440"/>
+            <a:ext cx="5364327" cy="3794760"/>
+          </a:xfrm>
+          <a:prstGeom prst="roundRect">
+            <a:avLst>
+              <a:gd name="adj" fmla="val 4000"/>
+            </a:avLst>
           </a:prstGeom>
           <a:solidFill>
-            <a:srgbClr val="33C17A"/>
+            <a:srgbClr val="EAF3FF"/>
           </a:solidFill>
           <a:ln>
             <a:noFill/>
@@ -7332,20 +10487,9 @@
           </a:fontRef>
         </p:style>
         <p:txBody>
-          <a:bodyPr rtlCol="0" anchor="ctr" lIns="0" rIns="0" tIns="0" bIns="0"/>
-          <a:lstStyle/>
-          <a:p>
-            <a:pPr algn="ctr"/>
-            <a:r>
-              <a:rPr sz="1400" b="1">
-                <a:solidFill>
-                  <a:srgbClr val="202122"/>
-                </a:solidFill>
-                <a:latin typeface="Calibri"/>
-              </a:rPr>
-              <a:t>4</a:t>
-            </a:r>
-          </a:p>
+          <a:bodyPr rtlCol="0" anchor="ctr"/>
+          <a:lstStyle/>
+          <a:p/>
         </p:txBody>
       </p:sp>
       <p:sp>
@@ -7356,8 +10500,8 @@
         </p:nvSpPr>
         <p:spPr>
           <a:xfrm>
-            <a:off x="1234440" y="5186933"/>
-            <a:ext cx="10408615" cy="1030986"/>
+            <a:off x="6553047" y="2606040"/>
+            <a:ext cx="4815687" cy="3337560"/>
           </a:xfrm>
           <a:prstGeom prst="rect">
             <a:avLst/>
@@ -7365,29 +10509,113 @@
           <a:noFill/>
         </p:spPr>
         <p:txBody>
-          <a:bodyPr wrap="square" anchor="t" lIns="0" rIns="0" tIns="0" bIns="0"/>
-          <a:lstStyle/>
-          <a:p>
-            <a:pPr algn="l"/>
-            <a:r>
-              <a:rPr sz="1800" b="0" i="0">
-                <a:solidFill>
-                  <a:srgbClr val="54595D"/>
-                </a:solidFill>
-                <a:latin typeface="Calibri"/>
-              </a:rPr>
-              <a:t>Which methodology relies heavily on reusing code?</a:t>
-            </a:r>
-          </a:p>
-          <a:p>
-            <a:r>
-              <a:rPr sz="1800" b="1">
-                <a:solidFill>
-                  <a:srgbClr val="03306E"/>
-                </a:solidFill>
-                <a:latin typeface="Calibri"/>
-              </a:rPr>
-              <a:t>RAD.</a:t>
+          <a:bodyPr wrap="square" lIns="0" rIns="0" tIns="0" bIns="0">
+            <a:spAutoFit/>
+          </a:bodyPr>
+          <a:lstStyle/>
+          <a:p>
+            <a:pPr marL="274320" indent="-274320">
+              <a:spcAft>
+                <a:spcPts val="945"/>
+              </a:spcAft>
+              <a:buClr>
+                <a:srgbClr val="0645AD"/>
+              </a:buClr>
+              <a:buFont typeface="Arial"/>
+              <a:buChar char="•"/>
+            </a:pPr>
+            <a:r>
+              <a:rPr sz="2100" b="0">
+                <a:solidFill>
+                  <a:srgbClr val="202122"/>
+                </a:solidFill>
+                <a:latin typeface="Calibri"/>
+              </a:rPr>
+              <a:t>Rigid, systematic stages</a:t>
+            </a:r>
+          </a:p>
+          <a:p>
+            <a:pPr marL="274320" indent="-274320">
+              <a:spcAft>
+                <a:spcPts val="945"/>
+              </a:spcAft>
+              <a:buClr>
+                <a:srgbClr val="0645AD"/>
+              </a:buClr>
+              <a:buFont typeface="Arial"/>
+              <a:buChar char="•"/>
+            </a:pPr>
+            <a:r>
+              <a:rPr sz="2100" b="0">
+                <a:solidFill>
+                  <a:srgbClr val="202122"/>
+                </a:solidFill>
+                <a:latin typeface="Calibri"/>
+              </a:rPr>
+              <a:t>Progress measured by completed artefacts</a:t>
+            </a:r>
+          </a:p>
+          <a:p>
+            <a:pPr marL="274320" indent="-274320">
+              <a:spcAft>
+                <a:spcPts val="945"/>
+              </a:spcAft>
+              <a:buClr>
+                <a:srgbClr val="0645AD"/>
+              </a:buClr>
+              <a:buFont typeface="Arial"/>
+              <a:buChar char="•"/>
+            </a:pPr>
+            <a:r>
+              <a:rPr sz="2100" b="0">
+                <a:solidFill>
+                  <a:srgbClr val="202122"/>
+                </a:solidFill>
+                <a:latin typeface="Calibri"/>
+              </a:rPr>
+              <a:t>High upfront cost, slower return</a:t>
+            </a:r>
+          </a:p>
+          <a:p>
+            <a:pPr marL="274320" indent="-274320">
+              <a:spcAft>
+                <a:spcPts val="945"/>
+              </a:spcAft>
+              <a:buClr>
+                <a:srgbClr val="0645AD"/>
+              </a:buClr>
+              <a:buFont typeface="Arial"/>
+              <a:buChar char="•"/>
+            </a:pPr>
+            <a:r>
+              <a:rPr sz="2100" b="0">
+                <a:solidFill>
+                  <a:srgbClr val="202122"/>
+                </a:solidFill>
+                <a:latin typeface="Calibri"/>
+              </a:rPr>
+              <a:t>Cancelled early may leave nothing usable</a:t>
+            </a:r>
+          </a:p>
+          <a:p>
+            <a:pPr marL="274320" indent="-274320">
+              <a:spcAft>
+                <a:spcPts val="945"/>
+              </a:spcAft>
+              <a:buClr>
+                <a:srgbClr val="0645AD"/>
+              </a:buClr>
+              <a:buFont typeface="Arial"/>
+              <a:buChar char="•"/>
+            </a:pPr>
+            <a:r>
+              <a:rPr sz="2100" b="0">
+                <a:solidFill>
+                  <a:srgbClr val="202122"/>
+                </a:solidFill>
+                <a:latin typeface="Calibri"/>
+              </a:rPr>
+              <a:t>Heavy documentation, little user contact</a:t>
             </a:r>
           </a:p>
         </p:txBody>
@@ -7479,7 +10707,7 @@
                 </a:solidFill>
                 <a:latin typeface="Cambria"/>
               </a:rPr>
-              <a:t>Activity: Pick the methodology</a:t>
+              <a:t>Quick check: Agile and Waterfall</a:t>
             </a:r>
           </a:p>
         </p:txBody>
@@ -7552,19 +10780,17 @@
       </p:sp>
       <p:sp>
         <p:nvSpPr>
-          <p:cNvPr id="6" name="Rounded Rectangle 5"/>
+          <p:cNvPr id="6" name="Oval 5"/>
           <p:cNvSpPr/>
           <p:nvPr/>
         </p:nvSpPr>
         <p:spPr>
           <a:xfrm>
-            <a:off x="548640" y="1508760"/>
-            <a:ext cx="2011680" cy="457200"/>
-          </a:xfrm>
-          <a:prstGeom prst="roundRect">
-            <a:avLst>
-              <a:gd name="adj" fmla="val 50000"/>
-            </a:avLst>
+            <a:off x="548640" y="1691640"/>
+            <a:ext cx="502920" cy="502920"/>
+          </a:xfrm>
+          <a:prstGeom prst="ellipse">
+            <a:avLst/>
           </a:prstGeom>
           <a:solidFill>
             <a:srgbClr val="33C17A"/>
@@ -7589,9 +10815,20 @@
           </a:fontRef>
         </p:style>
         <p:txBody>
-          <a:bodyPr rtlCol="0" anchor="ctr"/>
-          <a:lstStyle/>
-          <a:p/>
+          <a:bodyPr rtlCol="0" anchor="ctr" lIns="0" rIns="0" tIns="0" bIns="0"/>
+          <a:lstStyle/>
+          <a:p>
+            <a:pPr algn="ctr"/>
+            <a:r>
+              <a:rPr sz="1600" b="1">
+                <a:solidFill>
+                  <a:srgbClr val="202122"/>
+                </a:solidFill>
+                <a:latin typeface="Calibri"/>
+              </a:rPr>
+              <a:t>1</a:t>
+            </a:r>
+          </a:p>
         </p:txBody>
       </p:sp>
       <p:sp>
@@ -7602,8 +10839,8 @@
         </p:nvSpPr>
         <p:spPr>
           <a:xfrm>
-            <a:off x="548640" y="1508760"/>
-            <a:ext cx="2011680" cy="457200"/>
+            <a:off x="1371600" y="1645920"/>
+            <a:ext cx="10271455" cy="1188720"/>
           </a:xfrm>
           <a:prstGeom prst="rect">
             <a:avLst/>
@@ -7611,71 +10848,38 @@
           <a:noFill/>
         </p:spPr>
         <p:txBody>
-          <a:bodyPr wrap="square" anchor="ctr" lIns="0" rIns="0" tIns="0" bIns="0"/>
-          <a:lstStyle/>
-          <a:p>
-            <a:pPr algn="ctr"/>
-            <a:r>
-              <a:rPr sz="1400" b="1" i="0">
+          <a:bodyPr wrap="square" anchor="t" lIns="0" rIns="0" tIns="0" bIns="0"/>
+          <a:lstStyle/>
+          <a:p>
+            <a:pPr algn="l"/>
+            <a:r>
+              <a:rPr sz="2400" b="0" i="0">
                 <a:solidFill>
                   <a:srgbClr val="202122"/>
                 </a:solidFill>
                 <a:latin typeface="Calibri"/>
               </a:rPr>
-              <a:t>20 minutes</a:t>
-            </a:r>
-          </a:p>
-        </p:txBody>
-      </p:sp>
-      <p:sp>
-        <p:nvSpPr>
-          <p:cNvPr id="8" name="TextBox 7"/>
-          <p:cNvSpPr txBox="1"/>
-          <p:nvPr/>
-        </p:nvSpPr>
-        <p:spPr>
-          <a:xfrm>
-            <a:off x="2743200" y="1508760"/>
-            <a:ext cx="4754880" cy="457200"/>
-          </a:xfrm>
-          <a:prstGeom prst="rect">
-            <a:avLst/>
-          </a:prstGeom>
-          <a:noFill/>
-        </p:spPr>
-        <p:txBody>
-          <a:bodyPr wrap="square" anchor="ctr" lIns="0" rIns="0" tIns="0" bIns="0"/>
-          <a:lstStyle/>
-          <a:p>
-            <a:pPr algn="l"/>
-            <a:r>
-              <a:rPr sz="1400" b="0" i="1">
-                <a:solidFill>
-                  <a:srgbClr val="54595D"/>
-                </a:solidFill>
-                <a:latin typeface="Calibri"/>
-              </a:rPr>
-              <a:t>Small groups</a:t>
-            </a:r>
-          </a:p>
-        </p:txBody>
-      </p:sp>
-      <p:sp>
-        <p:nvSpPr>
-          <p:cNvPr id="9" name="Oval 8"/>
+              <a:t>What is an epic in Agile?</a:t>
+            </a:r>
+          </a:p>
+        </p:txBody>
+      </p:sp>
+      <p:sp>
+        <p:nvSpPr>
+          <p:cNvPr id="8" name="Oval 7"/>
           <p:cNvSpPr/>
           <p:nvPr/>
         </p:nvSpPr>
         <p:spPr>
           <a:xfrm>
-            <a:off x="548640" y="2482596"/>
-            <a:ext cx="384048" cy="384048"/>
+            <a:off x="548640" y="3108960"/>
+            <a:ext cx="502920" cy="502920"/>
           </a:xfrm>
           <a:prstGeom prst="ellipse">
             <a:avLst/>
           </a:prstGeom>
           <a:solidFill>
-            <a:srgbClr val="0645AD"/>
+            <a:srgbClr val="33C17A"/>
           </a:solidFill>
           <a:ln>
             <a:noFill/>
@@ -7702,27 +10906,27 @@
           <a:p>
             <a:pPr algn="ctr"/>
             <a:r>
-              <a:rPr sz="1300" b="1">
-                <a:solidFill>
-                  <a:srgbClr val="FFFFFF"/>
-                </a:solidFill>
-                <a:latin typeface="Calibri"/>
-              </a:rPr>
-              <a:t>1</a:t>
-            </a:r>
-          </a:p>
-        </p:txBody>
-      </p:sp>
-      <p:sp>
-        <p:nvSpPr>
-          <p:cNvPr id="10" name="TextBox 9"/>
+              <a:rPr sz="1600" b="1">
+                <a:solidFill>
+                  <a:srgbClr val="202122"/>
+                </a:solidFill>
+                <a:latin typeface="Calibri"/>
+              </a:rPr>
+              <a:t>2</a:t>
+            </a:r>
+          </a:p>
+        </p:txBody>
+      </p:sp>
+      <p:sp>
+        <p:nvSpPr>
+          <p:cNvPr id="9" name="TextBox 8"/>
           <p:cNvSpPr txBox="1"/>
           <p:nvPr/>
         </p:nvSpPr>
         <p:spPr>
           <a:xfrm>
-            <a:off x="1143000" y="2240280"/>
-            <a:ext cx="5943600" cy="868680"/>
+            <a:off x="1371600" y="3063240"/>
+            <a:ext cx="10271455" cy="1188720"/>
           </a:xfrm>
           <a:prstGeom prst="rect">
             <a:avLst/>
@@ -7730,38 +10934,38 @@
           <a:noFill/>
         </p:spPr>
         <p:txBody>
-          <a:bodyPr wrap="square" anchor="ctr" lIns="0" rIns="0" tIns="0" bIns="0"/>
+          <a:bodyPr wrap="square" anchor="t" lIns="0" rIns="0" tIns="0" bIns="0"/>
           <a:lstStyle/>
           <a:p>
             <a:pPr algn="l"/>
             <a:r>
-              <a:rPr sz="1700" b="0" i="0">
+              <a:rPr sz="2400" b="0" i="0">
                 <a:solidFill>
                   <a:srgbClr val="202122"/>
                 </a:solidFill>
                 <a:latin typeface="Calibri"/>
               </a:rPr>
-              <a:t>Three projects: an NHS records system, a start-up's first app, and a charity's accessible website.</a:t>
-            </a:r>
-          </a:p>
-        </p:txBody>
-      </p:sp>
-      <p:sp>
-        <p:nvSpPr>
-          <p:cNvPr id="11" name="Oval 10"/>
+              <a:t>Why might a cancelled Waterfall project leave nothing usable?</a:t>
+            </a:r>
+          </a:p>
+        </p:txBody>
+      </p:sp>
+      <p:sp>
+        <p:nvSpPr>
+          <p:cNvPr id="10" name="Oval 9"/>
           <p:cNvSpPr/>
           <p:nvPr/>
         </p:nvSpPr>
         <p:spPr>
           <a:xfrm>
-            <a:off x="548640" y="3461004"/>
-            <a:ext cx="384048" cy="384048"/>
+            <a:off x="548640" y="4526280"/>
+            <a:ext cx="502920" cy="502920"/>
           </a:xfrm>
           <a:prstGeom prst="ellipse">
             <a:avLst/>
           </a:prstGeom>
           <a:solidFill>
-            <a:srgbClr val="0645AD"/>
+            <a:srgbClr val="33C17A"/>
           </a:solidFill>
           <a:ln>
             <a:noFill/>
@@ -7788,13 +10992,46 @@
           <a:p>
             <a:pPr algn="ctr"/>
             <a:r>
-              <a:rPr sz="1300" b="1">
-                <a:solidFill>
-                  <a:srgbClr val="FFFFFF"/>
-                </a:solidFill>
-                <a:latin typeface="Calibri"/>
-              </a:rPr>
-              <a:t>2</a:t>
+              <a:rPr sz="1600" b="1">
+                <a:solidFill>
+                  <a:srgbClr val="202122"/>
+                </a:solidFill>
+                <a:latin typeface="Calibri"/>
+              </a:rPr>
+              <a:t>3</a:t>
+            </a:r>
+          </a:p>
+        </p:txBody>
+      </p:sp>
+      <p:sp>
+        <p:nvSpPr>
+          <p:cNvPr id="11" name="TextBox 10"/>
+          <p:cNvSpPr txBox="1"/>
+          <p:nvPr/>
+        </p:nvSpPr>
+        <p:spPr>
+          <a:xfrm>
+            <a:off x="1371600" y="4480560"/>
+            <a:ext cx="10271455" cy="1188720"/>
+          </a:xfrm>
+          <a:prstGeom prst="rect">
+            <a:avLst/>
+          </a:prstGeom>
+          <a:noFill/>
+        </p:spPr>
+        <p:txBody>
+          <a:bodyPr wrap="square" anchor="t" lIns="0" rIns="0" tIns="0" bIns="0"/>
+          <a:lstStyle/>
+          <a:p>
+            <a:pPr algn="l"/>
+            <a:r>
+              <a:rPr sz="2400" b="0" i="0">
+                <a:solidFill>
+                  <a:srgbClr val="202122"/>
+                </a:solidFill>
+                <a:latin typeface="Calibri"/>
+              </a:rPr>
+              <a:t>When does Waterfall suit a project?</a:t>
             </a:r>
           </a:p>
         </p:txBody>
@@ -7807,8 +11044,8 @@
         </p:nvSpPr>
         <p:spPr>
           <a:xfrm>
-            <a:off x="1143000" y="3218688"/>
-            <a:ext cx="5943600" cy="868680"/>
+            <a:off x="548640" y="5852160"/>
+            <a:ext cx="11094415" cy="365760"/>
           </a:xfrm>
           <a:prstGeom prst="rect">
             <a:avLst/>
@@ -7816,353 +11053,18 @@
           <a:noFill/>
         </p:spPr>
         <p:txBody>
-          <a:bodyPr wrap="square" anchor="ctr" lIns="0" rIns="0" tIns="0" bIns="0"/>
+          <a:bodyPr wrap="square" anchor="t" lIns="0" rIns="0" tIns="0" bIns="0"/>
           <a:lstStyle/>
           <a:p>
             <a:pPr algn="l"/>
             <a:r>
-              <a:rPr sz="1700" b="0" i="0">
-                <a:solidFill>
-                  <a:srgbClr val="202122"/>
-                </a:solidFill>
-                <a:latin typeface="Calibri"/>
-              </a:rPr>
-              <a:t>Choose a methodology for each.</a:t>
-            </a:r>
-          </a:p>
-        </p:txBody>
-      </p:sp>
-      <p:sp>
-        <p:nvSpPr>
-          <p:cNvPr id="13" name="Oval 12"/>
-          <p:cNvSpPr/>
-          <p:nvPr/>
-        </p:nvSpPr>
-        <p:spPr>
-          <a:xfrm>
-            <a:off x="548640" y="4439412"/>
-            <a:ext cx="384048" cy="384048"/>
-          </a:xfrm>
-          <a:prstGeom prst="ellipse">
-            <a:avLst/>
-          </a:prstGeom>
-          <a:solidFill>
-            <a:srgbClr val="0645AD"/>
-          </a:solidFill>
-          <a:ln>
-            <a:noFill/>
-          </a:ln>
-          <a:effectLst/>
-        </p:spPr>
-        <p:style>
-          <a:lnRef idx="1">
-            <a:schemeClr val="accent1"/>
-          </a:lnRef>
-          <a:fillRef idx="3">
-            <a:schemeClr val="accent1"/>
-          </a:fillRef>
-          <a:effectRef idx="2">
-            <a:schemeClr val="accent1"/>
-          </a:effectRef>
-          <a:fontRef idx="minor">
-            <a:schemeClr val="lt1"/>
-          </a:fontRef>
-        </p:style>
-        <p:txBody>
-          <a:bodyPr rtlCol="0" anchor="ctr" lIns="0" rIns="0" tIns="0" bIns="0"/>
-          <a:lstStyle/>
-          <a:p>
-            <a:pPr algn="ctr"/>
-            <a:r>
-              <a:rPr sz="1300" b="1">
-                <a:solidFill>
-                  <a:srgbClr val="FFFFFF"/>
-                </a:solidFill>
-                <a:latin typeface="Calibri"/>
-              </a:rPr>
-              <a:t>3</a:t>
-            </a:r>
-          </a:p>
-        </p:txBody>
-      </p:sp>
-      <p:sp>
-        <p:nvSpPr>
-          <p:cNvPr id="14" name="TextBox 13"/>
-          <p:cNvSpPr txBox="1"/>
-          <p:nvPr/>
-        </p:nvSpPr>
-        <p:spPr>
-          <a:xfrm>
-            <a:off x="1143000" y="4197096"/>
-            <a:ext cx="5943600" cy="868680"/>
-          </a:xfrm>
-          <a:prstGeom prst="rect">
-            <a:avLst/>
-          </a:prstGeom>
-          <a:noFill/>
-        </p:spPr>
-        <p:txBody>
-          <a:bodyPr wrap="square" anchor="ctr" lIns="0" rIns="0" tIns="0" bIns="0"/>
-          <a:lstStyle/>
-          <a:p>
-            <a:pPr algn="l"/>
-            <a:r>
-              <a:rPr sz="1700" b="0" i="0">
-                <a:solidFill>
-                  <a:srgbClr val="202122"/>
-                </a:solidFill>
-                <a:latin typeface="Calibri"/>
-              </a:rPr>
-              <a:t>Justify each choice with two features of the methodology.</a:t>
-            </a:r>
-          </a:p>
-        </p:txBody>
-      </p:sp>
-      <p:sp>
-        <p:nvSpPr>
-          <p:cNvPr id="15" name="Oval 14"/>
-          <p:cNvSpPr/>
-          <p:nvPr/>
-        </p:nvSpPr>
-        <p:spPr>
-          <a:xfrm>
-            <a:off x="548640" y="5417820"/>
-            <a:ext cx="384048" cy="384048"/>
-          </a:xfrm>
-          <a:prstGeom prst="ellipse">
-            <a:avLst/>
-          </a:prstGeom>
-          <a:solidFill>
-            <a:srgbClr val="0645AD"/>
-          </a:solidFill>
-          <a:ln>
-            <a:noFill/>
-          </a:ln>
-          <a:effectLst/>
-        </p:spPr>
-        <p:style>
-          <a:lnRef idx="1">
-            <a:schemeClr val="accent1"/>
-          </a:lnRef>
-          <a:fillRef idx="3">
-            <a:schemeClr val="accent1"/>
-          </a:fillRef>
-          <a:effectRef idx="2">
-            <a:schemeClr val="accent1"/>
-          </a:effectRef>
-          <a:fontRef idx="minor">
-            <a:schemeClr val="lt1"/>
-          </a:fontRef>
-        </p:style>
-        <p:txBody>
-          <a:bodyPr rtlCol="0" anchor="ctr" lIns="0" rIns="0" tIns="0" bIns="0"/>
-          <a:lstStyle/>
-          <a:p>
-            <a:pPr algn="ctr"/>
-            <a:r>
-              <a:rPr sz="1300" b="1">
-                <a:solidFill>
-                  <a:srgbClr val="FFFFFF"/>
-                </a:solidFill>
-                <a:latin typeface="Calibri"/>
-              </a:rPr>
-              <a:t>4</a:t>
-            </a:r>
-          </a:p>
-        </p:txBody>
-      </p:sp>
-      <p:sp>
-        <p:nvSpPr>
-          <p:cNvPr id="16" name="TextBox 15"/>
-          <p:cNvSpPr txBox="1"/>
-          <p:nvPr/>
-        </p:nvSpPr>
-        <p:spPr>
-          <a:xfrm>
-            <a:off x="1143000" y="5175504"/>
-            <a:ext cx="5943600" cy="868680"/>
-          </a:xfrm>
-          <a:prstGeom prst="rect">
-            <a:avLst/>
-          </a:prstGeom>
-          <a:noFill/>
-        </p:spPr>
-        <p:txBody>
-          <a:bodyPr wrap="square" anchor="ctr" lIns="0" rIns="0" tIns="0" bIns="0"/>
-          <a:lstStyle/>
-          <a:p>
-            <a:pPr algn="l"/>
-            <a:r>
-              <a:rPr sz="1700" b="0" i="0">
-                <a:solidFill>
-                  <a:srgbClr val="202122"/>
-                </a:solidFill>
-                <a:latin typeface="Calibri"/>
-              </a:rPr>
-              <a:t>Assign team roles for one project.</a:t>
-            </a:r>
-          </a:p>
-        </p:txBody>
-      </p:sp>
-      <p:sp>
-        <p:nvSpPr>
-          <p:cNvPr id="17" name="Rounded Rectangle 16"/>
-          <p:cNvSpPr/>
-          <p:nvPr/>
-        </p:nvSpPr>
-        <p:spPr>
-          <a:xfrm>
-            <a:off x="7772400" y="1508760"/>
-            <a:ext cx="3867912" cy="4572000"/>
-          </a:xfrm>
-          <a:prstGeom prst="roundRect">
-            <a:avLst>
-              <a:gd name="adj" fmla="val 8000"/>
-            </a:avLst>
-          </a:prstGeom>
-          <a:solidFill>
-            <a:srgbClr val="EAF3FF"/>
-          </a:solidFill>
-          <a:ln>
-            <a:noFill/>
-          </a:ln>
-          <a:effectLst/>
-        </p:spPr>
-        <p:style>
-          <a:lnRef idx="1">
-            <a:schemeClr val="accent1"/>
-          </a:lnRef>
-          <a:fillRef idx="3">
-            <a:schemeClr val="accent1"/>
-          </a:fillRef>
-          <a:effectRef idx="2">
-            <a:schemeClr val="accent1"/>
-          </a:effectRef>
-          <a:fontRef idx="minor">
-            <a:schemeClr val="lt1"/>
-          </a:fontRef>
-        </p:style>
-        <p:txBody>
-          <a:bodyPr rtlCol="0" anchor="ctr"/>
-          <a:lstStyle/>
-          <a:p/>
-        </p:txBody>
-      </p:sp>
-      <p:sp>
-        <p:nvSpPr>
-          <p:cNvPr id="18" name="TextBox 17"/>
-          <p:cNvSpPr txBox="1"/>
-          <p:nvPr/>
-        </p:nvSpPr>
-        <p:spPr>
-          <a:xfrm>
-            <a:off x="8046720" y="1737360"/>
-            <a:ext cx="3291840" cy="365760"/>
-          </a:xfrm>
-          <a:prstGeom prst="rect">
-            <a:avLst/>
-          </a:prstGeom>
-          <a:noFill/>
-        </p:spPr>
-        <p:txBody>
-          <a:bodyPr wrap="square" anchor="t" lIns="0" rIns="0" tIns="0" bIns="0"/>
-          <a:lstStyle/>
-          <a:p>
-            <a:pPr algn="l"/>
-            <a:r>
-              <a:rPr sz="1300" b="1" i="0">
-                <a:solidFill>
-                  <a:srgbClr val="0645AD"/>
-                </a:solidFill>
-                <a:latin typeface="Calibri"/>
-              </a:rPr>
-              <a:t>SUCCESS CRITERIA</a:t>
-            </a:r>
-          </a:p>
-        </p:txBody>
-      </p:sp>
-      <p:sp>
-        <p:nvSpPr>
-          <p:cNvPr id="19" name="TextBox 18"/>
-          <p:cNvSpPr txBox="1"/>
-          <p:nvPr/>
-        </p:nvSpPr>
-        <p:spPr>
-          <a:xfrm>
-            <a:off x="8046720" y="2240280"/>
-            <a:ext cx="3337560" cy="3657600"/>
-          </a:xfrm>
-          <a:prstGeom prst="rect">
-            <a:avLst/>
-          </a:prstGeom>
-          <a:noFill/>
-        </p:spPr>
-        <p:txBody>
-          <a:bodyPr wrap="square" lIns="0" rIns="0" tIns="0" bIns="0">
-            <a:spAutoFit/>
-          </a:bodyPr>
-          <a:lstStyle/>
-          <a:p>
-            <a:pPr marL="274320" indent="-274320">
-              <a:spcAft>
-                <a:spcPts val="810"/>
-              </a:spcAft>
-              <a:buClr>
-                <a:srgbClr val="0645AD"/>
-              </a:buClr>
-              <a:buFont typeface="Arial"/>
-              <a:buChar char="•"/>
-            </a:pPr>
-            <a:r>
-              <a:rPr sz="1800" b="0">
-                <a:solidFill>
-                  <a:srgbClr val="202122"/>
-                </a:solidFill>
-                <a:latin typeface="Calibri"/>
-              </a:rPr>
-              <a:t>Choice fits the risk and requirements</a:t>
-            </a:r>
-          </a:p>
-          <a:p>
-            <a:pPr marL="274320" indent="-274320">
-              <a:spcAft>
-                <a:spcPts val="810"/>
-              </a:spcAft>
-              <a:buClr>
-                <a:srgbClr val="0645AD"/>
-              </a:buClr>
-              <a:buFont typeface="Arial"/>
-              <a:buChar char="•"/>
-            </a:pPr>
-            <a:r>
-              <a:rPr sz="1800" b="0">
-                <a:solidFill>
-                  <a:srgbClr val="202122"/>
-                </a:solidFill>
-                <a:latin typeface="Calibri"/>
-              </a:rPr>
-              <a:t>Features correctly described</a:t>
-            </a:r>
-          </a:p>
-          <a:p>
-            <a:pPr marL="274320" indent="-274320">
-              <a:spcAft>
-                <a:spcPts val="810"/>
-              </a:spcAft>
-              <a:buClr>
-                <a:srgbClr val="0645AD"/>
-              </a:buClr>
-              <a:buFont typeface="Arial"/>
-              <a:buChar char="•"/>
-            </a:pPr>
-            <a:r>
-              <a:rPr sz="1800" b="0">
-                <a:solidFill>
-                  <a:srgbClr val="202122"/>
-                </a:solidFill>
-                <a:latin typeface="Calibri"/>
-              </a:rPr>
-              <a:t>Roles realistic</a:t>
+              <a:rPr sz="1300" b="0" i="1">
+                <a:solidFill>
+                  <a:srgbClr val="54595D"/>
+                </a:solidFill>
+                <a:latin typeface="Calibri"/>
+              </a:rPr>
+              <a:t>Answer on mini whiteboards or in your book. Answers are in the speaker notes.</a:t>
             </a:r>
           </a:p>
         </p:txBody>
@@ -8181,7 +11083,7 @@
     <p:bg>
       <p:bgPr>
         <a:solidFill>
-          <a:srgbClr val="03306E"/>
+          <a:srgbClr val="FFFFFF"/>
         </a:solidFill>
         <a:effectLst/>
       </p:bgPr>
@@ -8217,7 +11119,7 @@
             <a:r>
               <a:rPr sz="1100" b="1" i="0">
                 <a:solidFill>
-                  <a:srgbClr val="A9C8F0"/>
+                  <a:srgbClr val="54595D"/>
                 </a:solidFill>
                 <a:latin typeface="Calibri"/>
               </a:rPr>
@@ -8250,25 +11152,206 @@
             <a:r>
               <a:rPr sz="3200" b="1" i="0">
                 <a:solidFill>
-                  <a:srgbClr val="FFFFFF"/>
+                  <a:srgbClr val="03306E"/>
                 </a:solidFill>
                 <a:latin typeface="Cambria"/>
               </a:rPr>
-              <a:t>Exit ticket</a:t>
-            </a:r>
-          </a:p>
-        </p:txBody>
-      </p:sp>
-      <p:sp>
-        <p:nvSpPr>
-          <p:cNvPr id="4" name="Oval 3"/>
+              <a:t>Other methodologies</a:t>
+            </a:r>
+          </a:p>
+        </p:txBody>
+      </p:sp>
+      <p:sp>
+        <p:nvSpPr>
+          <p:cNvPr id="4" name="TextBox 3"/>
+          <p:cNvSpPr txBox="1"/>
+          <p:nvPr/>
+        </p:nvSpPr>
+        <p:spPr>
+          <a:xfrm>
+            <a:off x="548640" y="6446520"/>
+            <a:ext cx="8229600" cy="274320"/>
+          </a:xfrm>
+          <a:prstGeom prst="rect">
+            <a:avLst/>
+          </a:prstGeom>
+          <a:noFill/>
+        </p:spPr>
+        <p:txBody>
+          <a:bodyPr wrap="square" anchor="t" lIns="0" rIns="0" tIns="0" bIns="0"/>
+          <a:lstStyle/>
+          <a:p>
+            <a:pPr algn="l"/>
+            <a:r>
+              <a:rPr sz="1000" b="0" i="0">
+                <a:solidFill>
+                  <a:srgbClr val="54595D"/>
+                </a:solidFill>
+                <a:latin typeface="Calibri"/>
+              </a:rPr>
+              <a:t>Digital Software Development T Level  ·  Team Roles and Project Methodologies</a:t>
+            </a:r>
+          </a:p>
+        </p:txBody>
+      </p:sp>
+      <p:sp>
+        <p:nvSpPr>
+          <p:cNvPr id="5" name="TextBox 4"/>
+          <p:cNvSpPr txBox="1"/>
+          <p:nvPr/>
+        </p:nvSpPr>
+        <p:spPr>
+          <a:xfrm>
+            <a:off x="10728655" y="6446520"/>
+            <a:ext cx="914400" cy="274320"/>
+          </a:xfrm>
+          <a:prstGeom prst="rect">
+            <a:avLst/>
+          </a:prstGeom>
+          <a:noFill/>
+        </p:spPr>
+        <p:txBody>
+          <a:bodyPr wrap="square" anchor="t" lIns="0" rIns="0" tIns="0" bIns="0"/>
+          <a:lstStyle/>
+          <a:p>
+            <a:pPr algn="r"/>
+            <a:r>
+              <a:rPr sz="1000" b="0" i="0">
+                <a:solidFill>
+                  <a:srgbClr val="54595D"/>
+                </a:solidFill>
+                <a:latin typeface="Calibri"/>
+              </a:rPr>
+              <a:t>9</a:t>
+            </a:r>
+          </a:p>
+        </p:txBody>
+      </p:sp>
+      <p:sp>
+        <p:nvSpPr>
+          <p:cNvPr id="6" name="TextBox 5"/>
+          <p:cNvSpPr txBox="1"/>
+          <p:nvPr/>
+        </p:nvSpPr>
+        <p:spPr>
+          <a:xfrm>
+            <a:off x="548640" y="1554480"/>
+            <a:ext cx="6720840" cy="4617720"/>
+          </a:xfrm>
+          <a:prstGeom prst="rect">
+            <a:avLst/>
+          </a:prstGeom>
+          <a:noFill/>
+        </p:spPr>
+        <p:txBody>
+          <a:bodyPr wrap="square" lIns="0" rIns="0" tIns="0" bIns="0">
+            <a:spAutoFit/>
+          </a:bodyPr>
+          <a:lstStyle/>
+          <a:p>
+            <a:pPr>
+              <a:spcAft>
+                <a:spcPts val="1200"/>
+              </a:spcAft>
+            </a:pPr>
+            <a:r>
+              <a:rPr sz="2000" b="0">
+                <a:solidFill>
+                  <a:srgbClr val="202122"/>
+                </a:solidFill>
+                <a:latin typeface="Calibri"/>
+              </a:rPr>
+              <a:t>Rapid Application Development (RAD) builds prototypes quickly and improves them systematically. It values features over polish, reuses a lot of existing code and suits small to medium projects.</a:t>
+            </a:r>
+          </a:p>
+          <a:p>
+            <a:pPr>
+              <a:spcAft>
+                <a:spcPts val="1200"/>
+              </a:spcAft>
+            </a:pPr>
+            <a:r>
+              <a:rPr sz="2000" b="0">
+                <a:solidFill>
+                  <a:srgbClr val="202122"/>
+                </a:solidFill>
+                <a:latin typeface="Calibri"/>
+              </a:rPr>
+              <a:t>Lean cuts waste such as unneeded features, repeated tasks and poor communication, delays decisions to the last responsible moment, and delivers in short cycles. It suits small teams with limited resources.</a:t>
+            </a:r>
+          </a:p>
+          <a:p>
+            <a:pPr>
+              <a:spcAft>
+                <a:spcPts val="1200"/>
+              </a:spcAft>
+            </a:pPr>
+            <a:r>
+              <a:rPr sz="2000" b="0">
+                <a:solidFill>
+                  <a:srgbClr val="202122"/>
+                </a:solidFill>
+                <a:latin typeface="Calibri"/>
+              </a:rPr>
+              <a:t>User Centred Design (UCD) keeps users at the centre. It's empathetic, iterative and interdisciplinary: understand the context, specify requirements, design, then assess against requirements, and repeat.</a:t>
+            </a:r>
+          </a:p>
+        </p:txBody>
+      </p:sp>
+      <p:sp>
+        <p:nvSpPr>
+          <p:cNvPr id="7" name="Rounded Rectangle 6"/>
           <p:cNvSpPr/>
           <p:nvPr/>
         </p:nvSpPr>
         <p:spPr>
           <a:xfrm>
-            <a:off x="548640" y="1737360"/>
-            <a:ext cx="502920" cy="502920"/>
+            <a:off x="7772400" y="1554480"/>
+            <a:ext cx="3867912" cy="4526280"/>
+          </a:xfrm>
+          <a:prstGeom prst="roundRect">
+            <a:avLst>
+              <a:gd name="adj" fmla="val 8000"/>
+            </a:avLst>
+          </a:prstGeom>
+          <a:solidFill>
+            <a:srgbClr val="03306E"/>
+          </a:solidFill>
+          <a:ln>
+            <a:noFill/>
+          </a:ln>
+          <a:effectLst/>
+        </p:spPr>
+        <p:style>
+          <a:lnRef idx="1">
+            <a:schemeClr val="accent1"/>
+          </a:lnRef>
+          <a:fillRef idx="3">
+            <a:schemeClr val="accent1"/>
+          </a:fillRef>
+          <a:effectRef idx="2">
+            <a:schemeClr val="accent1"/>
+          </a:effectRef>
+          <a:fontRef idx="minor">
+            <a:schemeClr val="lt1"/>
+          </a:fontRef>
+        </p:style>
+        <p:txBody>
+          <a:bodyPr rtlCol="0" anchor="ctr"/>
+          <a:lstStyle/>
+          <a:p/>
+        </p:txBody>
+      </p:sp>
+      <p:sp>
+        <p:nvSpPr>
+          <p:cNvPr id="8" name="Oval 7"/>
+          <p:cNvSpPr/>
+          <p:nvPr/>
+        </p:nvSpPr>
+        <p:spPr>
+          <a:xfrm>
+            <a:off x="8046720" y="1828800"/>
+            <a:ext cx="548640" cy="548640"/>
           </a:xfrm>
           <a:prstGeom prst="ellipse">
             <a:avLst/>
@@ -8301,185 +11384,13 @@
           <a:p>
             <a:pPr algn="ctr"/>
             <a:r>
-              <a:rPr sz="1700" b="1">
+              <a:rPr sz="1300" b="1">
                 <a:solidFill>
                   <a:srgbClr val="202122"/>
                 </a:solidFill>
                 <a:latin typeface="Calibri"/>
               </a:rPr>
-              <a:t>1</a:t>
-            </a:r>
-          </a:p>
-        </p:txBody>
-      </p:sp>
-      <p:sp>
-        <p:nvSpPr>
-          <p:cNvPr id="5" name="TextBox 4"/>
-          <p:cNvSpPr txBox="1"/>
-          <p:nvPr/>
-        </p:nvSpPr>
-        <p:spPr>
-          <a:xfrm>
-            <a:off x="1325880" y="1645920"/>
-            <a:ext cx="6583680" cy="822960"/>
-          </a:xfrm>
-          <a:prstGeom prst="rect">
-            <a:avLst/>
-          </a:prstGeom>
-          <a:noFill/>
-        </p:spPr>
-        <p:txBody>
-          <a:bodyPr wrap="square" anchor="ctr" lIns="0" rIns="0" tIns="0" bIns="0"/>
-          <a:lstStyle/>
-          <a:p>
-            <a:pPr algn="l"/>
-            <a:r>
-              <a:rPr sz="2000" b="0" i="0">
-                <a:solidFill>
-                  <a:srgbClr val="FFFFFF"/>
-                </a:solidFill>
-                <a:latin typeface="Calibri"/>
-              </a:rPr>
-              <a:t>When is Waterfall the right choice?</a:t>
-            </a:r>
-          </a:p>
-        </p:txBody>
-      </p:sp>
-      <p:sp>
-        <p:nvSpPr>
-          <p:cNvPr id="6" name="Oval 5"/>
-          <p:cNvSpPr/>
-          <p:nvPr/>
-        </p:nvSpPr>
-        <p:spPr>
-          <a:xfrm>
-            <a:off x="548640" y="2697480"/>
-            <a:ext cx="502920" cy="502920"/>
-          </a:xfrm>
-          <a:prstGeom prst="ellipse">
-            <a:avLst/>
-          </a:prstGeom>
-          <a:solidFill>
-            <a:srgbClr val="33C17A"/>
-          </a:solidFill>
-          <a:ln>
-            <a:noFill/>
-          </a:ln>
-          <a:effectLst/>
-        </p:spPr>
-        <p:style>
-          <a:lnRef idx="1">
-            <a:schemeClr val="accent1"/>
-          </a:lnRef>
-          <a:fillRef idx="3">
-            <a:schemeClr val="accent1"/>
-          </a:fillRef>
-          <a:effectRef idx="2">
-            <a:schemeClr val="accent1"/>
-          </a:effectRef>
-          <a:fontRef idx="minor">
-            <a:schemeClr val="lt1"/>
-          </a:fontRef>
-        </p:style>
-        <p:txBody>
-          <a:bodyPr rtlCol="0" anchor="ctr" lIns="0" rIns="0" tIns="0" bIns="0"/>
-          <a:lstStyle/>
-          <a:p>
-            <a:pPr algn="ctr"/>
-            <a:r>
-              <a:rPr sz="1700" b="1">
-                <a:solidFill>
-                  <a:srgbClr val="202122"/>
-                </a:solidFill>
-                <a:latin typeface="Calibri"/>
-              </a:rPr>
-              <a:t>2</a:t>
-            </a:r>
-          </a:p>
-        </p:txBody>
-      </p:sp>
-      <p:sp>
-        <p:nvSpPr>
-          <p:cNvPr id="7" name="TextBox 6"/>
-          <p:cNvSpPr txBox="1"/>
-          <p:nvPr/>
-        </p:nvSpPr>
-        <p:spPr>
-          <a:xfrm>
-            <a:off x="1325880" y="2606040"/>
-            <a:ext cx="6583680" cy="822960"/>
-          </a:xfrm>
-          <a:prstGeom prst="rect">
-            <a:avLst/>
-          </a:prstGeom>
-          <a:noFill/>
-        </p:spPr>
-        <p:txBody>
-          <a:bodyPr wrap="square" anchor="ctr" lIns="0" rIns="0" tIns="0" bIns="0"/>
-          <a:lstStyle/>
-          <a:p>
-            <a:pPr algn="l"/>
-            <a:r>
-              <a:rPr sz="2000" b="0" i="0">
-                <a:solidFill>
-                  <a:srgbClr val="FFFFFF"/>
-                </a:solidFill>
-                <a:latin typeface="Calibri"/>
-              </a:rPr>
-              <a:t>What does a UX designer do?</a:t>
-            </a:r>
-          </a:p>
-        </p:txBody>
-      </p:sp>
-      <p:sp>
-        <p:nvSpPr>
-          <p:cNvPr id="8" name="Oval 7"/>
-          <p:cNvSpPr/>
-          <p:nvPr/>
-        </p:nvSpPr>
-        <p:spPr>
-          <a:xfrm>
-            <a:off x="548640" y="3657600"/>
-            <a:ext cx="502920" cy="502920"/>
-          </a:xfrm>
-          <a:prstGeom prst="ellipse">
-            <a:avLst/>
-          </a:prstGeom>
-          <a:solidFill>
-            <a:srgbClr val="33C17A"/>
-          </a:solidFill>
-          <a:ln>
-            <a:noFill/>
-          </a:ln>
-          <a:effectLst/>
-        </p:spPr>
-        <p:style>
-          <a:lnRef idx="1">
-            <a:schemeClr val="accent1"/>
-          </a:lnRef>
-          <a:fillRef idx="3">
-            <a:schemeClr val="accent1"/>
-          </a:fillRef>
-          <a:effectRef idx="2">
-            <a:schemeClr val="accent1"/>
-          </a:effectRef>
-          <a:fontRef idx="minor">
-            <a:schemeClr val="lt1"/>
-          </a:fontRef>
-        </p:style>
-        <p:txBody>
-          <a:bodyPr rtlCol="0" anchor="ctr" lIns="0" rIns="0" tIns="0" bIns="0"/>
-          <a:lstStyle/>
-          <a:p>
-            <a:pPr algn="ctr"/>
-            <a:r>
-              <a:rPr sz="1700" b="1">
-                <a:solidFill>
-                  <a:srgbClr val="202122"/>
-                </a:solidFill>
-                <a:latin typeface="Calibri"/>
-              </a:rPr>
-              <a:t>3</a:t>
+              <a:t>e.g.</a:t>
             </a:r>
           </a:p>
         </p:txBody>
@@ -8492,8 +11403,8 @@
         </p:nvSpPr>
         <p:spPr>
           <a:xfrm>
-            <a:off x="1325880" y="3566160"/>
-            <a:ext cx="6583680" cy="822960"/>
+            <a:off x="8046720" y="2560320"/>
+            <a:ext cx="3291840" cy="365760"/>
           </a:xfrm>
           <a:prstGeom prst="rect">
             <a:avLst/>
@@ -8501,194 +11412,51 @@
           <a:noFill/>
         </p:spPr>
         <p:txBody>
-          <a:bodyPr wrap="square" anchor="ctr" lIns="0" rIns="0" tIns="0" bIns="0"/>
+          <a:bodyPr wrap="square" anchor="t" lIns="0" rIns="0" tIns="0" bIns="0"/>
           <a:lstStyle/>
           <a:p>
             <a:pPr algn="l"/>
             <a:r>
-              <a:rPr sz="2000" b="0" i="0">
+              <a:rPr sz="1300" b="1" i="0">
+                <a:solidFill>
+                  <a:srgbClr val="A9C8F0"/>
+                </a:solidFill>
+                <a:latin typeface="Calibri"/>
+              </a:rPr>
+              <a:t>EXAMPLE</a:t>
+            </a:r>
+          </a:p>
+        </p:txBody>
+      </p:sp>
+      <p:sp>
+        <p:nvSpPr>
+          <p:cNvPr id="10" name="TextBox 9"/>
+          <p:cNvSpPr txBox="1"/>
+          <p:nvPr/>
+        </p:nvSpPr>
+        <p:spPr>
+          <a:xfrm>
+            <a:off x="8046720" y="2971800"/>
+            <a:ext cx="3291840" cy="2971800"/>
+          </a:xfrm>
+          <a:prstGeom prst="rect">
+            <a:avLst/>
+          </a:prstGeom>
+          <a:noFill/>
+        </p:spPr>
+        <p:txBody>
+          <a:bodyPr wrap="square" anchor="t" lIns="0" rIns="0" tIns="0" bIns="0"/>
+          <a:lstStyle/>
+          <a:p>
+            <a:pPr algn="l"/>
+            <a:r>
+              <a:rPr sz="1900" b="0" i="0">
                 <a:solidFill>
                   <a:srgbClr val="FFFFFF"/>
                 </a:solidFill>
-                <a:latin typeface="Calibri"/>
-              </a:rPr>
-              <a:t>Why does Agile suit changing requirements?</a:t>
-            </a:r>
-          </a:p>
-        </p:txBody>
-      </p:sp>
-      <p:sp>
-        <p:nvSpPr>
-          <p:cNvPr id="10" name="Rounded Rectangle 9"/>
-          <p:cNvSpPr/>
-          <p:nvPr/>
-        </p:nvSpPr>
-        <p:spPr>
-          <a:xfrm>
-            <a:off x="8229600" y="1645920"/>
-            <a:ext cx="3410712" cy="2926080"/>
-          </a:xfrm>
-          <a:prstGeom prst="roundRect">
-            <a:avLst>
-              <a:gd name="adj" fmla="val 8000"/>
-            </a:avLst>
-          </a:prstGeom>
-          <a:solidFill>
-            <a:srgbClr val="0645AD"/>
-          </a:solidFill>
-          <a:ln>
-            <a:noFill/>
-          </a:ln>
-          <a:effectLst/>
-        </p:spPr>
-        <p:style>
-          <a:lnRef idx="1">
-            <a:schemeClr val="accent1"/>
-          </a:lnRef>
-          <a:fillRef idx="3">
-            <a:schemeClr val="accent1"/>
-          </a:fillRef>
-          <a:effectRef idx="2">
-            <a:schemeClr val="accent1"/>
-          </a:effectRef>
-          <a:fontRef idx="minor">
-            <a:schemeClr val="lt1"/>
-          </a:fontRef>
-        </p:style>
-        <p:txBody>
-          <a:bodyPr rtlCol="0" anchor="ctr"/>
-          <a:lstStyle/>
-          <a:p/>
-        </p:txBody>
-      </p:sp>
-      <p:sp>
-        <p:nvSpPr>
-          <p:cNvPr id="11" name="TextBox 10"/>
-          <p:cNvSpPr txBox="1"/>
-          <p:nvPr/>
-        </p:nvSpPr>
-        <p:spPr>
-          <a:xfrm>
-            <a:off x="8503920" y="1874519"/>
-            <a:ext cx="2926080" cy="365760"/>
-          </a:xfrm>
-          <a:prstGeom prst="rect">
-            <a:avLst/>
-          </a:prstGeom>
-          <a:noFill/>
-        </p:spPr>
-        <p:txBody>
-          <a:bodyPr wrap="square" anchor="t" lIns="0" rIns="0" tIns="0" bIns="0"/>
-          <a:lstStyle/>
-          <a:p>
-            <a:pPr algn="l"/>
-            <a:r>
-              <a:rPr sz="1300" b="1" i="0">
-                <a:solidFill>
-                  <a:srgbClr val="A9C8F0"/>
-                </a:solidFill>
-                <a:latin typeface="Calibri"/>
-              </a:rPr>
-              <a:t>REVISE THIS TOPIC</a:t>
-            </a:r>
-          </a:p>
-        </p:txBody>
-      </p:sp>
-      <p:sp>
-        <p:nvSpPr>
-          <p:cNvPr id="12" name="TextBox 11"/>
-          <p:cNvSpPr txBox="1"/>
-          <p:nvPr/>
-        </p:nvSpPr>
-        <p:spPr>
-          <a:xfrm>
-            <a:off x="8503920" y="2286000"/>
-            <a:ext cx="2926080" cy="548640"/>
-          </a:xfrm>
-          <a:prstGeom prst="rect">
-            <a:avLst/>
-          </a:prstGeom>
-          <a:noFill/>
-        </p:spPr>
-        <p:txBody>
-          <a:bodyPr wrap="square" anchor="t" lIns="0" rIns="0" tIns="0" bIns="0"/>
-          <a:lstStyle/>
-          <a:p>
-            <a:pPr algn="l"/>
-            <a:r>
-              <a:rPr sz="1400" b="0" i="0">
-                <a:solidFill>
-                  <a:srgbClr val="FFFFFF"/>
-                </a:solidFill>
-                <a:latin typeface="Calibri"/>
-              </a:rPr>
-              <a:t>Revision notes for this lesson are on the study wiki:</a:t>
-            </a:r>
-          </a:p>
-        </p:txBody>
-      </p:sp>
-      <p:sp>
-        <p:nvSpPr>
-          <p:cNvPr id="13" name="TextBox 12"/>
-          <p:cNvSpPr txBox="1"/>
-          <p:nvPr/>
-        </p:nvSpPr>
-        <p:spPr>
-          <a:xfrm>
-            <a:off x="8503920" y="2926080"/>
-            <a:ext cx="2926080" cy="1463040"/>
-          </a:xfrm>
-          <a:prstGeom prst="rect">
-            <a:avLst/>
-          </a:prstGeom>
-          <a:noFill/>
-        </p:spPr>
-        <p:txBody>
-          <a:bodyPr wrap="square" anchor="t" lIns="0" rIns="0" tIns="0" bIns="0"/>
-          <a:lstStyle/>
-          <a:p>
-            <a:pPr algn="l"/>
-            <a:r>
-              <a:rPr sz="2000" b="1" i="0">
-                <a:solidFill>
-                  <a:srgbClr val="FFFFFF"/>
-                </a:solidFill>
                 <a:latin typeface="Cambria"/>
               </a:rPr>
-              <a:t>Analyse a Problem</a:t>
-            </a:r>
-          </a:p>
-        </p:txBody>
-      </p:sp>
-      <p:sp>
-        <p:nvSpPr>
-          <p:cNvPr id="14" name="TextBox 13"/>
-          <p:cNvSpPr txBox="1"/>
-          <p:nvPr/>
-        </p:nvSpPr>
-        <p:spPr>
-          <a:xfrm>
-            <a:off x="548640" y="5669280"/>
-            <a:ext cx="11094415" cy="548640"/>
-          </a:xfrm>
-          <a:prstGeom prst="rect">
-            <a:avLst/>
-          </a:prstGeom>
-          <a:noFill/>
-        </p:spPr>
-        <p:txBody>
-          <a:bodyPr wrap="square" anchor="t" lIns="0" rIns="0" tIns="0" bIns="0"/>
-          <a:lstStyle/>
-          <a:p>
-            <a:pPr algn="l"/>
-            <a:r>
-              <a:rPr sz="1200" b="0" i="0">
-                <a:solidFill>
-                  <a:srgbClr val="A9C8F0"/>
-                </a:solidFill>
-                <a:latin typeface="Calibri"/>
-              </a:rPr>
-              <a:t>https://lana6478.github.io/T-level-Digital-Software-Development/#/02-occupational-specialism/01-analyse-a-problem.md</a:t>
+              <a:t>A charity building an accessible website for older users would use UCD: testing each design with real older users before moving on.</a:t>
             </a:r>
           </a:p>
         </p:txBody>
